--- a/type model.pptx
+++ b/type model.pptx
@@ -250,7 +250,7 @@
           <a:p>
             <a:fld id="{9394FC15-C62C-47D9-AA63-E5A366B8138A}" type="datetimeFigureOut">
               <a:rPr lang="en-US" smtClean="0"/>
-              <a:t>2/19/2023</a:t>
+              <a:t>2/22/2023</a:t>
             </a:fld>
             <a:endParaRPr lang="en-US" dirty="0"/>
           </a:p>
@@ -420,7 +420,7 @@
           <a:p>
             <a:fld id="{9394FC15-C62C-47D9-AA63-E5A366B8138A}" type="datetimeFigureOut">
               <a:rPr lang="en-US" smtClean="0"/>
-              <a:t>2/19/2023</a:t>
+              <a:t>2/22/2023</a:t>
             </a:fld>
             <a:endParaRPr lang="en-US" dirty="0"/>
           </a:p>
@@ -600,7 +600,7 @@
           <a:p>
             <a:fld id="{9394FC15-C62C-47D9-AA63-E5A366B8138A}" type="datetimeFigureOut">
               <a:rPr lang="en-US" smtClean="0"/>
-              <a:t>2/19/2023</a:t>
+              <a:t>2/22/2023</a:t>
             </a:fld>
             <a:endParaRPr lang="en-US" dirty="0"/>
           </a:p>
@@ -770,7 +770,7 @@
           <a:p>
             <a:fld id="{9394FC15-C62C-47D9-AA63-E5A366B8138A}" type="datetimeFigureOut">
               <a:rPr lang="en-US" smtClean="0"/>
-              <a:t>2/19/2023</a:t>
+              <a:t>2/22/2023</a:t>
             </a:fld>
             <a:endParaRPr lang="en-US" dirty="0"/>
           </a:p>
@@ -1016,7 +1016,7 @@
           <a:p>
             <a:fld id="{9394FC15-C62C-47D9-AA63-E5A366B8138A}" type="datetimeFigureOut">
               <a:rPr lang="en-US" smtClean="0"/>
-              <a:t>2/19/2023</a:t>
+              <a:t>2/22/2023</a:t>
             </a:fld>
             <a:endParaRPr lang="en-US" dirty="0"/>
           </a:p>
@@ -1248,7 +1248,7 @@
           <a:p>
             <a:fld id="{9394FC15-C62C-47D9-AA63-E5A366B8138A}" type="datetimeFigureOut">
               <a:rPr lang="en-US" smtClean="0"/>
-              <a:t>2/19/2023</a:t>
+              <a:t>2/22/2023</a:t>
             </a:fld>
             <a:endParaRPr lang="en-US" dirty="0"/>
           </a:p>
@@ -1615,7 +1615,7 @@
           <a:p>
             <a:fld id="{9394FC15-C62C-47D9-AA63-E5A366B8138A}" type="datetimeFigureOut">
               <a:rPr lang="en-US" smtClean="0"/>
-              <a:t>2/19/2023</a:t>
+              <a:t>2/22/2023</a:t>
             </a:fld>
             <a:endParaRPr lang="en-US" dirty="0"/>
           </a:p>
@@ -1733,7 +1733,7 @@
           <a:p>
             <a:fld id="{9394FC15-C62C-47D9-AA63-E5A366B8138A}" type="datetimeFigureOut">
               <a:rPr lang="en-US" smtClean="0"/>
-              <a:t>2/19/2023</a:t>
+              <a:t>2/22/2023</a:t>
             </a:fld>
             <a:endParaRPr lang="en-US" dirty="0"/>
           </a:p>
@@ -1828,7 +1828,7 @@
           <a:p>
             <a:fld id="{9394FC15-C62C-47D9-AA63-E5A366B8138A}" type="datetimeFigureOut">
               <a:rPr lang="en-US" smtClean="0"/>
-              <a:t>2/19/2023</a:t>
+              <a:t>2/22/2023</a:t>
             </a:fld>
             <a:endParaRPr lang="en-US" dirty="0"/>
           </a:p>
@@ -2105,7 +2105,7 @@
           <a:p>
             <a:fld id="{9394FC15-C62C-47D9-AA63-E5A366B8138A}" type="datetimeFigureOut">
               <a:rPr lang="en-US" smtClean="0"/>
-              <a:t>2/19/2023</a:t>
+              <a:t>2/22/2023</a:t>
             </a:fld>
             <a:endParaRPr lang="en-US" dirty="0"/>
           </a:p>
@@ -2358,7 +2358,7 @@
           <a:p>
             <a:fld id="{9394FC15-C62C-47D9-AA63-E5A366B8138A}" type="datetimeFigureOut">
               <a:rPr lang="en-US" smtClean="0"/>
-              <a:t>2/19/2023</a:t>
+              <a:t>2/22/2023</a:t>
             </a:fld>
             <a:endParaRPr lang="en-US" dirty="0"/>
           </a:p>
@@ -2571,7 +2571,7 @@
           <a:p>
             <a:fld id="{9394FC15-C62C-47D9-AA63-E5A366B8138A}" type="datetimeFigureOut">
               <a:rPr lang="en-US" smtClean="0"/>
-              <a:t>2/19/2023</a:t>
+              <a:t>2/22/2023</a:t>
             </a:fld>
             <a:endParaRPr lang="en-US" dirty="0"/>
           </a:p>
@@ -3649,15 +3649,7 @@
                   <a:schemeClr val="tx1"/>
                 </a:solidFill>
               </a:rPr>
-              <a:t>Elasti</a:t>
-            </a:r>
-            <a:r>
-              <a:rPr lang="en-US" sz="1400" smtClean="0">
-                <a:solidFill>
-                  <a:schemeClr val="tx1"/>
-                </a:solidFill>
-              </a:rPr>
-              <a:t>c</a:t>
+              <a:t>Elastic</a:t>
             </a:r>
             <a:r>
               <a:rPr lang="pt-BR" sz="1400" smtClean="0">
@@ -3858,11 +3850,6 @@
               </a:rPr>
               <a:t>Unsupervised</a:t>
             </a:r>
-            <a:endParaRPr lang="en-US" dirty="0">
-              <a:solidFill>
-                <a:schemeClr val="tx1"/>
-              </a:solidFill>
-            </a:endParaRPr>
           </a:p>
         </p:txBody>
       </p:sp>
@@ -5226,11 +5213,7 @@
             </a:pPr>
             <a:r>
               <a:rPr lang="pt-BR" sz="1400"/>
-              <a:t>Tente usar o RFE caso tenha recursos computacionais </a:t>
-            </a:r>
-            <a:r>
-              <a:rPr lang="pt-BR" sz="1400"/>
-              <a:t>para </a:t>
+              <a:t>Tente usar o RFE caso tenha recursos computacionais para </a:t>
             </a:r>
             <a:r>
               <a:rPr lang="pt-BR" sz="1400" smtClean="0"/>
@@ -5326,11 +5309,7 @@
             </a:r>
             <a:r>
               <a:rPr lang="pt-BR" sz="1400"/>
-              <a:t>esteja trabalhando com features categóricas </a:t>
-            </a:r>
-            <a:r>
-              <a:rPr lang="pt-BR" sz="1400"/>
-              <a:t>utilize </a:t>
+              <a:t>esteja trabalhando com features categóricas utilize </a:t>
             </a:r>
             <a:r>
               <a:rPr lang="pt-BR" sz="1400" smtClean="0"/>
@@ -7597,7 +7576,7 @@
               <a:buChar char="•"/>
             </a:pPr>
             <a:r>
-              <a:rPr lang="en-US" sz="1600" dirty="0" smtClean="0">
+              <a:rPr lang="en-US" sz="1500" dirty="0" smtClean="0">
                 <a:solidFill>
                   <a:schemeClr val="tx1"/>
                 </a:solidFill>
@@ -7611,7 +7590,7 @@
               <a:buChar char="•"/>
             </a:pPr>
             <a:r>
-              <a:rPr lang="en-US" sz="1600" dirty="0" smtClean="0">
+              <a:rPr lang="en-US" sz="1500" dirty="0" smtClean="0">
                 <a:solidFill>
                   <a:schemeClr val="tx1"/>
                 </a:solidFill>
@@ -7625,7 +7604,7 @@
               <a:buChar char="•"/>
             </a:pPr>
             <a:r>
-              <a:rPr lang="en-US" sz="1600" dirty="0" smtClean="0">
+              <a:rPr lang="en-US" sz="1500" dirty="0" smtClean="0">
                 <a:solidFill>
                   <a:schemeClr val="tx1"/>
                 </a:solidFill>
@@ -7639,7 +7618,7 @@
               <a:buChar char="•"/>
             </a:pPr>
             <a:r>
-              <a:rPr lang="en-US" sz="1600" dirty="0" smtClean="0">
+              <a:rPr lang="en-US" sz="1500" dirty="0" smtClean="0">
                 <a:solidFill>
                   <a:schemeClr val="tx1"/>
                 </a:solidFill>
@@ -7653,7 +7632,7 @@
               <a:buChar char="•"/>
             </a:pPr>
             <a:r>
-              <a:rPr lang="en-US" sz="1600" dirty="0" smtClean="0">
+              <a:rPr lang="en-US" sz="1500" dirty="0" smtClean="0">
                 <a:solidFill>
                   <a:schemeClr val="tx1"/>
                 </a:solidFill>
@@ -7667,14 +7646,88 @@
               <a:buChar char="•"/>
             </a:pPr>
             <a:r>
-              <a:rPr lang="en-US" sz="1600" dirty="0" smtClean="0">
-                <a:solidFill>
-                  <a:schemeClr val="tx1"/>
-                </a:solidFill>
-              </a:rPr>
-              <a:t>Decision tree</a:t>
-            </a:r>
-            <a:endParaRPr lang="en-US" sz="1600" dirty="0">
+              <a:rPr lang="en-US" sz="1500" dirty="0" smtClean="0">
+                <a:solidFill>
+                  <a:schemeClr val="tx1"/>
+                </a:solidFill>
+              </a:rPr>
+              <a:t>Decision </a:t>
+            </a:r>
+            <a:r>
+              <a:rPr lang="en-US" sz="1500" dirty="0" smtClean="0">
+                <a:solidFill>
+                  <a:schemeClr val="tx1"/>
+                </a:solidFill>
+              </a:rPr>
+              <a:t>tree</a:t>
+            </a:r>
+          </a:p>
+          <a:p>
+            <a:pPr marL="285750" indent="-285750">
+              <a:buFont typeface="Arial" panose="020B0604020202020204" pitchFamily="34" charset="0"/>
+              <a:buChar char="•"/>
+            </a:pPr>
+            <a:r>
+              <a:rPr lang="en-US" sz="1500" dirty="0" smtClean="0">
+                <a:solidFill>
+                  <a:schemeClr val="tx1"/>
+                </a:solidFill>
+              </a:rPr>
+              <a:t>Random Forest</a:t>
+            </a:r>
+          </a:p>
+          <a:p>
+            <a:pPr marL="285750" indent="-285750">
+              <a:buFont typeface="Arial" panose="020B0604020202020204" pitchFamily="34" charset="0"/>
+              <a:buChar char="•"/>
+            </a:pPr>
+            <a:r>
+              <a:rPr lang="en-US" sz="1500" dirty="0" smtClean="0">
+                <a:solidFill>
+                  <a:schemeClr val="tx1"/>
+                </a:solidFill>
+              </a:rPr>
+              <a:t>Gradient Boosting</a:t>
+            </a:r>
+          </a:p>
+          <a:p>
+            <a:pPr marL="285750" indent="-285750">
+              <a:buFont typeface="Arial" panose="020B0604020202020204" pitchFamily="34" charset="0"/>
+              <a:buChar char="•"/>
+            </a:pPr>
+            <a:r>
+              <a:rPr lang="en-US" sz="1500" dirty="0">
+                <a:solidFill>
+                  <a:schemeClr val="tx1"/>
+                </a:solidFill>
+              </a:rPr>
+              <a:t>Nearest </a:t>
+            </a:r>
+            <a:r>
+              <a:rPr lang="en-US" sz="1500" dirty="0">
+                <a:solidFill>
+                  <a:schemeClr val="tx1"/>
+                </a:solidFill>
+              </a:rPr>
+              <a:t>Neighbors</a:t>
+            </a:r>
+            <a:r>
+              <a:rPr lang="en-US" sz="1500" dirty="0">
+                <a:solidFill>
+                  <a:schemeClr val="tx1"/>
+                </a:solidFill>
+              </a:rPr>
+              <a:t> </a:t>
+            </a:r>
+            <a:r>
+              <a:rPr lang="en-US" sz="1500" dirty="0" err="1">
+                <a:solidFill>
+                  <a:schemeClr val="tx1"/>
+                </a:solidFill>
+              </a:rPr>
+              <a:t>regressor</a:t>
+            </a:r>
+            <a:endParaRPr lang="en-US" sz="1500" dirty="0">
               <a:solidFill>
                 <a:schemeClr val="tx1"/>
               </a:solidFill>
@@ -7730,7 +7783,7 @@
               <a:buChar char="•"/>
             </a:pPr>
             <a:r>
-              <a:rPr lang="en-US" sz="1600" dirty="0" smtClean="0">
+              <a:rPr lang="en-US" sz="1500" dirty="0" smtClean="0">
                 <a:solidFill>
                   <a:schemeClr val="tx1"/>
                 </a:solidFill>
@@ -7744,7 +7797,7 @@
               <a:buChar char="•"/>
             </a:pPr>
             <a:r>
-              <a:rPr lang="en-US" sz="1600" dirty="0" smtClean="0">
+              <a:rPr lang="en-US" sz="1500" dirty="0" smtClean="0">
                 <a:solidFill>
                   <a:schemeClr val="tx1"/>
                 </a:solidFill>
@@ -7758,7 +7811,7 @@
               <a:buChar char="•"/>
             </a:pPr>
             <a:r>
-              <a:rPr lang="en-US" sz="1600" dirty="0" smtClean="0">
+              <a:rPr lang="en-US" sz="1500" dirty="0" smtClean="0">
                 <a:solidFill>
                   <a:schemeClr val="tx1"/>
                 </a:solidFill>
@@ -7766,7 +7819,7 @@
               <a:t>Decision</a:t>
             </a:r>
             <a:r>
-              <a:rPr lang="pt-BR" sz="1600" dirty="0" smtClean="0">
+              <a:rPr lang="pt-BR" sz="1500" dirty="0" smtClean="0">
                 <a:solidFill>
                   <a:schemeClr val="tx1"/>
                 </a:solidFill>
@@ -7774,7 +7827,7 @@
               <a:t> </a:t>
             </a:r>
             <a:r>
-              <a:rPr lang="en-US" sz="1600" dirty="0" smtClean="0">
+              <a:rPr lang="en-US" sz="1500" dirty="0" smtClean="0">
                 <a:solidFill>
                   <a:schemeClr val="tx1"/>
                 </a:solidFill>
@@ -7788,7 +7841,7 @@
               <a:buChar char="•"/>
             </a:pPr>
             <a:r>
-              <a:rPr lang="en-US" sz="1600" dirty="0" smtClean="0">
+              <a:rPr lang="en-US" sz="1500" dirty="0" smtClean="0">
                 <a:solidFill>
                   <a:schemeClr val="tx1"/>
                 </a:solidFill>
@@ -7802,7 +7855,7 @@
               <a:buChar char="•"/>
             </a:pPr>
             <a:r>
-              <a:rPr lang="en-US" sz="1600" dirty="0" smtClean="0">
+              <a:rPr lang="en-US" sz="1500" dirty="0" smtClean="0">
                 <a:solidFill>
                   <a:schemeClr val="tx1"/>
                 </a:solidFill>
@@ -7816,14 +7869,14 @@
               <a:buChar char="•"/>
             </a:pPr>
             <a:r>
-              <a:rPr lang="en-US" sz="1600" dirty="0" smtClean="0">
+              <a:rPr lang="en-US" sz="1500" dirty="0" smtClean="0">
                 <a:solidFill>
                   <a:schemeClr val="tx1"/>
                 </a:solidFill>
               </a:rPr>
               <a:t>K-Nearest Neighbors</a:t>
             </a:r>
-            <a:endParaRPr lang="en-US" sz="1600" dirty="0">
+            <a:endParaRPr lang="en-US" sz="1500" dirty="0">
               <a:solidFill>
                 <a:schemeClr val="tx1"/>
               </a:solidFill>
@@ -7879,7 +7932,7 @@
               <a:buChar char="•"/>
             </a:pPr>
             <a:r>
-              <a:rPr lang="en-US" sz="1600" dirty="0" smtClean="0">
+              <a:rPr lang="en-US" sz="1500" dirty="0" smtClean="0">
                 <a:solidFill>
                   <a:schemeClr val="tx1"/>
                 </a:solidFill>
@@ -7893,7 +7946,7 @@
               <a:buChar char="•"/>
             </a:pPr>
             <a:r>
-              <a:rPr lang="en-US" sz="1600" dirty="0" smtClean="0">
+              <a:rPr lang="en-US" sz="1500" dirty="0" smtClean="0">
                 <a:solidFill>
                   <a:schemeClr val="tx1"/>
                 </a:solidFill>
@@ -7901,7 +7954,7 @@
               <a:t>Mean</a:t>
             </a:r>
             <a:r>
-              <a:rPr lang="pt-BR" sz="1600" dirty="0" smtClean="0">
+              <a:rPr lang="pt-BR" sz="1500" dirty="0" smtClean="0">
                 <a:solidFill>
                   <a:schemeClr val="tx1"/>
                 </a:solidFill>
@@ -7915,7 +7968,7 @@
               <a:buChar char="•"/>
             </a:pPr>
             <a:r>
-              <a:rPr lang="pt-BR" sz="1600" dirty="0" smtClean="0">
+              <a:rPr lang="pt-BR" sz="1500" dirty="0" smtClean="0">
                 <a:solidFill>
                   <a:schemeClr val="tx1"/>
                 </a:solidFill>
@@ -7929,7 +7982,7 @@
               <a:buChar char="•"/>
             </a:pPr>
             <a:r>
-              <a:rPr lang="en-US" sz="1600" dirty="0" smtClean="0">
+              <a:rPr lang="en-US" sz="1500" dirty="0" smtClean="0">
                 <a:solidFill>
                   <a:schemeClr val="tx1"/>
                 </a:solidFill>
@@ -7937,7 +7990,7 @@
               <a:t>Agglomerative</a:t>
             </a:r>
             <a:r>
-              <a:rPr lang="pt-BR" sz="1600" dirty="0" smtClean="0">
+              <a:rPr lang="pt-BR" sz="1500" dirty="0" smtClean="0">
                 <a:solidFill>
                   <a:schemeClr val="tx1"/>
                 </a:solidFill>
@@ -7945,7 +7998,7 @@
               <a:t> </a:t>
             </a:r>
             <a:r>
-              <a:rPr lang="en-US" sz="1600" dirty="0" smtClean="0">
+              <a:rPr lang="en-US" sz="1500" dirty="0" smtClean="0">
                 <a:solidFill>
                   <a:schemeClr val="tx1"/>
                 </a:solidFill>
@@ -7959,7 +8012,7 @@
               <a:buChar char="•"/>
             </a:pPr>
             <a:r>
-              <a:rPr lang="en-US" sz="1600" dirty="0" smtClean="0">
+              <a:rPr lang="en-US" sz="1500" dirty="0" smtClean="0">
                 <a:solidFill>
                   <a:schemeClr val="tx1"/>
                 </a:solidFill>
@@ -7972,7 +8025,7 @@
               <a:buFont typeface="Arial" panose="020B0604020202020204" pitchFamily="34" charset="0"/>
               <a:buChar char="•"/>
             </a:pPr>
-            <a:endParaRPr lang="en-US" sz="1600" dirty="0">
+            <a:endParaRPr lang="en-US" sz="1500" dirty="0">
               <a:solidFill>
                 <a:schemeClr val="tx1"/>
               </a:solidFill>
@@ -8028,7 +8081,7 @@
               <a:buChar char="•"/>
             </a:pPr>
             <a:r>
-              <a:rPr lang="en-US" sz="1600" dirty="0" smtClean="0">
+              <a:rPr lang="en-US" sz="1500" dirty="0" smtClean="0">
                 <a:solidFill>
                   <a:schemeClr val="tx1"/>
                 </a:solidFill>
@@ -8042,7 +8095,7 @@
               <a:buChar char="•"/>
             </a:pPr>
             <a:r>
-              <a:rPr lang="pt-BR" sz="1600" dirty="0" smtClean="0">
+              <a:rPr lang="pt-BR" sz="1500" dirty="0" smtClean="0">
                 <a:solidFill>
                   <a:schemeClr val="tx1"/>
                 </a:solidFill>
@@ -8056,14 +8109,14 @@
               <a:buChar char="•"/>
             </a:pPr>
             <a:r>
-              <a:rPr lang="pt-BR" sz="1600" dirty="0" smtClean="0">
+              <a:rPr lang="pt-BR" sz="1500" dirty="0" smtClean="0">
                 <a:solidFill>
                   <a:schemeClr val="tx1"/>
                 </a:solidFill>
               </a:rPr>
               <a:t>TD-Learning</a:t>
             </a:r>
-            <a:endParaRPr lang="en-US" sz="1600" dirty="0">
+            <a:endParaRPr lang="en-US" sz="1500" dirty="0">
               <a:solidFill>
                 <a:schemeClr val="tx1"/>
               </a:solidFill>

--- a/type model.pptx
+++ b/type model.pptx
@@ -161,7 +161,7 @@
           </a:lstStyle>
           <a:p>
             <a:r>
-              <a:rPr lang="pt-BR" smtClean="0"/>
+              <a:rPr lang="pt-BR"/>
               <a:t>Clique para editar o título mestre</a:t>
             </a:r>
             <a:endParaRPr lang="en-US"/>
@@ -226,7 +226,7 @@
           </a:lstStyle>
           <a:p>
             <a:r>
-              <a:rPr lang="pt-BR" smtClean="0"/>
+              <a:rPr lang="pt-BR"/>
               <a:t>Clique para editar o estilo do subtítulo mestre</a:t>
             </a:r>
             <a:endParaRPr lang="en-US"/>
@@ -250,7 +250,7 @@
           <a:p>
             <a:fld id="{9394FC15-C62C-47D9-AA63-E5A366B8138A}" type="datetimeFigureOut">
               <a:rPr lang="en-US" smtClean="0"/>
-              <a:t>2/19/2023</a:t>
+              <a:t>2/22/2023</a:t>
             </a:fld>
             <a:endParaRPr lang="en-US" dirty="0"/>
           </a:p>
@@ -292,7 +292,7 @@
           <a:p>
             <a:fld id="{0E91B978-6106-44FE-A2B0-87A2F6797DB9}" type="slidenum">
               <a:rPr lang="en-US" smtClean="0"/>
-              <a:t>‹nº›</a:t>
+              <a:t>‹#›</a:t>
             </a:fld>
             <a:endParaRPr lang="en-US" dirty="0"/>
           </a:p>
@@ -344,7 +344,7 @@
           <a:lstStyle/>
           <a:p>
             <a:r>
-              <a:rPr lang="pt-BR" smtClean="0"/>
+              <a:rPr lang="pt-BR"/>
               <a:t>Clique para editar o título mestre</a:t>
             </a:r>
             <a:endParaRPr lang="en-US"/>
@@ -368,35 +368,35 @@
           <a:p>
             <a:pPr lvl="0"/>
             <a:r>
-              <a:rPr lang="pt-BR" smtClean="0"/>
+              <a:rPr lang="pt-BR"/>
               <a:t>Clique para editar o texto mestre</a:t>
             </a:r>
           </a:p>
           <a:p>
             <a:pPr lvl="1"/>
             <a:r>
-              <a:rPr lang="pt-BR" smtClean="0"/>
+              <a:rPr lang="pt-BR"/>
               <a:t>Segundo nível</a:t>
             </a:r>
           </a:p>
           <a:p>
             <a:pPr lvl="2"/>
             <a:r>
-              <a:rPr lang="pt-BR" smtClean="0"/>
+              <a:rPr lang="pt-BR"/>
               <a:t>Terceiro nível</a:t>
             </a:r>
           </a:p>
           <a:p>
             <a:pPr lvl="3"/>
             <a:r>
-              <a:rPr lang="pt-BR" smtClean="0"/>
+              <a:rPr lang="pt-BR"/>
               <a:t>Quarto nível</a:t>
             </a:r>
           </a:p>
           <a:p>
             <a:pPr lvl="4"/>
             <a:r>
-              <a:rPr lang="pt-BR" smtClean="0"/>
+              <a:rPr lang="pt-BR"/>
               <a:t>Quinto nível</a:t>
             </a:r>
             <a:endParaRPr lang="en-US"/>
@@ -420,7 +420,7 @@
           <a:p>
             <a:fld id="{9394FC15-C62C-47D9-AA63-E5A366B8138A}" type="datetimeFigureOut">
               <a:rPr lang="en-US" smtClean="0"/>
-              <a:t>2/19/2023</a:t>
+              <a:t>2/22/2023</a:t>
             </a:fld>
             <a:endParaRPr lang="en-US" dirty="0"/>
           </a:p>
@@ -462,7 +462,7 @@
           <a:p>
             <a:fld id="{0E91B978-6106-44FE-A2B0-87A2F6797DB9}" type="slidenum">
               <a:rPr lang="en-US" smtClean="0"/>
-              <a:t>‹nº›</a:t>
+              <a:t>‹#›</a:t>
             </a:fld>
             <a:endParaRPr lang="en-US" dirty="0"/>
           </a:p>
@@ -519,7 +519,7 @@
           <a:lstStyle/>
           <a:p>
             <a:r>
-              <a:rPr lang="pt-BR" smtClean="0"/>
+              <a:rPr lang="pt-BR"/>
               <a:t>Clique para editar o título mestre</a:t>
             </a:r>
             <a:endParaRPr lang="en-US"/>
@@ -548,35 +548,35 @@
           <a:p>
             <a:pPr lvl="0"/>
             <a:r>
-              <a:rPr lang="pt-BR" smtClean="0"/>
+              <a:rPr lang="pt-BR"/>
               <a:t>Clique para editar o texto mestre</a:t>
             </a:r>
           </a:p>
           <a:p>
             <a:pPr lvl="1"/>
             <a:r>
-              <a:rPr lang="pt-BR" smtClean="0"/>
+              <a:rPr lang="pt-BR"/>
               <a:t>Segundo nível</a:t>
             </a:r>
           </a:p>
           <a:p>
             <a:pPr lvl="2"/>
             <a:r>
-              <a:rPr lang="pt-BR" smtClean="0"/>
+              <a:rPr lang="pt-BR"/>
               <a:t>Terceiro nível</a:t>
             </a:r>
           </a:p>
           <a:p>
             <a:pPr lvl="3"/>
             <a:r>
-              <a:rPr lang="pt-BR" smtClean="0"/>
+              <a:rPr lang="pt-BR"/>
               <a:t>Quarto nível</a:t>
             </a:r>
           </a:p>
           <a:p>
             <a:pPr lvl="4"/>
             <a:r>
-              <a:rPr lang="pt-BR" smtClean="0"/>
+              <a:rPr lang="pt-BR"/>
               <a:t>Quinto nível</a:t>
             </a:r>
             <a:endParaRPr lang="en-US"/>
@@ -600,7 +600,7 @@
           <a:p>
             <a:fld id="{9394FC15-C62C-47D9-AA63-E5A366B8138A}" type="datetimeFigureOut">
               <a:rPr lang="en-US" smtClean="0"/>
-              <a:t>2/19/2023</a:t>
+              <a:t>2/22/2023</a:t>
             </a:fld>
             <a:endParaRPr lang="en-US" dirty="0"/>
           </a:p>
@@ -642,7 +642,7 @@
           <a:p>
             <a:fld id="{0E91B978-6106-44FE-A2B0-87A2F6797DB9}" type="slidenum">
               <a:rPr lang="en-US" smtClean="0"/>
-              <a:t>‹nº›</a:t>
+              <a:t>‹#›</a:t>
             </a:fld>
             <a:endParaRPr lang="en-US" dirty="0"/>
           </a:p>
@@ -694,7 +694,7 @@
           <a:lstStyle/>
           <a:p>
             <a:r>
-              <a:rPr lang="pt-BR" smtClean="0"/>
+              <a:rPr lang="pt-BR"/>
               <a:t>Clique para editar o título mestre</a:t>
             </a:r>
             <a:endParaRPr lang="en-US"/>
@@ -718,35 +718,35 @@
           <a:p>
             <a:pPr lvl="0"/>
             <a:r>
-              <a:rPr lang="pt-BR" smtClean="0"/>
+              <a:rPr lang="pt-BR"/>
               <a:t>Clique para editar o texto mestre</a:t>
             </a:r>
           </a:p>
           <a:p>
             <a:pPr lvl="1"/>
             <a:r>
-              <a:rPr lang="pt-BR" smtClean="0"/>
+              <a:rPr lang="pt-BR"/>
               <a:t>Segundo nível</a:t>
             </a:r>
           </a:p>
           <a:p>
             <a:pPr lvl="2"/>
             <a:r>
-              <a:rPr lang="pt-BR" smtClean="0"/>
+              <a:rPr lang="pt-BR"/>
               <a:t>Terceiro nível</a:t>
             </a:r>
           </a:p>
           <a:p>
             <a:pPr lvl="3"/>
             <a:r>
-              <a:rPr lang="pt-BR" smtClean="0"/>
+              <a:rPr lang="pt-BR"/>
               <a:t>Quarto nível</a:t>
             </a:r>
           </a:p>
           <a:p>
             <a:pPr lvl="4"/>
             <a:r>
-              <a:rPr lang="pt-BR" smtClean="0"/>
+              <a:rPr lang="pt-BR"/>
               <a:t>Quinto nível</a:t>
             </a:r>
             <a:endParaRPr lang="en-US"/>
@@ -770,7 +770,7 @@
           <a:p>
             <a:fld id="{9394FC15-C62C-47D9-AA63-E5A366B8138A}" type="datetimeFigureOut">
               <a:rPr lang="en-US" smtClean="0"/>
-              <a:t>2/19/2023</a:t>
+              <a:t>2/22/2023</a:t>
             </a:fld>
             <a:endParaRPr lang="en-US" dirty="0"/>
           </a:p>
@@ -812,7 +812,7 @@
           <a:p>
             <a:fld id="{0E91B978-6106-44FE-A2B0-87A2F6797DB9}" type="slidenum">
               <a:rPr lang="en-US" smtClean="0"/>
-              <a:t>‹nº›</a:t>
+              <a:t>‹#›</a:t>
             </a:fld>
             <a:endParaRPr lang="en-US" dirty="0"/>
           </a:p>
@@ -873,7 +873,7 @@
           </a:lstStyle>
           <a:p>
             <a:r>
-              <a:rPr lang="pt-BR" smtClean="0"/>
+              <a:rPr lang="pt-BR"/>
               <a:t>Clique para editar o título mestre</a:t>
             </a:r>
             <a:endParaRPr lang="en-US"/>
@@ -993,7 +993,7 @@
           <a:p>
             <a:pPr lvl="0"/>
             <a:r>
-              <a:rPr lang="pt-BR" smtClean="0"/>
+              <a:rPr lang="pt-BR"/>
               <a:t>Clique para editar o texto mestre</a:t>
             </a:r>
           </a:p>
@@ -1016,7 +1016,7 @@
           <a:p>
             <a:fld id="{9394FC15-C62C-47D9-AA63-E5A366B8138A}" type="datetimeFigureOut">
               <a:rPr lang="en-US" smtClean="0"/>
-              <a:t>2/19/2023</a:t>
+              <a:t>2/22/2023</a:t>
             </a:fld>
             <a:endParaRPr lang="en-US" dirty="0"/>
           </a:p>
@@ -1058,7 +1058,7 @@
           <a:p>
             <a:fld id="{0E91B978-6106-44FE-A2B0-87A2F6797DB9}" type="slidenum">
               <a:rPr lang="en-US" smtClean="0"/>
-              <a:t>‹nº›</a:t>
+              <a:t>‹#›</a:t>
             </a:fld>
             <a:endParaRPr lang="en-US" dirty="0"/>
           </a:p>
@@ -1110,7 +1110,7 @@
           <a:lstStyle/>
           <a:p>
             <a:r>
-              <a:rPr lang="pt-BR" smtClean="0"/>
+              <a:rPr lang="pt-BR"/>
               <a:t>Clique para editar o título mestre</a:t>
             </a:r>
             <a:endParaRPr lang="en-US"/>
@@ -1139,35 +1139,35 @@
           <a:p>
             <a:pPr lvl="0"/>
             <a:r>
-              <a:rPr lang="pt-BR" smtClean="0"/>
+              <a:rPr lang="pt-BR"/>
               <a:t>Clique para editar o texto mestre</a:t>
             </a:r>
           </a:p>
           <a:p>
             <a:pPr lvl="1"/>
             <a:r>
-              <a:rPr lang="pt-BR" smtClean="0"/>
+              <a:rPr lang="pt-BR"/>
               <a:t>Segundo nível</a:t>
             </a:r>
           </a:p>
           <a:p>
             <a:pPr lvl="2"/>
             <a:r>
-              <a:rPr lang="pt-BR" smtClean="0"/>
+              <a:rPr lang="pt-BR"/>
               <a:t>Terceiro nível</a:t>
             </a:r>
           </a:p>
           <a:p>
             <a:pPr lvl="3"/>
             <a:r>
-              <a:rPr lang="pt-BR" smtClean="0"/>
+              <a:rPr lang="pt-BR"/>
               <a:t>Quarto nível</a:t>
             </a:r>
           </a:p>
           <a:p>
             <a:pPr lvl="4"/>
             <a:r>
-              <a:rPr lang="pt-BR" smtClean="0"/>
+              <a:rPr lang="pt-BR"/>
               <a:t>Quinto nível</a:t>
             </a:r>
             <a:endParaRPr lang="en-US"/>
@@ -1196,35 +1196,35 @@
           <a:p>
             <a:pPr lvl="0"/>
             <a:r>
-              <a:rPr lang="pt-BR" smtClean="0"/>
+              <a:rPr lang="pt-BR"/>
               <a:t>Clique para editar o texto mestre</a:t>
             </a:r>
           </a:p>
           <a:p>
             <a:pPr lvl="1"/>
             <a:r>
-              <a:rPr lang="pt-BR" smtClean="0"/>
+              <a:rPr lang="pt-BR"/>
               <a:t>Segundo nível</a:t>
             </a:r>
           </a:p>
           <a:p>
             <a:pPr lvl="2"/>
             <a:r>
-              <a:rPr lang="pt-BR" smtClean="0"/>
+              <a:rPr lang="pt-BR"/>
               <a:t>Terceiro nível</a:t>
             </a:r>
           </a:p>
           <a:p>
             <a:pPr lvl="3"/>
             <a:r>
-              <a:rPr lang="pt-BR" smtClean="0"/>
+              <a:rPr lang="pt-BR"/>
               <a:t>Quarto nível</a:t>
             </a:r>
           </a:p>
           <a:p>
             <a:pPr lvl="4"/>
             <a:r>
-              <a:rPr lang="pt-BR" smtClean="0"/>
+              <a:rPr lang="pt-BR"/>
               <a:t>Quinto nível</a:t>
             </a:r>
             <a:endParaRPr lang="en-US"/>
@@ -1248,7 +1248,7 @@
           <a:p>
             <a:fld id="{9394FC15-C62C-47D9-AA63-E5A366B8138A}" type="datetimeFigureOut">
               <a:rPr lang="en-US" smtClean="0"/>
-              <a:t>2/19/2023</a:t>
+              <a:t>2/22/2023</a:t>
             </a:fld>
             <a:endParaRPr lang="en-US" dirty="0"/>
           </a:p>
@@ -1290,7 +1290,7 @@
           <a:p>
             <a:fld id="{0E91B978-6106-44FE-A2B0-87A2F6797DB9}" type="slidenum">
               <a:rPr lang="en-US" smtClean="0"/>
-              <a:t>‹nº›</a:t>
+              <a:t>‹#›</a:t>
             </a:fld>
             <a:endParaRPr lang="en-US" dirty="0"/>
           </a:p>
@@ -1347,7 +1347,7 @@
           <a:lstStyle/>
           <a:p>
             <a:r>
-              <a:rPr lang="pt-BR" smtClean="0"/>
+              <a:rPr lang="pt-BR"/>
               <a:t>Clique para editar o título mestre</a:t>
             </a:r>
             <a:endParaRPr lang="en-US"/>
@@ -1413,7 +1413,7 @@
           <a:p>
             <a:pPr lvl="0"/>
             <a:r>
-              <a:rPr lang="pt-BR" smtClean="0"/>
+              <a:rPr lang="pt-BR"/>
               <a:t>Clique para editar o texto mestre</a:t>
             </a:r>
           </a:p>
@@ -1441,35 +1441,35 @@
           <a:p>
             <a:pPr lvl="0"/>
             <a:r>
-              <a:rPr lang="pt-BR" smtClean="0"/>
+              <a:rPr lang="pt-BR"/>
               <a:t>Clique para editar o texto mestre</a:t>
             </a:r>
           </a:p>
           <a:p>
             <a:pPr lvl="1"/>
             <a:r>
-              <a:rPr lang="pt-BR" smtClean="0"/>
+              <a:rPr lang="pt-BR"/>
               <a:t>Segundo nível</a:t>
             </a:r>
           </a:p>
           <a:p>
             <a:pPr lvl="2"/>
             <a:r>
-              <a:rPr lang="pt-BR" smtClean="0"/>
+              <a:rPr lang="pt-BR"/>
               <a:t>Terceiro nível</a:t>
             </a:r>
           </a:p>
           <a:p>
             <a:pPr lvl="3"/>
             <a:r>
-              <a:rPr lang="pt-BR" smtClean="0"/>
+              <a:rPr lang="pt-BR"/>
               <a:t>Quarto nível</a:t>
             </a:r>
           </a:p>
           <a:p>
             <a:pPr lvl="4"/>
             <a:r>
-              <a:rPr lang="pt-BR" smtClean="0"/>
+              <a:rPr lang="pt-BR"/>
               <a:t>Quinto nível</a:t>
             </a:r>
             <a:endParaRPr lang="en-US"/>
@@ -1535,7 +1535,7 @@
           <a:p>
             <a:pPr lvl="0"/>
             <a:r>
-              <a:rPr lang="pt-BR" smtClean="0"/>
+              <a:rPr lang="pt-BR"/>
               <a:t>Clique para editar o texto mestre</a:t>
             </a:r>
           </a:p>
@@ -1563,35 +1563,35 @@
           <a:p>
             <a:pPr lvl="0"/>
             <a:r>
-              <a:rPr lang="pt-BR" smtClean="0"/>
+              <a:rPr lang="pt-BR"/>
               <a:t>Clique para editar o texto mestre</a:t>
             </a:r>
           </a:p>
           <a:p>
             <a:pPr lvl="1"/>
             <a:r>
-              <a:rPr lang="pt-BR" smtClean="0"/>
+              <a:rPr lang="pt-BR"/>
               <a:t>Segundo nível</a:t>
             </a:r>
           </a:p>
           <a:p>
             <a:pPr lvl="2"/>
             <a:r>
-              <a:rPr lang="pt-BR" smtClean="0"/>
+              <a:rPr lang="pt-BR"/>
               <a:t>Terceiro nível</a:t>
             </a:r>
           </a:p>
           <a:p>
             <a:pPr lvl="3"/>
             <a:r>
-              <a:rPr lang="pt-BR" smtClean="0"/>
+              <a:rPr lang="pt-BR"/>
               <a:t>Quarto nível</a:t>
             </a:r>
           </a:p>
           <a:p>
             <a:pPr lvl="4"/>
             <a:r>
-              <a:rPr lang="pt-BR" smtClean="0"/>
+              <a:rPr lang="pt-BR"/>
               <a:t>Quinto nível</a:t>
             </a:r>
             <a:endParaRPr lang="en-US"/>
@@ -1615,7 +1615,7 @@
           <a:p>
             <a:fld id="{9394FC15-C62C-47D9-AA63-E5A366B8138A}" type="datetimeFigureOut">
               <a:rPr lang="en-US" smtClean="0"/>
-              <a:t>2/19/2023</a:t>
+              <a:t>2/22/2023</a:t>
             </a:fld>
             <a:endParaRPr lang="en-US" dirty="0"/>
           </a:p>
@@ -1657,7 +1657,7 @@
           <a:p>
             <a:fld id="{0E91B978-6106-44FE-A2B0-87A2F6797DB9}" type="slidenum">
               <a:rPr lang="en-US" smtClean="0"/>
-              <a:t>‹nº›</a:t>
+              <a:t>‹#›</a:t>
             </a:fld>
             <a:endParaRPr lang="en-US" dirty="0"/>
           </a:p>
@@ -1709,7 +1709,7 @@
           <a:lstStyle/>
           <a:p>
             <a:r>
-              <a:rPr lang="pt-BR" smtClean="0"/>
+              <a:rPr lang="pt-BR"/>
               <a:t>Clique para editar o título mestre</a:t>
             </a:r>
             <a:endParaRPr lang="en-US"/>
@@ -1733,7 +1733,7 @@
           <a:p>
             <a:fld id="{9394FC15-C62C-47D9-AA63-E5A366B8138A}" type="datetimeFigureOut">
               <a:rPr lang="en-US" smtClean="0"/>
-              <a:t>2/19/2023</a:t>
+              <a:t>2/22/2023</a:t>
             </a:fld>
             <a:endParaRPr lang="en-US" dirty="0"/>
           </a:p>
@@ -1775,7 +1775,7 @@
           <a:p>
             <a:fld id="{0E91B978-6106-44FE-A2B0-87A2F6797DB9}" type="slidenum">
               <a:rPr lang="en-US" smtClean="0"/>
-              <a:t>‹nº›</a:t>
+              <a:t>‹#›</a:t>
             </a:fld>
             <a:endParaRPr lang="en-US" dirty="0"/>
           </a:p>
@@ -1828,7 +1828,7 @@
           <a:p>
             <a:fld id="{9394FC15-C62C-47D9-AA63-E5A366B8138A}" type="datetimeFigureOut">
               <a:rPr lang="en-US" smtClean="0"/>
-              <a:t>2/19/2023</a:t>
+              <a:t>2/22/2023</a:t>
             </a:fld>
             <a:endParaRPr lang="en-US" dirty="0"/>
           </a:p>
@@ -1870,7 +1870,7 @@
           <a:p>
             <a:fld id="{0E91B978-6106-44FE-A2B0-87A2F6797DB9}" type="slidenum">
               <a:rPr lang="en-US" smtClean="0"/>
-              <a:t>‹nº›</a:t>
+              <a:t>‹#›</a:t>
             </a:fld>
             <a:endParaRPr lang="en-US" dirty="0"/>
           </a:p>
@@ -1931,7 +1931,7 @@
           </a:lstStyle>
           <a:p>
             <a:r>
-              <a:rPr lang="pt-BR" smtClean="0"/>
+              <a:rPr lang="pt-BR"/>
               <a:t>Clique para editar o título mestre</a:t>
             </a:r>
             <a:endParaRPr lang="en-US"/>
@@ -1988,35 +1988,35 @@
           <a:p>
             <a:pPr lvl="0"/>
             <a:r>
-              <a:rPr lang="pt-BR" smtClean="0"/>
+              <a:rPr lang="pt-BR"/>
               <a:t>Clique para editar o texto mestre</a:t>
             </a:r>
           </a:p>
           <a:p>
             <a:pPr lvl="1"/>
             <a:r>
-              <a:rPr lang="pt-BR" smtClean="0"/>
+              <a:rPr lang="pt-BR"/>
               <a:t>Segundo nível</a:t>
             </a:r>
           </a:p>
           <a:p>
             <a:pPr lvl="2"/>
             <a:r>
-              <a:rPr lang="pt-BR" smtClean="0"/>
+              <a:rPr lang="pt-BR"/>
               <a:t>Terceiro nível</a:t>
             </a:r>
           </a:p>
           <a:p>
             <a:pPr lvl="3"/>
             <a:r>
-              <a:rPr lang="pt-BR" smtClean="0"/>
+              <a:rPr lang="pt-BR"/>
               <a:t>Quarto nível</a:t>
             </a:r>
           </a:p>
           <a:p>
             <a:pPr lvl="4"/>
             <a:r>
-              <a:rPr lang="pt-BR" smtClean="0"/>
+              <a:rPr lang="pt-BR"/>
               <a:t>Quinto nível</a:t>
             </a:r>
             <a:endParaRPr lang="en-US"/>
@@ -2082,7 +2082,7 @@
           <a:p>
             <a:pPr lvl="0"/>
             <a:r>
-              <a:rPr lang="pt-BR" smtClean="0"/>
+              <a:rPr lang="pt-BR"/>
               <a:t>Clique para editar o texto mestre</a:t>
             </a:r>
           </a:p>
@@ -2105,7 +2105,7 @@
           <a:p>
             <a:fld id="{9394FC15-C62C-47D9-AA63-E5A366B8138A}" type="datetimeFigureOut">
               <a:rPr lang="en-US" smtClean="0"/>
-              <a:t>2/19/2023</a:t>
+              <a:t>2/22/2023</a:t>
             </a:fld>
             <a:endParaRPr lang="en-US" dirty="0"/>
           </a:p>
@@ -2147,7 +2147,7 @@
           <a:p>
             <a:fld id="{0E91B978-6106-44FE-A2B0-87A2F6797DB9}" type="slidenum">
               <a:rPr lang="en-US" smtClean="0"/>
-              <a:t>‹nº›</a:t>
+              <a:t>‹#›</a:t>
             </a:fld>
             <a:endParaRPr lang="en-US" dirty="0"/>
           </a:p>
@@ -2208,7 +2208,7 @@
           </a:lstStyle>
           <a:p>
             <a:r>
-              <a:rPr lang="pt-BR" smtClean="0"/>
+              <a:rPr lang="pt-BR"/>
               <a:t>Clique para editar o título mestre</a:t>
             </a:r>
             <a:endParaRPr lang="en-US"/>
@@ -2335,7 +2335,7 @@
           <a:p>
             <a:pPr lvl="0"/>
             <a:r>
-              <a:rPr lang="pt-BR" smtClean="0"/>
+              <a:rPr lang="pt-BR"/>
               <a:t>Clique para editar o texto mestre</a:t>
             </a:r>
           </a:p>
@@ -2358,7 +2358,7 @@
           <a:p>
             <a:fld id="{9394FC15-C62C-47D9-AA63-E5A366B8138A}" type="datetimeFigureOut">
               <a:rPr lang="en-US" smtClean="0"/>
-              <a:t>2/19/2023</a:t>
+              <a:t>2/22/2023</a:t>
             </a:fld>
             <a:endParaRPr lang="en-US" dirty="0"/>
           </a:p>
@@ -2400,7 +2400,7 @@
           <a:p>
             <a:fld id="{0E91B978-6106-44FE-A2B0-87A2F6797DB9}" type="slidenum">
               <a:rPr lang="en-US" smtClean="0"/>
-              <a:t>‹nº›</a:t>
+              <a:t>‹#›</a:t>
             </a:fld>
             <a:endParaRPr lang="en-US" dirty="0"/>
           </a:p>
@@ -2467,7 +2467,7 @@
           <a:lstStyle/>
           <a:p>
             <a:r>
-              <a:rPr lang="pt-BR" smtClean="0"/>
+              <a:rPr lang="pt-BR"/>
               <a:t>Clique para editar o título mestre</a:t>
             </a:r>
             <a:endParaRPr lang="en-US"/>
@@ -2501,35 +2501,35 @@
           <a:p>
             <a:pPr lvl="0"/>
             <a:r>
-              <a:rPr lang="pt-BR" smtClean="0"/>
+              <a:rPr lang="pt-BR"/>
               <a:t>Clique para editar o texto mestre</a:t>
             </a:r>
           </a:p>
           <a:p>
             <a:pPr lvl="1"/>
             <a:r>
-              <a:rPr lang="pt-BR" smtClean="0"/>
+              <a:rPr lang="pt-BR"/>
               <a:t>Segundo nível</a:t>
             </a:r>
           </a:p>
           <a:p>
             <a:pPr lvl="2"/>
             <a:r>
-              <a:rPr lang="pt-BR" smtClean="0"/>
+              <a:rPr lang="pt-BR"/>
               <a:t>Terceiro nível</a:t>
             </a:r>
           </a:p>
           <a:p>
             <a:pPr lvl="3"/>
             <a:r>
-              <a:rPr lang="pt-BR" smtClean="0"/>
+              <a:rPr lang="pt-BR"/>
               <a:t>Quarto nível</a:t>
             </a:r>
           </a:p>
           <a:p>
             <a:pPr lvl="4"/>
             <a:r>
-              <a:rPr lang="pt-BR" smtClean="0"/>
+              <a:rPr lang="pt-BR"/>
               <a:t>Quinto nível</a:t>
             </a:r>
             <a:endParaRPr lang="en-US"/>
@@ -2571,7 +2571,7 @@
           <a:p>
             <a:fld id="{9394FC15-C62C-47D9-AA63-E5A366B8138A}" type="datetimeFigureOut">
               <a:rPr lang="en-US" smtClean="0"/>
-              <a:t>2/19/2023</a:t>
+              <a:t>2/22/2023</a:t>
             </a:fld>
             <a:endParaRPr lang="en-US" dirty="0"/>
           </a:p>
@@ -2649,7 +2649,7 @@
           <a:p>
             <a:fld id="{0E91B978-6106-44FE-A2B0-87A2F6797DB9}" type="slidenum">
               <a:rPr lang="en-US" smtClean="0"/>
-              <a:t>‹nº›</a:t>
+              <a:t>‹#›</a:t>
             </a:fld>
             <a:endParaRPr lang="en-US" dirty="0"/>
           </a:p>
@@ -3006,7 +3006,7 @@
               </a:spcAft>
             </a:pPr>
             <a:r>
-              <a:rPr lang="pt-PT" dirty="0" smtClean="0">
+              <a:rPr lang="pt-PT" dirty="0">
                 <a:effectLst/>
                 <a:latin typeface="Calibri" panose="020F0502020204030204" pitchFamily="34" charset="0"/>
                 <a:ea typeface="Calibri" panose="020F0502020204030204" pitchFamily="34" charset="0"/>
@@ -3015,7 +3015,7 @@
               <a:t>Y = variavel resposta, target, dependente, output</a:t>
             </a:r>
             <a:br>
-              <a:rPr lang="pt-PT" dirty="0" smtClean="0">
+              <a:rPr lang="pt-PT" dirty="0">
                 <a:effectLst/>
                 <a:latin typeface="Calibri" panose="020F0502020204030204" pitchFamily="34" charset="0"/>
                 <a:ea typeface="Calibri" panose="020F0502020204030204" pitchFamily="34" charset="0"/>
@@ -3023,7 +3023,7 @@
               </a:rPr>
             </a:br>
             <a:r>
-              <a:rPr lang="pt-PT" dirty="0" smtClean="0">
+              <a:rPr lang="pt-PT" dirty="0">
                 <a:effectLst/>
                 <a:latin typeface="Calibri" panose="020F0502020204030204" pitchFamily="34" charset="0"/>
                 <a:ea typeface="Calibri" panose="020F0502020204030204" pitchFamily="34" charset="0"/>
@@ -3098,13 +3098,6 @@
   <p:clrMapOvr>
     <a:masterClrMapping/>
   </p:clrMapOvr>
-  <p:timing>
-    <p:tnLst>
-      <p:par>
-        <p:cTn id="1" dur="indefinite" restart="never" nodeType="tmRoot"/>
-      </p:par>
-    </p:tnLst>
-  </p:timing>
 </p:sld>
 </file>
 
@@ -3175,18 +3168,13 @@
           <a:p>
             <a:pPr algn="ctr"/>
             <a:r>
-              <a:rPr lang="en-US" dirty="0" smtClean="0">
+              <a:rPr lang="en-US" dirty="0">
                 <a:solidFill>
                   <a:schemeClr val="tx1"/>
                 </a:solidFill>
               </a:rPr>
               <a:t>Feature Selection Methods</a:t>
             </a:r>
-            <a:endParaRPr lang="en-US" dirty="0">
-              <a:solidFill>
-                <a:schemeClr val="tx1"/>
-              </a:solidFill>
-            </a:endParaRPr>
           </a:p>
         </p:txBody>
       </p:sp>
@@ -3238,7 +3226,7 @@
               <a:buChar char="•"/>
             </a:pPr>
             <a:r>
-              <a:rPr lang="en-US" sz="1400" dirty="0" smtClean="0">
+              <a:rPr lang="en-US" sz="1400" dirty="0">
                 <a:solidFill>
                   <a:schemeClr val="tx1"/>
                 </a:solidFill>
@@ -3252,7 +3240,7 @@
               <a:buChar char="•"/>
             </a:pPr>
             <a:r>
-              <a:rPr lang="en-US" sz="1400" dirty="0" smtClean="0">
+              <a:rPr lang="en-US" sz="1400" dirty="0">
                 <a:solidFill>
                   <a:schemeClr val="tx1"/>
                 </a:solidFill>
@@ -3266,18 +3254,13 @@
               <a:buChar char="•"/>
             </a:pPr>
             <a:r>
-              <a:rPr lang="en-US" sz="1400" dirty="0" smtClean="0">
+              <a:rPr lang="en-US" sz="1400" dirty="0">
                 <a:solidFill>
                   <a:schemeClr val="tx1"/>
                 </a:solidFill>
               </a:rPr>
               <a:t>Recursive Feature elimination (RFE)</a:t>
             </a:r>
-            <a:endParaRPr lang="en-US" sz="1400" dirty="0">
-              <a:solidFill>
-                <a:schemeClr val="tx1"/>
-              </a:solidFill>
-            </a:endParaRPr>
           </a:p>
         </p:txBody>
       </p:sp>
@@ -3329,7 +3312,7 @@
               <a:buChar char="•"/>
             </a:pPr>
             <a:r>
-              <a:rPr lang="en-US" sz="1400" smtClean="0">
+              <a:rPr lang="en-US" sz="1400">
                 <a:solidFill>
                   <a:schemeClr val="tx1"/>
                 </a:solidFill>
@@ -3343,7 +3326,7 @@
               <a:buChar char="•"/>
             </a:pPr>
             <a:r>
-              <a:rPr lang="en-US" sz="1400" dirty="0" smtClean="0">
+              <a:rPr lang="en-US" sz="1400" dirty="0">
                 <a:solidFill>
                   <a:schemeClr val="tx1"/>
                 </a:solidFill>
@@ -3357,7 +3340,7 @@
               <a:buChar char="•"/>
             </a:pPr>
             <a:r>
-              <a:rPr lang="en-US" sz="1400" dirty="0" smtClean="0">
+              <a:rPr lang="en-US" sz="1400" dirty="0">
                 <a:solidFill>
                   <a:schemeClr val="tx1"/>
                 </a:solidFill>
@@ -3426,7 +3409,7 @@
               <a:buChar char="•"/>
             </a:pPr>
             <a:r>
-              <a:rPr lang="en-US" sz="1400" dirty="0" smtClean="0">
+              <a:rPr lang="en-US" sz="1400" dirty="0">
                 <a:solidFill>
                   <a:schemeClr val="tx1"/>
                 </a:solidFill>
@@ -3440,7 +3423,7 @@
               <a:buChar char="•"/>
             </a:pPr>
             <a:r>
-              <a:rPr lang="en-US" sz="1400" dirty="0" smtClean="0">
+              <a:rPr lang="en-US" sz="1400" dirty="0">
                 <a:solidFill>
                   <a:schemeClr val="tx1"/>
                 </a:solidFill>
@@ -3454,7 +3437,7 @@
               <a:buChar char="•"/>
             </a:pPr>
             <a:r>
-              <a:rPr lang="pt-BR" sz="1400" smtClean="0">
+              <a:rPr lang="pt-BR" sz="1400">
                 <a:solidFill>
                   <a:schemeClr val="tx1"/>
                 </a:solidFill>
@@ -3473,7 +3456,7 @@
               <a:buChar char="•"/>
             </a:pPr>
             <a:r>
-              <a:rPr lang="en-US" sz="1400" smtClean="0">
+              <a:rPr lang="en-US" sz="1400">
                 <a:solidFill>
                   <a:schemeClr val="tx1"/>
                 </a:solidFill>
@@ -3487,7 +3470,7 @@
               <a:buChar char="•"/>
             </a:pPr>
             <a:r>
-              <a:rPr lang="pt-BR" sz="1400" smtClean="0">
+              <a:rPr lang="pt-BR" sz="1400">
                 <a:solidFill>
                   <a:schemeClr val="tx1"/>
                 </a:solidFill>
@@ -3514,7 +3497,7 @@
               <a:t>Mutual </a:t>
             </a:r>
             <a:r>
-              <a:rPr lang="en-US" sz="1400" smtClean="0">
+              <a:rPr lang="en-US" sz="1400">
                 <a:solidFill>
                   <a:schemeClr val="tx1"/>
                 </a:solidFill>
@@ -3528,7 +3511,7 @@
               <a:buChar char="•"/>
             </a:pPr>
             <a:r>
-              <a:rPr lang="pt-BR" sz="1400" smtClean="0">
+              <a:rPr lang="pt-BR" sz="1400">
                 <a:solidFill>
                   <a:schemeClr val="tx1"/>
                 </a:solidFill>
@@ -3612,7 +3595,7 @@
               <a:buChar char="•"/>
             </a:pPr>
             <a:r>
-              <a:rPr lang="en-US" sz="1400" dirty="0" smtClean="0">
+              <a:rPr lang="en-US" sz="1400" dirty="0">
                 <a:solidFill>
                   <a:schemeClr val="tx1"/>
                 </a:solidFill>
@@ -3620,7 +3603,7 @@
               <a:t>Lasso/Ridge</a:t>
             </a:r>
             <a:r>
-              <a:rPr lang="pt-BR" sz="1400" dirty="0" smtClean="0">
+              <a:rPr lang="pt-BR" sz="1400" dirty="0">
                 <a:solidFill>
                   <a:schemeClr val="tx1"/>
                 </a:solidFill>
@@ -3628,7 +3611,7 @@
               <a:t> (</a:t>
             </a:r>
             <a:r>
-              <a:rPr lang="en-US" sz="1400" dirty="0" smtClean="0">
+              <a:rPr lang="en-US" sz="1400" dirty="0">
                 <a:solidFill>
                   <a:schemeClr val="tx1"/>
                 </a:solidFill>
@@ -3636,7 +3619,7 @@
               <a:t>using</a:t>
             </a:r>
             <a:r>
-              <a:rPr lang="pt-BR" sz="1400" smtClean="0">
+              <a:rPr lang="pt-BR" sz="1400">
                 <a:solidFill>
                   <a:schemeClr val="tx1"/>
                 </a:solidFill>
@@ -3644,23 +3627,15 @@
               <a:t> </a:t>
             </a:r>
             <a:r>
-              <a:rPr lang="en-US" sz="1400" smtClean="0">
-                <a:solidFill>
-                  <a:schemeClr val="tx1"/>
-                </a:solidFill>
-              </a:rPr>
-              <a:t>Elasti</a:t>
-            </a:r>
-            <a:r>
-              <a:rPr lang="en-US" sz="1400" smtClean="0">
-                <a:solidFill>
-                  <a:schemeClr val="tx1"/>
-                </a:solidFill>
-              </a:rPr>
-              <a:t>c</a:t>
-            </a:r>
-            <a:r>
-              <a:rPr lang="pt-BR" sz="1400" smtClean="0">
+              <a:rPr lang="en-US" sz="1400">
+                <a:solidFill>
+                  <a:schemeClr val="tx1"/>
+                </a:solidFill>
+              </a:rPr>
+              <a:t>Elastic</a:t>
+            </a:r>
+            <a:r>
+              <a:rPr lang="pt-BR" sz="1400">
                 <a:solidFill>
                   <a:schemeClr val="tx1"/>
                 </a:solidFill>
@@ -3674,7 +3649,7 @@
               <a:buChar char="•"/>
             </a:pPr>
             <a:r>
-              <a:rPr lang="en-US" sz="1400" dirty="0" smtClean="0">
+              <a:rPr lang="en-US" sz="1400" dirty="0">
                 <a:solidFill>
                   <a:schemeClr val="tx1"/>
                 </a:solidFill>
@@ -3682,7 +3657,7 @@
               <a:t>Tree</a:t>
             </a:r>
             <a:r>
-              <a:rPr lang="pt-BR" sz="1400" dirty="0" smtClean="0">
+              <a:rPr lang="pt-BR" sz="1400" dirty="0">
                 <a:solidFill>
                   <a:schemeClr val="tx1"/>
                 </a:solidFill>
@@ -3690,7 +3665,7 @@
               <a:t> </a:t>
             </a:r>
             <a:r>
-              <a:rPr lang="en-US" sz="1400" smtClean="0">
+              <a:rPr lang="en-US" sz="1400">
                 <a:solidFill>
                   <a:schemeClr val="tx1"/>
                 </a:solidFill>
@@ -3698,7 +3673,7 @@
               <a:t>based</a:t>
             </a:r>
             <a:r>
-              <a:rPr lang="pt-BR" sz="1400" smtClean="0">
+              <a:rPr lang="pt-BR" sz="1400">
                 <a:solidFill>
                   <a:schemeClr val="tx1"/>
                 </a:solidFill>
@@ -3706,7 +3681,7 @@
               <a:t> </a:t>
             </a:r>
             <a:r>
-              <a:rPr lang="en-US" sz="1400" smtClean="0">
+              <a:rPr lang="en-US" sz="1400">
                 <a:solidFill>
                   <a:schemeClr val="tx1"/>
                 </a:solidFill>
@@ -3719,7 +3694,7 @@
               <a:buFont typeface="Arial" panose="020B0604020202020204" pitchFamily="34" charset="0"/>
               <a:buChar char="•"/>
             </a:pPr>
-            <a:endParaRPr lang="pt-BR" sz="1400" dirty="0" smtClean="0">
+            <a:endParaRPr lang="pt-BR" sz="1400" dirty="0">
               <a:solidFill>
                 <a:schemeClr val="tx1"/>
               </a:solidFill>
@@ -3788,21 +3763,8 @@
                   <a:schemeClr val="tx1"/>
                 </a:solidFill>
               </a:rPr>
-              <a:t>S</a:t>
-            </a:r>
-            <a:r>
-              <a:rPr lang="en-US" dirty="0" smtClean="0">
-                <a:solidFill>
-                  <a:schemeClr val="tx1"/>
-                </a:solidFill>
-              </a:rPr>
-              <a:t>upervised</a:t>
-            </a:r>
-            <a:endParaRPr lang="en-US" dirty="0">
-              <a:solidFill>
-                <a:schemeClr val="tx1"/>
-              </a:solidFill>
-            </a:endParaRPr>
+              <a:t>Supervised</a:t>
+            </a:r>
           </a:p>
         </p:txBody>
       </p:sp>
@@ -3858,11 +3820,6 @@
               </a:rPr>
               <a:t>Unsupervised</a:t>
             </a:r>
-            <a:endParaRPr lang="en-US" dirty="0">
-              <a:solidFill>
-                <a:schemeClr val="tx1"/>
-              </a:solidFill>
-            </a:endParaRPr>
           </a:p>
         </p:txBody>
       </p:sp>
@@ -3911,18 +3868,13 @@
           <a:p>
             <a:pPr algn="ctr"/>
             <a:r>
-              <a:rPr lang="en-US" dirty="0" smtClean="0">
+              <a:rPr lang="en-US" dirty="0">
                 <a:solidFill>
                   <a:schemeClr val="tx1"/>
                 </a:solidFill>
               </a:rPr>
               <a:t>Wrapper</a:t>
             </a:r>
-            <a:endParaRPr lang="en-US" dirty="0">
-              <a:solidFill>
-                <a:schemeClr val="tx1"/>
-              </a:solidFill>
-            </a:endParaRPr>
           </a:p>
         </p:txBody>
       </p:sp>
@@ -3971,18 +3923,13 @@
           <a:p>
             <a:pPr algn="ctr"/>
             <a:r>
-              <a:rPr lang="en-US" dirty="0" smtClean="0">
+              <a:rPr lang="en-US" dirty="0">
                 <a:solidFill>
                   <a:schemeClr val="tx1"/>
                 </a:solidFill>
               </a:rPr>
               <a:t>Embedded</a:t>
             </a:r>
-            <a:endParaRPr lang="en-US" dirty="0">
-              <a:solidFill>
-                <a:schemeClr val="tx1"/>
-              </a:solidFill>
-            </a:endParaRPr>
           </a:p>
         </p:txBody>
       </p:sp>
@@ -4031,18 +3978,13 @@
           <a:p>
             <a:pPr algn="ctr"/>
             <a:r>
-              <a:rPr lang="en-US" dirty="0" smtClean="0">
+              <a:rPr lang="en-US" dirty="0">
                 <a:solidFill>
                   <a:schemeClr val="tx1"/>
                 </a:solidFill>
               </a:rPr>
               <a:t>Filters</a:t>
             </a:r>
-            <a:endParaRPr lang="en-US" dirty="0">
-              <a:solidFill>
-                <a:schemeClr val="tx1"/>
-              </a:solidFill>
-            </a:endParaRPr>
           </a:p>
         </p:txBody>
       </p:sp>
@@ -4360,7 +4302,7 @@
               <a:t>Feature </a:t>
             </a:r>
             <a:r>
-              <a:rPr lang="en-US" sz="1400" smtClean="0">
+              <a:rPr lang="en-US" sz="1400">
                 <a:solidFill>
                   <a:schemeClr val="tx1"/>
                 </a:solidFill>
@@ -4368,7 +4310,7 @@
               <a:t>shuffling</a:t>
             </a:r>
             <a:r>
-              <a:rPr lang="pt-BR" sz="1400" smtClean="0">
+              <a:rPr lang="pt-BR" sz="1400">
                 <a:solidFill>
                   <a:schemeClr val="tx1"/>
                 </a:solidFill>
@@ -4387,7 +4329,7 @@
               <a:buChar char="•"/>
             </a:pPr>
             <a:r>
-              <a:rPr lang="en-US" sz="1400" smtClean="0">
+              <a:rPr lang="en-US" sz="1400">
                 <a:solidFill>
                   <a:schemeClr val="tx1"/>
                 </a:solidFill>
@@ -4395,23 +4337,15 @@
               <a:t>Recursive</a:t>
             </a:r>
             <a:r>
-              <a:rPr lang="pt-BR" sz="1400" smtClean="0">
-                <a:solidFill>
-                  <a:schemeClr val="tx1"/>
-                </a:solidFill>
-              </a:rPr>
-              <a:t> </a:t>
-            </a:r>
-            <a:r>
               <a:rPr lang="pt-BR" sz="1400">
                 <a:solidFill>
                   <a:schemeClr val="tx1"/>
                 </a:solidFill>
               </a:rPr>
-              <a:t>Feature </a:t>
-            </a:r>
-            <a:r>
-              <a:rPr lang="en-US" sz="1400" smtClean="0">
+              <a:t> Feature </a:t>
+            </a:r>
+            <a:r>
+              <a:rPr lang="en-US" sz="1400">
                 <a:solidFill>
                   <a:schemeClr val="tx1"/>
                 </a:solidFill>
@@ -4419,7 +4353,7 @@
               <a:t>elimination</a:t>
             </a:r>
             <a:r>
-              <a:rPr lang="pt-BR" sz="1400" smtClean="0">
+              <a:rPr lang="pt-BR" sz="1400">
                 <a:solidFill>
                   <a:schemeClr val="tx1"/>
                 </a:solidFill>
@@ -4446,7 +4380,7 @@
               <a:buChar char="•"/>
             </a:pPr>
             <a:r>
-              <a:rPr lang="en-US" sz="1400" smtClean="0">
+              <a:rPr lang="en-US" sz="1400">
                 <a:solidFill>
                   <a:schemeClr val="tx1"/>
                 </a:solidFill>
@@ -4454,23 +4388,15 @@
               <a:t>Recursive</a:t>
             </a:r>
             <a:r>
-              <a:rPr lang="pt-BR" sz="1400" smtClean="0">
-                <a:solidFill>
-                  <a:schemeClr val="tx1"/>
-                </a:solidFill>
-              </a:rPr>
-              <a:t> </a:t>
-            </a:r>
-            <a:r>
               <a:rPr lang="pt-BR" sz="1400">
                 <a:solidFill>
                   <a:schemeClr val="tx1"/>
                 </a:solidFill>
               </a:rPr>
-              <a:t>Feature </a:t>
-            </a:r>
-            <a:r>
-              <a:rPr lang="en-US" sz="1400" smtClean="0">
+              <a:t> Feature </a:t>
+            </a:r>
+            <a:r>
+              <a:rPr lang="en-US" sz="1400">
                 <a:solidFill>
                   <a:schemeClr val="tx1"/>
                 </a:solidFill>
@@ -4547,18 +4473,13 @@
           <a:p>
             <a:pPr algn="ctr"/>
             <a:r>
-              <a:rPr lang="en-US" dirty="0" smtClean="0">
+              <a:rPr lang="en-US" dirty="0">
                 <a:solidFill>
                   <a:schemeClr val="tx1"/>
                 </a:solidFill>
               </a:rPr>
               <a:t>Hybrid</a:t>
             </a:r>
-            <a:endParaRPr lang="en-US" dirty="0">
-              <a:solidFill>
-                <a:schemeClr val="tx1"/>
-              </a:solidFill>
-            </a:endParaRPr>
           </a:p>
         </p:txBody>
       </p:sp>
@@ -4608,13 +4529,6 @@
   <p:clrMapOvr>
     <a:masterClrMapping/>
   </p:clrMapOvr>
-  <p:timing>
-    <p:tnLst>
-      <p:par>
-        <p:cTn id="1" dur="indefinite" restart="never" nodeType="tmRoot"/>
-      </p:par>
-    </p:tnLst>
-  </p:timing>
 </p:sld>
 </file>
 
@@ -4668,10 +4582,10 @@
               </a:spcAft>
             </a:pPr>
             <a:r>
-              <a:rPr lang="en-US" b="1" dirty="0" smtClean="0"/>
+              <a:rPr lang="en-US" b="1" dirty="0"/>
               <a:t>Explanation</a:t>
             </a:r>
-            <a:endParaRPr lang="en-US" sz="1200" b="1" dirty="0" smtClean="0">
+            <a:endParaRPr lang="en-US" sz="1200" b="1" dirty="0">
               <a:latin typeface="Calibri" panose="020F0502020204030204" pitchFamily="34" charset="0"/>
               <a:ea typeface="Calibri" panose="020F0502020204030204" pitchFamily="34" charset="0"/>
               <a:cs typeface="Times New Roman" panose="02020603050405020304" pitchFamily="18" charset="0"/>
@@ -4707,7 +4621,7 @@
                 <a:spcPts val="0"/>
               </a:spcAft>
             </a:pPr>
-            <a:endParaRPr lang="en-US" sz="1400" b="1" dirty="0" smtClean="0">
+            <a:endParaRPr lang="en-US" sz="1400" b="1" dirty="0">
               <a:latin typeface="Calibri" panose="020F0502020204030204" pitchFamily="34" charset="0"/>
               <a:ea typeface="Calibri" panose="020F0502020204030204" pitchFamily="34" charset="0"/>
               <a:cs typeface="Times New Roman" panose="02020603050405020304" pitchFamily="18" charset="0"/>
@@ -4726,7 +4640,7 @@
               </a:spcAft>
             </a:pPr>
             <a:r>
-              <a:rPr lang="en-US" sz="1400" b="1" dirty="0" smtClean="0">
+              <a:rPr lang="en-US" sz="1400" b="1" dirty="0">
                 <a:solidFill>
                   <a:srgbClr val="FF0000"/>
                 </a:solidFill>
@@ -4758,7 +4672,7 @@
               </a:spcAft>
             </a:pPr>
             <a:r>
-              <a:rPr lang="en-US" sz="1400" dirty="0" smtClean="0">
+              <a:rPr lang="en-US" sz="1400" dirty="0">
                 <a:latin typeface="Calibri" panose="020F0502020204030204" pitchFamily="34" charset="0"/>
                 <a:ea typeface="Calibri" panose="020F0502020204030204" pitchFamily="34" charset="0"/>
                 <a:cs typeface="Times New Roman" panose="02020603050405020304" pitchFamily="18" charset="0"/>
@@ -4779,28 +4693,12 @@
               </a:spcAft>
             </a:pPr>
             <a:r>
-              <a:rPr lang="en-US" sz="1400" dirty="0" smtClean="0">
-                <a:latin typeface="Calibri" panose="020F0502020204030204" pitchFamily="34" charset="0"/>
-                <a:ea typeface="Calibri" panose="020F0502020204030204" pitchFamily="34" charset="0"/>
-                <a:cs typeface="Times New Roman" panose="02020603050405020304" pitchFamily="18" charset="0"/>
-              </a:rPr>
-              <a:t>Note</a:t>
-            </a:r>
-            <a:r>
               <a:rPr lang="en-US" sz="1400" dirty="0">
                 <a:latin typeface="Calibri" panose="020F0502020204030204" pitchFamily="34" charset="0"/>
                 <a:ea typeface="Calibri" panose="020F0502020204030204" pitchFamily="34" charset="0"/>
                 <a:cs typeface="Times New Roman" panose="02020603050405020304" pitchFamily="18" charset="0"/>
               </a:rPr>
-              <a:t>: Linear discriminant analysis (LDA): Linear discriminant analysis is used to find a linear combination of features that characterizes or separates two or more classes of a categorical </a:t>
-            </a:r>
-            <a:r>
-              <a:rPr lang="en-US" sz="1400" dirty="0" smtClean="0">
-                <a:latin typeface="Calibri" panose="020F0502020204030204" pitchFamily="34" charset="0"/>
-                <a:ea typeface="Calibri" panose="020F0502020204030204" pitchFamily="34" charset="0"/>
-                <a:cs typeface="Times New Roman" panose="02020603050405020304" pitchFamily="18" charset="0"/>
-              </a:rPr>
-              <a:t>variable.</a:t>
+              <a:t>Note: Linear discriminant analysis (LDA): Linear discriminant analysis is used to find a linear combination of features that characterizes or separates two or more classes of a categorical variable.</a:t>
             </a:r>
           </a:p>
           <a:p>
@@ -4816,7 +4714,7 @@
               </a:spcAft>
             </a:pPr>
             <a:r>
-              <a:rPr lang="en-US" sz="1400" dirty="0" smtClean="0">
+              <a:rPr lang="en-US" sz="1400" dirty="0">
                 <a:latin typeface="Calibri" panose="020F0502020204030204" pitchFamily="34" charset="0"/>
                 <a:ea typeface="Calibri" panose="020F0502020204030204" pitchFamily="34" charset="0"/>
                 <a:cs typeface="Times New Roman" panose="02020603050405020304" pitchFamily="18" charset="0"/>
@@ -4837,7 +4735,7 @@
               </a:spcAft>
             </a:pPr>
             <a:r>
-              <a:rPr lang="en-US" sz="1400" b="1" dirty="0" smtClean="0">
+              <a:rPr lang="en-US" sz="1400" b="1" dirty="0">
                 <a:solidFill>
                   <a:srgbClr val="FF0000"/>
                 </a:solidFill>
@@ -4845,18 +4743,7 @@
                 <a:ea typeface="Calibri" panose="020F0502020204030204" pitchFamily="34" charset="0"/>
                 <a:cs typeface="Times New Roman" panose="02020603050405020304" pitchFamily="18" charset="0"/>
               </a:rPr>
-              <a:t>Wrapper </a:t>
-            </a:r>
-            <a:r>
-              <a:rPr lang="en-US" sz="1400" b="1" dirty="0">
-                <a:solidFill>
-                  <a:srgbClr val="FF0000"/>
-                </a:solidFill>
-                <a:latin typeface="Calibri" panose="020F0502020204030204" pitchFamily="34" charset="0"/>
-                <a:ea typeface="Calibri" panose="020F0502020204030204" pitchFamily="34" charset="0"/>
-                <a:cs typeface="Times New Roman" panose="02020603050405020304" pitchFamily="18" charset="0"/>
-              </a:rPr>
-              <a:t>Methods</a:t>
+              <a:t>Wrapper Methods</a:t>
             </a:r>
             <a:r>
               <a:rPr lang="en-US" sz="1400" dirty="0">
@@ -4864,15 +4751,7 @@
                 <a:ea typeface="Calibri" panose="020F0502020204030204" pitchFamily="34" charset="0"/>
                 <a:cs typeface="Times New Roman" panose="02020603050405020304" pitchFamily="18" charset="0"/>
               </a:rPr>
-              <a:t>: This approach uses Machine Learning algorithm. Performance of this method depends on model selected and data underlying. Usually can suggests the optimal feature subset. Tries different subset of features to figure out optimal features. Typically very computationally expensive. Can detect interactions between </a:t>
-            </a:r>
-            <a:r>
-              <a:rPr lang="en-US" sz="1400" dirty="0" smtClean="0">
-                <a:latin typeface="Calibri" panose="020F0502020204030204" pitchFamily="34" charset="0"/>
-                <a:ea typeface="Calibri" panose="020F0502020204030204" pitchFamily="34" charset="0"/>
-                <a:cs typeface="Times New Roman" panose="02020603050405020304" pitchFamily="18" charset="0"/>
-              </a:rPr>
-              <a:t>features.</a:t>
+              <a:t>: This approach uses Machine Learning algorithm. Performance of this method depends on model selected and data underlying. Usually can suggests the optimal feature subset. Tries different subset of features to figure out optimal features. Typically very computationally expensive. Can detect interactions between features.</a:t>
             </a:r>
           </a:p>
           <a:p>
@@ -4888,20 +4767,12 @@
               </a:spcAft>
             </a:pPr>
             <a:r>
-              <a:rPr lang="en-US" sz="1400" dirty="0" smtClean="0">
-                <a:latin typeface="Calibri" panose="020F0502020204030204" pitchFamily="34" charset="0"/>
-                <a:ea typeface="Calibri" panose="020F0502020204030204" pitchFamily="34" charset="0"/>
-                <a:cs typeface="Times New Roman" panose="02020603050405020304" pitchFamily="18" charset="0"/>
-              </a:rPr>
-              <a:t>Select </a:t>
-            </a:r>
-            <a:r>
               <a:rPr lang="en-US" sz="1400" dirty="0">
                 <a:latin typeface="Calibri" panose="020F0502020204030204" pitchFamily="34" charset="0"/>
                 <a:ea typeface="Calibri" panose="020F0502020204030204" pitchFamily="34" charset="0"/>
                 <a:cs typeface="Times New Roman" panose="02020603050405020304" pitchFamily="18" charset="0"/>
               </a:rPr>
-              <a:t>a set of features, in which different combinations are prepared, evaluated and compared. A predictive model is used to evaluate the combination of features and assign a score based on model accuracy. Example: Backward Elimination, Forward Selection, Bidirectional Elimination,</a:t>
+              <a:t>Select a set of features, in which different combinations are prepared, evaluated and compared. A predictive model is used to evaluate the combination of features and assign a score based on model accuracy. Example: Backward Elimination, Forward Selection, Bidirectional Elimination,</a:t>
             </a:r>
             <a:r>
               <a:rPr lang="en-US" sz="1400" i="1" dirty="0">
@@ -4954,7 +4825,7 @@
               </a:spcAft>
             </a:pPr>
             <a:r>
-              <a:rPr lang="en-US" sz="1400" b="1" dirty="0" smtClean="0">
+              <a:rPr lang="en-US" sz="1400" b="1" dirty="0">
                 <a:solidFill>
                   <a:srgbClr val="FF0000"/>
                 </a:solidFill>
@@ -4962,18 +4833,7 @@
                 <a:ea typeface="Calibri" panose="020F0502020204030204" pitchFamily="34" charset="0"/>
                 <a:cs typeface="Times New Roman" panose="02020603050405020304" pitchFamily="18" charset="0"/>
               </a:rPr>
-              <a:t>Embedded </a:t>
-            </a:r>
-            <a:r>
-              <a:rPr lang="en-US" sz="1400" b="1" dirty="0">
-                <a:solidFill>
-                  <a:srgbClr val="FF0000"/>
-                </a:solidFill>
-                <a:latin typeface="Calibri" panose="020F0502020204030204" pitchFamily="34" charset="0"/>
-                <a:ea typeface="Calibri" panose="020F0502020204030204" pitchFamily="34" charset="0"/>
-                <a:cs typeface="Times New Roman" panose="02020603050405020304" pitchFamily="18" charset="0"/>
-              </a:rPr>
-              <a:t>Methods</a:t>
+              <a:t>Embedded Methods</a:t>
             </a:r>
             <a:r>
               <a:rPr lang="en-US" sz="1400" b="1" dirty="0">
@@ -4989,15 +4849,7 @@
                 <a:ea typeface="Calibri" panose="020F0502020204030204" pitchFamily="34" charset="0"/>
                 <a:cs typeface="Times New Roman" panose="02020603050405020304" pitchFamily="18" charset="0"/>
               </a:rPr>
-              <a:t>Performs feature selection as building the model. Generally less computationally expensive than Wrapper methods. Often provides results that are best of both worlds, often more realistic </a:t>
-            </a:r>
-            <a:r>
-              <a:rPr lang="en-US" sz="1400" dirty="0" smtClean="0">
-                <a:latin typeface="Calibri" panose="020F0502020204030204" pitchFamily="34" charset="0"/>
-                <a:ea typeface="Calibri" panose="020F0502020204030204" pitchFamily="34" charset="0"/>
-                <a:cs typeface="Times New Roman" panose="02020603050405020304" pitchFamily="18" charset="0"/>
-              </a:rPr>
-              <a:t>approach.</a:t>
+              <a:t>Performs feature selection as building the model. Generally less computationally expensive than Wrapper methods. Often provides results that are best of both worlds, often more realistic approach.</a:t>
             </a:r>
           </a:p>
           <a:p>
@@ -5013,20 +4865,12 @@
               </a:spcAft>
             </a:pPr>
             <a:r>
-              <a:rPr lang="en-US" sz="1400" b="1" dirty="0" smtClean="0">
-                <a:latin typeface="Calibri" panose="020F0502020204030204" pitchFamily="34" charset="0"/>
-                <a:ea typeface="Calibri" panose="020F0502020204030204" pitchFamily="34" charset="0"/>
-                <a:cs typeface="Times New Roman" panose="02020603050405020304" pitchFamily="18" charset="0"/>
-              </a:rPr>
-              <a:t>Wrapper </a:t>
-            </a:r>
-            <a:r>
               <a:rPr lang="en-US" sz="1400" b="1" dirty="0">
                 <a:latin typeface="Calibri" panose="020F0502020204030204" pitchFamily="34" charset="0"/>
                 <a:ea typeface="Calibri" panose="020F0502020204030204" pitchFamily="34" charset="0"/>
                 <a:cs typeface="Times New Roman" panose="02020603050405020304" pitchFamily="18" charset="0"/>
               </a:rPr>
-              <a:t>and Embedded methods</a:t>
+              <a:t>Wrapper and Embedded methods</a:t>
             </a:r>
             <a:r>
               <a:rPr lang="en-US" sz="1400" dirty="0">
@@ -5050,7 +4894,7 @@
               </a:spcAft>
             </a:pPr>
             <a:r>
-              <a:rPr lang="en-US" sz="1400" b="1" dirty="0" smtClean="0">
+              <a:rPr lang="en-US" sz="1400" b="1" dirty="0">
                 <a:solidFill>
                   <a:srgbClr val="FF0000"/>
                 </a:solidFill>
@@ -5058,18 +4902,7 @@
                 <a:ea typeface="Calibri" panose="020F0502020204030204" pitchFamily="34" charset="0"/>
                 <a:cs typeface="Times New Roman" panose="02020603050405020304" pitchFamily="18" charset="0"/>
               </a:rPr>
-              <a:t>Hybrid </a:t>
-            </a:r>
-            <a:r>
-              <a:rPr lang="en-US" sz="1400" b="1" dirty="0">
-                <a:solidFill>
-                  <a:srgbClr val="FF0000"/>
-                </a:solidFill>
-                <a:latin typeface="Calibri" panose="020F0502020204030204" pitchFamily="34" charset="0"/>
-                <a:ea typeface="Calibri" panose="020F0502020204030204" pitchFamily="34" charset="0"/>
-                <a:cs typeface="Times New Roman" panose="02020603050405020304" pitchFamily="18" charset="0"/>
-              </a:rPr>
-              <a:t>Methods</a:t>
+              <a:t>Hybrid Methods</a:t>
             </a:r>
             <a:r>
               <a:rPr lang="en-US" sz="1400" b="1" dirty="0">
@@ -5106,13 +4939,6 @@
   <p:clrMapOvr>
     <a:masterClrMapping/>
   </p:clrMapOvr>
-  <p:timing>
-    <p:tnLst>
-      <p:par>
-        <p:cTn id="1" dur="indefinite" restart="never" nodeType="tmRoot"/>
-      </p:par>
-    </p:tnLst>
-  </p:timing>
 </p:sld>
 </file>
 
@@ -5166,10 +4992,10 @@
               </a:spcAft>
             </a:pPr>
             <a:r>
-              <a:rPr lang="en-US" b="1" dirty="0" smtClean="0"/>
+              <a:rPr lang="en-US" b="1" dirty="0"/>
               <a:t>Explanation</a:t>
             </a:r>
-            <a:endParaRPr lang="en-US" sz="1200" b="1" dirty="0" smtClean="0">
+            <a:endParaRPr lang="en-US" sz="1200" b="1" dirty="0">
               <a:latin typeface="Calibri" panose="020F0502020204030204" pitchFamily="34" charset="0"/>
               <a:ea typeface="Calibri" panose="020F0502020204030204" pitchFamily="34" charset="0"/>
               <a:cs typeface="Times New Roman" panose="02020603050405020304" pitchFamily="18" charset="0"/>
@@ -5205,7 +5031,7 @@
                 <a:spcPts val="0"/>
               </a:spcAft>
             </a:pPr>
-            <a:endParaRPr lang="en-US" sz="1400" b="1" dirty="0" smtClean="0">
+            <a:endParaRPr lang="en-US" sz="1400" b="1" dirty="0">
               <a:latin typeface="Calibri" panose="020F0502020204030204" pitchFamily="34" charset="0"/>
               <a:ea typeface="Calibri" panose="020F0502020204030204" pitchFamily="34" charset="0"/>
               <a:cs typeface="Times New Roman" panose="02020603050405020304" pitchFamily="18" charset="0"/>
@@ -5226,15 +5052,7 @@
             </a:pPr>
             <a:r>
               <a:rPr lang="pt-BR" sz="1400"/>
-              <a:t>Tente usar o RFE caso tenha recursos computacionais </a:t>
-            </a:r>
-            <a:r>
-              <a:rPr lang="pt-BR" sz="1400"/>
-              <a:t>para </a:t>
-            </a:r>
-            <a:r>
-              <a:rPr lang="pt-BR" sz="1400" smtClean="0"/>
-              <a:t>isso.</a:t>
+              <a:t>Tente usar o RFE caso tenha recursos computacionais para isso.</a:t>
             </a:r>
           </a:p>
           <a:p>
@@ -5243,12 +5061,8 @@
               <a:buAutoNum type="arabicPeriod"/>
             </a:pPr>
             <a:r>
-              <a:rPr lang="pt-BR" sz="1400" dirty="0" smtClean="0"/>
-              <a:t>Se </a:t>
-            </a:r>
-            <a:r>
               <a:rPr lang="pt-BR" sz="1400" dirty="0"/>
-              <a:t>estiver trabalhando com Classificação e as </a:t>
+              <a:t>Se estiver trabalhando com Classificação e as </a:t>
             </a:r>
             <a:r>
               <a:rPr lang="pt-BR" sz="1400" dirty="0" err="1"/>
@@ -5267,11 +5081,11 @@
               <a:t> ou </a:t>
             </a:r>
             <a:r>
-              <a:rPr lang="pt-BR" sz="1400" dirty="0" err="1" smtClean="0"/>
+              <a:rPr lang="pt-BR" sz="1400" dirty="0" err="1"/>
               <a:t>mutual_info_classif</a:t>
             </a:r>
             <a:r>
-              <a:rPr lang="pt-BR" sz="1400" dirty="0" smtClean="0"/>
+              <a:rPr lang="pt-BR" sz="1400" dirty="0"/>
               <a:t>.</a:t>
             </a:r>
             <a:endParaRPr lang="en-US" sz="1400"/>
@@ -5282,7 +5096,7 @@
               <a:buAutoNum type="arabicPeriod"/>
             </a:pPr>
             <a:r>
-              <a:rPr lang="pt-BR" sz="1400" smtClean="0"/>
+              <a:rPr lang="pt-BR" sz="1400"/>
               <a:t>Se </a:t>
             </a:r>
             <a:r>
@@ -5307,11 +5121,7 @@
             </a:r>
             <a:r>
               <a:rPr lang="pt-BR" sz="1400"/>
-              <a:t>ou </a:t>
-            </a:r>
-            <a:r>
-              <a:rPr lang="pt-BR" sz="1400" smtClean="0"/>
-              <a:t>mutual_info_regression.</a:t>
+              <a:t>ou mutual_info_regression.</a:t>
             </a:r>
             <a:endParaRPr lang="en-US" sz="1400"/>
           </a:p>
@@ -5321,20 +5131,8 @@
               <a:buAutoNum type="arabicPeriod"/>
             </a:pPr>
             <a:r>
-              <a:rPr lang="pt-BR" sz="1400" smtClean="0"/>
-              <a:t>Caso </a:t>
-            </a:r>
-            <a:r>
               <a:rPr lang="pt-BR" sz="1400"/>
-              <a:t>esteja trabalhando com features categóricas </a:t>
-            </a:r>
-            <a:r>
-              <a:rPr lang="pt-BR" sz="1400"/>
-              <a:t>utilize </a:t>
-            </a:r>
-            <a:r>
-              <a:rPr lang="pt-BR" sz="1400" smtClean="0"/>
-              <a:t>chi2</a:t>
+              <a:t>Caso esteja trabalhando com features categóricas utilize chi2</a:t>
             </a:r>
           </a:p>
           <a:p>
@@ -5343,12 +5141,8 @@
               <a:buAutoNum type="arabicPeriod"/>
             </a:pPr>
             <a:r>
-              <a:rPr lang="pt-BR" sz="1400" dirty="0" smtClean="0"/>
-              <a:t>Automatize </a:t>
-            </a:r>
-            <a:r>
               <a:rPr lang="pt-BR" sz="1400" dirty="0"/>
-              <a:t>essa etapa com Pipelines para evitar erros.</a:t>
+              <a:t>Automatize essa etapa com Pipelines para evitar erros.</a:t>
             </a:r>
             <a:endParaRPr lang="en-US" sz="1400"/>
           </a:p>
@@ -5364,13 +5158,6 @@
   <p:clrMapOvr>
     <a:masterClrMapping/>
   </p:clrMapOvr>
-  <p:timing>
-    <p:tnLst>
-      <p:par>
-        <p:cTn id="1" dur="indefinite" restart="never" nodeType="tmRoot"/>
-      </p:par>
-    </p:tnLst>
-  </p:timing>
 </p:sld>
 </file>
 
@@ -5441,18 +5228,13 @@
           <a:p>
             <a:pPr algn="ctr"/>
             <a:r>
-              <a:rPr lang="en-US" dirty="0" smtClean="0">
+              <a:rPr lang="en-US" dirty="0">
                 <a:solidFill>
                   <a:schemeClr val="tx1"/>
                 </a:solidFill>
               </a:rPr>
               <a:t>Filter Method: How to select the estimator</a:t>
             </a:r>
-            <a:endParaRPr lang="en-US" dirty="0">
-              <a:solidFill>
-                <a:schemeClr val="tx1"/>
-              </a:solidFill>
-            </a:endParaRPr>
           </a:p>
         </p:txBody>
       </p:sp>
@@ -5501,18 +5283,13 @@
           <a:p>
             <a:pPr algn="ctr"/>
             <a:r>
-              <a:rPr lang="en-US" dirty="0" smtClean="0">
+              <a:rPr lang="en-US" dirty="0">
                 <a:solidFill>
                   <a:schemeClr val="tx1"/>
                 </a:solidFill>
               </a:rPr>
               <a:t>Input Variable</a:t>
             </a:r>
-            <a:endParaRPr lang="en-US" dirty="0">
-              <a:solidFill>
-                <a:schemeClr val="tx1"/>
-              </a:solidFill>
-            </a:endParaRPr>
           </a:p>
         </p:txBody>
       </p:sp>
@@ -5561,18 +5338,13 @@
           <a:p>
             <a:pPr algn="ctr"/>
             <a:r>
-              <a:rPr lang="en-US" dirty="0" smtClean="0">
+              <a:rPr lang="en-US" dirty="0">
                 <a:solidFill>
                   <a:schemeClr val="tx1"/>
                 </a:solidFill>
               </a:rPr>
               <a:t>Categorical</a:t>
             </a:r>
-            <a:endParaRPr lang="en-US" dirty="0">
-              <a:solidFill>
-                <a:schemeClr val="tx1"/>
-              </a:solidFill>
-            </a:endParaRPr>
           </a:p>
         </p:txBody>
       </p:sp>
@@ -5621,18 +5393,13 @@
           <a:p>
             <a:pPr algn="ctr"/>
             <a:r>
-              <a:rPr lang="en-US" dirty="0" smtClean="0">
+              <a:rPr lang="en-US" dirty="0">
                 <a:solidFill>
                   <a:schemeClr val="tx1"/>
                 </a:solidFill>
               </a:rPr>
               <a:t>Numerical</a:t>
             </a:r>
-            <a:endParaRPr lang="en-US" dirty="0">
-              <a:solidFill>
-                <a:schemeClr val="tx1"/>
-              </a:solidFill>
-            </a:endParaRPr>
           </a:p>
         </p:txBody>
       </p:sp>
@@ -5684,7 +5451,7 @@
               <a:buChar char="•"/>
             </a:pPr>
             <a:r>
-              <a:rPr lang="pt-BR" sz="1600" dirty="0" smtClean="0">
+              <a:rPr lang="pt-BR" sz="1600" dirty="0">
                 <a:solidFill>
                   <a:schemeClr val="tx1"/>
                 </a:solidFill>
@@ -5698,7 +5465,7 @@
               <a:buChar char="•"/>
             </a:pPr>
             <a:r>
-              <a:rPr lang="pt-BR" sz="1600" dirty="0" err="1" smtClean="0">
+              <a:rPr lang="pt-BR" sz="1600" dirty="0" err="1">
                 <a:solidFill>
                   <a:schemeClr val="tx1"/>
                 </a:solidFill>
@@ -5761,14 +5528,14 @@
               <a:buChar char="•"/>
             </a:pPr>
             <a:r>
-              <a:rPr lang="pt-BR" sz="1600" dirty="0" err="1" smtClean="0">
+              <a:rPr lang="pt-BR" sz="1600" dirty="0" err="1">
                 <a:solidFill>
                   <a:schemeClr val="tx1"/>
                 </a:solidFill>
               </a:rPr>
               <a:t>Pearson’s</a:t>
             </a:r>
-            <a:endParaRPr lang="pt-BR" sz="1600" dirty="0" smtClean="0">
+            <a:endParaRPr lang="pt-BR" sz="1600" dirty="0">
               <a:solidFill>
                 <a:schemeClr val="tx1"/>
               </a:solidFill>
@@ -5780,14 +5547,14 @@
               <a:buChar char="•"/>
             </a:pPr>
             <a:r>
-              <a:rPr lang="pt-BR" sz="1600" dirty="0" err="1" smtClean="0">
+              <a:rPr lang="pt-BR" sz="1600" dirty="0" err="1">
                 <a:solidFill>
                   <a:schemeClr val="tx1"/>
                 </a:solidFill>
               </a:rPr>
               <a:t>Spearman´s</a:t>
             </a:r>
-            <a:endParaRPr lang="pt-BR" sz="1600" dirty="0" smtClean="0">
+            <a:endParaRPr lang="pt-BR" sz="1600" dirty="0">
               <a:solidFill>
                 <a:schemeClr val="tx1"/>
               </a:solidFill>
@@ -5799,7 +5566,7 @@
               <a:buChar char="•"/>
             </a:pPr>
             <a:r>
-              <a:rPr lang="pt-BR" sz="1600" dirty="0" smtClean="0">
+              <a:rPr lang="pt-BR" sz="1600" dirty="0">
                 <a:solidFill>
                   <a:schemeClr val="tx1"/>
                 </a:solidFill>
@@ -5807,14 +5574,14 @@
               <a:t>Mutual </a:t>
             </a:r>
             <a:r>
-              <a:rPr lang="pt-BR" sz="1600" dirty="0" err="1" smtClean="0">
+              <a:rPr lang="pt-BR" sz="1600" dirty="0" err="1">
                 <a:solidFill>
                   <a:schemeClr val="tx1"/>
                 </a:solidFill>
               </a:rPr>
               <a:t>Information</a:t>
             </a:r>
-            <a:endParaRPr lang="pt-BR" sz="1600" dirty="0" smtClean="0">
+            <a:endParaRPr lang="pt-BR" sz="1600" dirty="0">
               <a:solidFill>
                 <a:schemeClr val="tx1"/>
               </a:solidFill>
@@ -5965,7 +5732,7 @@
               <a:buChar char="•"/>
             </a:pPr>
             <a:r>
-              <a:rPr lang="pt-BR" sz="1600" dirty="0" smtClean="0">
+              <a:rPr lang="pt-BR" sz="1600" dirty="0">
                 <a:solidFill>
                   <a:schemeClr val="tx1"/>
                 </a:solidFill>
@@ -5973,14 +5740,14 @@
               <a:t>Chi-</a:t>
             </a:r>
             <a:r>
-              <a:rPr lang="pt-BR" sz="1600" dirty="0" err="1" smtClean="0">
+              <a:rPr lang="pt-BR" sz="1600" dirty="0" err="1">
                 <a:solidFill>
                   <a:schemeClr val="tx1"/>
                 </a:solidFill>
               </a:rPr>
               <a:t>Squared</a:t>
             </a:r>
-            <a:endParaRPr lang="pt-BR" sz="1600" dirty="0" smtClean="0">
+            <a:endParaRPr lang="pt-BR" sz="1600" dirty="0">
               <a:solidFill>
                 <a:schemeClr val="tx1"/>
               </a:solidFill>
@@ -5992,7 +5759,7 @@
               <a:buChar char="•"/>
             </a:pPr>
             <a:r>
-              <a:rPr lang="pt-BR" sz="1600" dirty="0" smtClean="0">
+              <a:rPr lang="pt-BR" sz="1600" dirty="0">
                 <a:solidFill>
                   <a:schemeClr val="tx1"/>
                 </a:solidFill>
@@ -6000,7 +5767,7 @@
               <a:t>Mutual </a:t>
             </a:r>
             <a:r>
-              <a:rPr lang="pt-BR" sz="1600" dirty="0" err="1" smtClean="0">
+              <a:rPr lang="pt-BR" sz="1600" dirty="0" err="1">
                 <a:solidFill>
                   <a:schemeClr val="tx1"/>
                 </a:solidFill>
@@ -6179,21 +5946,8 @@
                   <a:schemeClr val="tx1"/>
                 </a:solidFill>
               </a:rPr>
-              <a:t>Output </a:t>
-            </a:r>
-            <a:r>
-              <a:rPr lang="en-US" dirty="0" smtClean="0">
-                <a:solidFill>
-                  <a:schemeClr val="tx1"/>
-                </a:solidFill>
-              </a:rPr>
-              <a:t>Variable</a:t>
-            </a:r>
-            <a:endParaRPr lang="en-US" dirty="0">
-              <a:solidFill>
-                <a:schemeClr val="tx1"/>
-              </a:solidFill>
-            </a:endParaRPr>
+              <a:t>Output Variable</a:t>
+            </a:r>
           </a:p>
         </p:txBody>
       </p:sp>
@@ -6242,18 +5996,13 @@
           <a:p>
             <a:pPr algn="ctr"/>
             <a:r>
-              <a:rPr lang="en-US" dirty="0" smtClean="0">
+              <a:rPr lang="en-US" dirty="0">
                 <a:solidFill>
                   <a:schemeClr val="tx1"/>
                 </a:solidFill>
               </a:rPr>
               <a:t>Output Variable</a:t>
             </a:r>
-            <a:endParaRPr lang="en-US" dirty="0">
-              <a:solidFill>
-                <a:schemeClr val="tx1"/>
-              </a:solidFill>
-            </a:endParaRPr>
           </a:p>
         </p:txBody>
       </p:sp>
@@ -6338,18 +6087,13 @@
           <a:p>
             <a:pPr algn="ctr"/>
             <a:r>
-              <a:rPr lang="en-US" dirty="0" smtClean="0">
+              <a:rPr lang="en-US" dirty="0">
                 <a:solidFill>
                   <a:schemeClr val="tx1"/>
                 </a:solidFill>
               </a:rPr>
               <a:t>Categorical</a:t>
             </a:r>
-            <a:endParaRPr lang="en-US" dirty="0">
-              <a:solidFill>
-                <a:schemeClr val="tx1"/>
-              </a:solidFill>
-            </a:endParaRPr>
           </a:p>
         </p:txBody>
       </p:sp>
@@ -6398,18 +6142,13 @@
           <a:p>
             <a:pPr algn="ctr"/>
             <a:r>
-              <a:rPr lang="en-US" dirty="0" smtClean="0">
+              <a:rPr lang="en-US" dirty="0">
                 <a:solidFill>
                   <a:schemeClr val="tx1"/>
                 </a:solidFill>
               </a:rPr>
               <a:t>Numerical</a:t>
             </a:r>
-            <a:endParaRPr lang="en-US" dirty="0">
-              <a:solidFill>
-                <a:schemeClr val="tx1"/>
-              </a:solidFill>
-            </a:endParaRPr>
           </a:p>
         </p:txBody>
       </p:sp>
@@ -6534,18 +6273,13 @@
           <a:p>
             <a:pPr algn="ctr"/>
             <a:r>
-              <a:rPr lang="en-US" dirty="0" smtClean="0">
+              <a:rPr lang="en-US" dirty="0">
                 <a:solidFill>
                   <a:schemeClr val="tx1"/>
                 </a:solidFill>
               </a:rPr>
               <a:t>Categorical</a:t>
             </a:r>
-            <a:endParaRPr lang="en-US" dirty="0">
-              <a:solidFill>
-                <a:schemeClr val="tx1"/>
-              </a:solidFill>
-            </a:endParaRPr>
           </a:p>
         </p:txBody>
       </p:sp>
@@ -6594,18 +6328,13 @@
           <a:p>
             <a:pPr algn="ctr"/>
             <a:r>
-              <a:rPr lang="en-US" dirty="0" smtClean="0">
+              <a:rPr lang="en-US" dirty="0">
                 <a:solidFill>
                   <a:schemeClr val="tx1"/>
                 </a:solidFill>
               </a:rPr>
               <a:t>Numerical</a:t>
             </a:r>
-            <a:endParaRPr lang="en-US" dirty="0">
-              <a:solidFill>
-                <a:schemeClr val="tx1"/>
-              </a:solidFill>
-            </a:endParaRPr>
           </a:p>
         </p:txBody>
       </p:sp>
@@ -6839,13 +6568,6 @@
   <p:clrMapOvr>
     <a:masterClrMapping/>
   </p:clrMapOvr>
-  <p:timing>
-    <p:tnLst>
-      <p:par>
-        <p:cTn id="1" dur="indefinite" restart="never" nodeType="tmRoot"/>
-      </p:par>
-    </p:tnLst>
-  </p:timing>
 </p:sld>
 </file>
 
@@ -7114,18 +6836,13 @@
           <a:p>
             <a:pPr algn="ctr"/>
             <a:r>
-              <a:rPr lang="en-US" dirty="0" smtClean="0">
+              <a:rPr lang="en-US" dirty="0">
                 <a:solidFill>
                   <a:schemeClr val="tx1"/>
                 </a:solidFill>
               </a:rPr>
               <a:t>Machine Learning</a:t>
             </a:r>
-            <a:endParaRPr lang="en-US" dirty="0">
-              <a:solidFill>
-                <a:schemeClr val="tx1"/>
-              </a:solidFill>
-            </a:endParaRPr>
           </a:p>
         </p:txBody>
       </p:sp>
@@ -7174,18 +6891,13 @@
           <a:p>
             <a:pPr algn="ctr"/>
             <a:r>
-              <a:rPr lang="en-US" dirty="0" smtClean="0">
+              <a:rPr lang="en-US" dirty="0">
                 <a:solidFill>
                   <a:schemeClr val="tx1"/>
                 </a:solidFill>
               </a:rPr>
               <a:t>Unsupervised Learning</a:t>
             </a:r>
-            <a:endParaRPr lang="en-US" dirty="0">
-              <a:solidFill>
-                <a:schemeClr val="tx1"/>
-              </a:solidFill>
-            </a:endParaRPr>
           </a:p>
         </p:txBody>
       </p:sp>
@@ -7234,18 +6946,13 @@
           <a:p>
             <a:pPr algn="ctr"/>
             <a:r>
-              <a:rPr lang="en-US" dirty="0" smtClean="0">
+              <a:rPr lang="en-US" dirty="0">
                 <a:solidFill>
                   <a:schemeClr val="tx1"/>
                 </a:solidFill>
               </a:rPr>
               <a:t>Supervised Learning</a:t>
             </a:r>
-            <a:endParaRPr lang="en-US" dirty="0">
-              <a:solidFill>
-                <a:schemeClr val="tx1"/>
-              </a:solidFill>
-            </a:endParaRPr>
           </a:p>
         </p:txBody>
       </p:sp>
@@ -7294,18 +7001,13 @@
           <a:p>
             <a:pPr algn="ctr"/>
             <a:r>
-              <a:rPr lang="en-US" dirty="0" smtClean="0">
+              <a:rPr lang="en-US" dirty="0">
                 <a:solidFill>
                   <a:schemeClr val="tx1"/>
                 </a:solidFill>
               </a:rPr>
               <a:t>Reinforcement Learning</a:t>
             </a:r>
-            <a:endParaRPr lang="en-US" dirty="0">
-              <a:solidFill>
-                <a:schemeClr val="tx1"/>
-              </a:solidFill>
-            </a:endParaRPr>
           </a:p>
         </p:txBody>
       </p:sp>
@@ -7354,18 +7056,13 @@
           <a:p>
             <a:pPr algn="ctr"/>
             <a:r>
-              <a:rPr lang="en-US" dirty="0" smtClean="0">
+              <a:rPr lang="en-US" dirty="0">
                 <a:solidFill>
                   <a:schemeClr val="tx1"/>
                 </a:solidFill>
               </a:rPr>
               <a:t>Prediction</a:t>
             </a:r>
-            <a:endParaRPr lang="en-US" dirty="0">
-              <a:solidFill>
-                <a:schemeClr val="tx1"/>
-              </a:solidFill>
-            </a:endParaRPr>
           </a:p>
         </p:txBody>
       </p:sp>
@@ -7414,18 +7111,13 @@
           <a:p>
             <a:pPr algn="ctr"/>
             <a:r>
-              <a:rPr lang="en-US" dirty="0" smtClean="0">
+              <a:rPr lang="en-US" dirty="0">
                 <a:solidFill>
                   <a:schemeClr val="tx1"/>
                 </a:solidFill>
               </a:rPr>
               <a:t>Classification</a:t>
             </a:r>
-            <a:endParaRPr lang="en-US" dirty="0">
-              <a:solidFill>
-                <a:schemeClr val="tx1"/>
-              </a:solidFill>
-            </a:endParaRPr>
           </a:p>
         </p:txBody>
       </p:sp>
@@ -7474,18 +7166,13 @@
           <a:p>
             <a:pPr algn="ctr"/>
             <a:r>
-              <a:rPr lang="en-US" dirty="0" smtClean="0">
+              <a:rPr lang="en-US" dirty="0">
                 <a:solidFill>
                   <a:schemeClr val="tx1"/>
                 </a:solidFill>
               </a:rPr>
               <a:t>Clustering</a:t>
             </a:r>
-            <a:endParaRPr lang="en-US" dirty="0">
-              <a:solidFill>
-                <a:schemeClr val="tx1"/>
-              </a:solidFill>
-            </a:endParaRPr>
           </a:p>
         </p:txBody>
       </p:sp>
@@ -7534,18 +7221,13 @@
           <a:p>
             <a:pPr algn="ctr"/>
             <a:r>
-              <a:rPr lang="en-US" dirty="0" smtClean="0">
+              <a:rPr lang="en-US" dirty="0">
                 <a:solidFill>
                   <a:schemeClr val="tx1"/>
                 </a:solidFill>
               </a:rPr>
               <a:t>Decision Making</a:t>
             </a:r>
-            <a:endParaRPr lang="en-US" dirty="0">
-              <a:solidFill>
-                <a:schemeClr val="tx1"/>
-              </a:solidFill>
-            </a:endParaRPr>
           </a:p>
         </p:txBody>
       </p:sp>
@@ -7597,7 +7279,7 @@
               <a:buChar char="•"/>
             </a:pPr>
             <a:r>
-              <a:rPr lang="en-US" sz="1600" dirty="0" smtClean="0">
+              <a:rPr lang="en-US" sz="1600" dirty="0">
                 <a:solidFill>
                   <a:schemeClr val="tx1"/>
                 </a:solidFill>
@@ -7611,7 +7293,7 @@
               <a:buChar char="•"/>
             </a:pPr>
             <a:r>
-              <a:rPr lang="en-US" sz="1600" dirty="0" smtClean="0">
+              <a:rPr lang="en-US" sz="1600" dirty="0">
                 <a:solidFill>
                   <a:schemeClr val="tx1"/>
                 </a:solidFill>
@@ -7625,7 +7307,7 @@
               <a:buChar char="•"/>
             </a:pPr>
             <a:r>
-              <a:rPr lang="en-US" sz="1600" dirty="0" smtClean="0">
+              <a:rPr lang="en-US" sz="1600" dirty="0">
                 <a:solidFill>
                   <a:schemeClr val="tx1"/>
                 </a:solidFill>
@@ -7639,7 +7321,7 @@
               <a:buChar char="•"/>
             </a:pPr>
             <a:r>
-              <a:rPr lang="en-US" sz="1600" dirty="0" smtClean="0">
+              <a:rPr lang="en-US" sz="1600" dirty="0">
                 <a:solidFill>
                   <a:schemeClr val="tx1"/>
                 </a:solidFill>
@@ -7653,7 +7335,7 @@
               <a:buChar char="•"/>
             </a:pPr>
             <a:r>
-              <a:rPr lang="en-US" sz="1600" dirty="0" smtClean="0">
+              <a:rPr lang="en-US" sz="1600" dirty="0">
                 <a:solidFill>
                   <a:schemeClr val="tx1"/>
                 </a:solidFill>
@@ -7667,18 +7349,13 @@
               <a:buChar char="•"/>
             </a:pPr>
             <a:r>
-              <a:rPr lang="en-US" sz="1600" dirty="0" smtClean="0">
+              <a:rPr lang="en-US" sz="1600" dirty="0">
                 <a:solidFill>
                   <a:schemeClr val="tx1"/>
                 </a:solidFill>
               </a:rPr>
               <a:t>Decision tree</a:t>
             </a:r>
-            <a:endParaRPr lang="en-US" sz="1600" dirty="0">
-              <a:solidFill>
-                <a:schemeClr val="tx1"/>
-              </a:solidFill>
-            </a:endParaRPr>
           </a:p>
         </p:txBody>
       </p:sp>
@@ -7730,7 +7407,7 @@
               <a:buChar char="•"/>
             </a:pPr>
             <a:r>
-              <a:rPr lang="en-US" sz="1600" dirty="0" smtClean="0">
+              <a:rPr lang="en-US" sz="1600" dirty="0">
                 <a:solidFill>
                   <a:schemeClr val="tx1"/>
                 </a:solidFill>
@@ -7744,7 +7421,7 @@
               <a:buChar char="•"/>
             </a:pPr>
             <a:r>
-              <a:rPr lang="en-US" sz="1600" dirty="0" smtClean="0">
+              <a:rPr lang="en-US" sz="1600" dirty="0">
                 <a:solidFill>
                   <a:schemeClr val="tx1"/>
                 </a:solidFill>
@@ -7758,7 +7435,7 @@
               <a:buChar char="•"/>
             </a:pPr>
             <a:r>
-              <a:rPr lang="en-US" sz="1600" dirty="0" smtClean="0">
+              <a:rPr lang="en-US" sz="1600" dirty="0">
                 <a:solidFill>
                   <a:schemeClr val="tx1"/>
                 </a:solidFill>
@@ -7766,7 +7443,7 @@
               <a:t>Decision</a:t>
             </a:r>
             <a:r>
-              <a:rPr lang="pt-BR" sz="1600" dirty="0" smtClean="0">
+              <a:rPr lang="pt-BR" sz="1600" dirty="0">
                 <a:solidFill>
                   <a:schemeClr val="tx1"/>
                 </a:solidFill>
@@ -7774,7 +7451,7 @@
               <a:t> </a:t>
             </a:r>
             <a:r>
-              <a:rPr lang="en-US" sz="1600" dirty="0" smtClean="0">
+              <a:rPr lang="en-US" sz="1600" dirty="0">
                 <a:solidFill>
                   <a:schemeClr val="tx1"/>
                 </a:solidFill>
@@ -7788,7 +7465,7 @@
               <a:buChar char="•"/>
             </a:pPr>
             <a:r>
-              <a:rPr lang="en-US" sz="1600" dirty="0" smtClean="0">
+              <a:rPr lang="en-US" sz="1600" dirty="0">
                 <a:solidFill>
                   <a:schemeClr val="tx1"/>
                 </a:solidFill>
@@ -7802,7 +7479,7 @@
               <a:buChar char="•"/>
             </a:pPr>
             <a:r>
-              <a:rPr lang="en-US" sz="1600" dirty="0" smtClean="0">
+              <a:rPr lang="en-US" sz="1600" dirty="0">
                 <a:solidFill>
                   <a:schemeClr val="tx1"/>
                 </a:solidFill>
@@ -7816,18 +7493,13 @@
               <a:buChar char="•"/>
             </a:pPr>
             <a:r>
-              <a:rPr lang="en-US" sz="1600" dirty="0" smtClean="0">
+              <a:rPr lang="en-US" sz="1600" dirty="0">
                 <a:solidFill>
                   <a:schemeClr val="tx1"/>
                 </a:solidFill>
               </a:rPr>
               <a:t>K-Nearest Neighbors</a:t>
             </a:r>
-            <a:endParaRPr lang="en-US" sz="1600" dirty="0">
-              <a:solidFill>
-                <a:schemeClr val="tx1"/>
-              </a:solidFill>
-            </a:endParaRPr>
           </a:p>
         </p:txBody>
       </p:sp>
@@ -7879,7 +7551,7 @@
               <a:buChar char="•"/>
             </a:pPr>
             <a:r>
-              <a:rPr lang="en-US" sz="1600" dirty="0" smtClean="0">
+              <a:rPr lang="en-US" sz="1600" dirty="0">
                 <a:solidFill>
                   <a:schemeClr val="tx1"/>
                 </a:solidFill>
@@ -7893,7 +7565,7 @@
               <a:buChar char="•"/>
             </a:pPr>
             <a:r>
-              <a:rPr lang="en-US" sz="1600" dirty="0" smtClean="0">
+              <a:rPr lang="en-US" sz="1600" dirty="0">
                 <a:solidFill>
                   <a:schemeClr val="tx1"/>
                 </a:solidFill>
@@ -7901,7 +7573,7 @@
               <a:t>Mean</a:t>
             </a:r>
             <a:r>
-              <a:rPr lang="pt-BR" sz="1600" dirty="0" smtClean="0">
+              <a:rPr lang="pt-BR" sz="1600" dirty="0">
                 <a:solidFill>
                   <a:schemeClr val="tx1"/>
                 </a:solidFill>
@@ -7915,7 +7587,7 @@
               <a:buChar char="•"/>
             </a:pPr>
             <a:r>
-              <a:rPr lang="pt-BR" sz="1600" dirty="0" smtClean="0">
+              <a:rPr lang="pt-BR" sz="1600" dirty="0">
                 <a:solidFill>
                   <a:schemeClr val="tx1"/>
                 </a:solidFill>
@@ -7929,7 +7601,7 @@
               <a:buChar char="•"/>
             </a:pPr>
             <a:r>
-              <a:rPr lang="en-US" sz="1600" dirty="0" smtClean="0">
+              <a:rPr lang="en-US" sz="1600" dirty="0">
                 <a:solidFill>
                   <a:schemeClr val="tx1"/>
                 </a:solidFill>
@@ -7937,7 +7609,7 @@
               <a:t>Agglomerative</a:t>
             </a:r>
             <a:r>
-              <a:rPr lang="pt-BR" sz="1600" dirty="0" smtClean="0">
+              <a:rPr lang="pt-BR" sz="1600" dirty="0">
                 <a:solidFill>
                   <a:schemeClr val="tx1"/>
                 </a:solidFill>
@@ -7945,7 +7617,7 @@
               <a:t> </a:t>
             </a:r>
             <a:r>
-              <a:rPr lang="en-US" sz="1600" dirty="0" smtClean="0">
+              <a:rPr lang="en-US" sz="1600" dirty="0">
                 <a:solidFill>
                   <a:schemeClr val="tx1"/>
                 </a:solidFill>
@@ -7959,12 +7631,62 @@
               <a:buChar char="•"/>
             </a:pPr>
             <a:r>
-              <a:rPr lang="en-US" sz="1600" dirty="0" smtClean="0">
+              <a:rPr lang="en-US" sz="1600" dirty="0">
                 <a:solidFill>
                   <a:schemeClr val="tx1"/>
                 </a:solidFill>
               </a:rPr>
               <a:t>Gaussian Mixture</a:t>
+            </a:r>
+          </a:p>
+          <a:p>
+            <a:pPr marL="285750" indent="-285750">
+              <a:buFont typeface="Arial" panose="020B0604020202020204" pitchFamily="34" charset="0"/>
+              <a:buChar char="•"/>
+            </a:pPr>
+            <a:r>
+              <a:rPr lang="en-US" sz="1600" dirty="0" err="1">
+                <a:solidFill>
+                  <a:schemeClr val="tx1"/>
+                </a:solidFill>
+              </a:rPr>
+              <a:t>Lantent</a:t>
+            </a:r>
+            <a:r>
+              <a:rPr lang="en-US" sz="1600" dirty="0">
+                <a:solidFill>
+                  <a:schemeClr val="tx1"/>
+                </a:solidFill>
+              </a:rPr>
+              <a:t> Dirichlet analysis</a:t>
+            </a:r>
+          </a:p>
+          <a:p>
+            <a:pPr marL="285750" indent="-285750">
+              <a:buFont typeface="Arial" panose="020B0604020202020204" pitchFamily="34" charset="0"/>
+              <a:buChar char="•"/>
+            </a:pPr>
+            <a:r>
+              <a:rPr lang="en-US" sz="1600" dirty="0">
+                <a:solidFill>
+                  <a:schemeClr val="tx1"/>
+                </a:solidFill>
+              </a:rPr>
+              <a:t>SVD </a:t>
+            </a:r>
+          </a:p>
+          <a:p>
+            <a:pPr marL="285750" indent="-285750">
+              <a:buFont typeface="Arial" panose="020B0604020202020204" pitchFamily="34" charset="0"/>
+              <a:buChar char="•"/>
+            </a:pPr>
+            <a:r>
+              <a:rPr lang="en-US" sz="1600" dirty="0">
+                <a:solidFill>
+                  <a:schemeClr val="tx1"/>
+                </a:solidFill>
+              </a:rPr>
+              <a:t>KNN</a:t>
             </a:r>
           </a:p>
           <a:p>
@@ -8028,7 +7750,7 @@
               <a:buChar char="•"/>
             </a:pPr>
             <a:r>
-              <a:rPr lang="en-US" sz="1600" dirty="0" smtClean="0">
+              <a:rPr lang="en-US" sz="1600" dirty="0">
                 <a:solidFill>
                   <a:schemeClr val="tx1"/>
                 </a:solidFill>
@@ -8042,7 +7764,7 @@
               <a:buChar char="•"/>
             </a:pPr>
             <a:r>
-              <a:rPr lang="pt-BR" sz="1600" dirty="0" smtClean="0">
+              <a:rPr lang="pt-BR" sz="1600" dirty="0">
                 <a:solidFill>
                   <a:schemeClr val="tx1"/>
                 </a:solidFill>
@@ -8056,13 +7778,47 @@
               <a:buChar char="•"/>
             </a:pPr>
             <a:r>
-              <a:rPr lang="pt-BR" sz="1600" dirty="0" smtClean="0">
+              <a:rPr lang="pt-BR" sz="1600" dirty="0">
                 <a:solidFill>
                   <a:schemeClr val="tx1"/>
                 </a:solidFill>
               </a:rPr>
               <a:t>TD-Learning</a:t>
             </a:r>
+          </a:p>
+          <a:p>
+            <a:pPr marL="285750" indent="-285750">
+              <a:buFont typeface="Arial" panose="020B0604020202020204" pitchFamily="34" charset="0"/>
+              <a:buChar char="•"/>
+            </a:pPr>
+            <a:r>
+              <a:rPr lang="pt-BR" sz="1600" dirty="0">
+                <a:solidFill>
+                  <a:schemeClr val="tx1"/>
+                </a:solidFill>
+              </a:rPr>
+              <a:t>Monte carlos</a:t>
+            </a:r>
+          </a:p>
+          <a:p>
+            <a:pPr marL="285750" indent="-285750">
+              <a:buFont typeface="Arial" panose="020B0604020202020204" pitchFamily="34" charset="0"/>
+              <a:buChar char="•"/>
+            </a:pPr>
+            <a:r>
+              <a:rPr lang="pt-BR" sz="1600" dirty="0">
+                <a:solidFill>
+                  <a:schemeClr val="tx1"/>
+                </a:solidFill>
+              </a:rPr>
+              <a:t>Markov decision process</a:t>
+            </a:r>
+          </a:p>
+          <a:p>
+            <a:pPr marL="285750" indent="-285750">
+              <a:buFont typeface="Arial" panose="020B0604020202020204" pitchFamily="34" charset="0"/>
+              <a:buChar char="•"/>
+            </a:pPr>
             <a:endParaRPr lang="en-US" sz="1600" dirty="0">
               <a:solidFill>
                 <a:schemeClr val="tx1"/>
@@ -8381,13 +8137,6 @@
   <p:clrMapOvr>
     <a:masterClrMapping/>
   </p:clrMapOvr>
-  <p:timing>
-    <p:tnLst>
-      <p:par>
-        <p:cTn id="1" dur="indefinite" restart="never" nodeType="tmRoot"/>
-      </p:par>
-    </p:tnLst>
-  </p:timing>
 </p:sld>
 </file>
 

--- a/type model.pptx
+++ b/type model.pptx
@@ -13,6 +13,10 @@
     <p:sldId id="261" r:id="rId7"/>
     <p:sldId id="260" r:id="rId8"/>
     <p:sldId id="263" r:id="rId9"/>
+    <p:sldId id="267" r:id="rId10"/>
+    <p:sldId id="268" r:id="rId11"/>
+    <p:sldId id="269" r:id="rId12"/>
+    <p:sldId id="270" r:id="rId13"/>
   </p:sldIdLst>
   <p:sldSz cx="12192000" cy="6858000"/>
   <p:notesSz cx="6858000" cy="9144000"/>
@@ -250,7 +254,7 @@
           <a:p>
             <a:fld id="{9394FC15-C62C-47D9-AA63-E5A366B8138A}" type="datetimeFigureOut">
               <a:rPr lang="en-US" smtClean="0"/>
-              <a:t>2/22/2023</a:t>
+              <a:t>2/23/2023</a:t>
             </a:fld>
             <a:endParaRPr lang="en-US" dirty="0"/>
           </a:p>
@@ -420,7 +424,7 @@
           <a:p>
             <a:fld id="{9394FC15-C62C-47D9-AA63-E5A366B8138A}" type="datetimeFigureOut">
               <a:rPr lang="en-US" smtClean="0"/>
-              <a:t>2/22/2023</a:t>
+              <a:t>2/23/2023</a:t>
             </a:fld>
             <a:endParaRPr lang="en-US" dirty="0"/>
           </a:p>
@@ -600,7 +604,7 @@
           <a:p>
             <a:fld id="{9394FC15-C62C-47D9-AA63-E5A366B8138A}" type="datetimeFigureOut">
               <a:rPr lang="en-US" smtClean="0"/>
-              <a:t>2/22/2023</a:t>
+              <a:t>2/23/2023</a:t>
             </a:fld>
             <a:endParaRPr lang="en-US" dirty="0"/>
           </a:p>
@@ -770,7 +774,7 @@
           <a:p>
             <a:fld id="{9394FC15-C62C-47D9-AA63-E5A366B8138A}" type="datetimeFigureOut">
               <a:rPr lang="en-US" smtClean="0"/>
-              <a:t>2/22/2023</a:t>
+              <a:t>2/23/2023</a:t>
             </a:fld>
             <a:endParaRPr lang="en-US" dirty="0"/>
           </a:p>
@@ -1016,7 +1020,7 @@
           <a:p>
             <a:fld id="{9394FC15-C62C-47D9-AA63-E5A366B8138A}" type="datetimeFigureOut">
               <a:rPr lang="en-US" smtClean="0"/>
-              <a:t>2/22/2023</a:t>
+              <a:t>2/23/2023</a:t>
             </a:fld>
             <a:endParaRPr lang="en-US" dirty="0"/>
           </a:p>
@@ -1248,7 +1252,7 @@
           <a:p>
             <a:fld id="{9394FC15-C62C-47D9-AA63-E5A366B8138A}" type="datetimeFigureOut">
               <a:rPr lang="en-US" smtClean="0"/>
-              <a:t>2/22/2023</a:t>
+              <a:t>2/23/2023</a:t>
             </a:fld>
             <a:endParaRPr lang="en-US" dirty="0"/>
           </a:p>
@@ -1615,7 +1619,7 @@
           <a:p>
             <a:fld id="{9394FC15-C62C-47D9-AA63-E5A366B8138A}" type="datetimeFigureOut">
               <a:rPr lang="en-US" smtClean="0"/>
-              <a:t>2/22/2023</a:t>
+              <a:t>2/23/2023</a:t>
             </a:fld>
             <a:endParaRPr lang="en-US" dirty="0"/>
           </a:p>
@@ -1733,7 +1737,7 @@
           <a:p>
             <a:fld id="{9394FC15-C62C-47D9-AA63-E5A366B8138A}" type="datetimeFigureOut">
               <a:rPr lang="en-US" smtClean="0"/>
-              <a:t>2/22/2023</a:t>
+              <a:t>2/23/2023</a:t>
             </a:fld>
             <a:endParaRPr lang="en-US" dirty="0"/>
           </a:p>
@@ -1828,7 +1832,7 @@
           <a:p>
             <a:fld id="{9394FC15-C62C-47D9-AA63-E5A366B8138A}" type="datetimeFigureOut">
               <a:rPr lang="en-US" smtClean="0"/>
-              <a:t>2/22/2023</a:t>
+              <a:t>2/23/2023</a:t>
             </a:fld>
             <a:endParaRPr lang="en-US" dirty="0"/>
           </a:p>
@@ -2105,7 +2109,7 @@
           <a:p>
             <a:fld id="{9394FC15-C62C-47D9-AA63-E5A366B8138A}" type="datetimeFigureOut">
               <a:rPr lang="en-US" smtClean="0"/>
-              <a:t>2/22/2023</a:t>
+              <a:t>2/23/2023</a:t>
             </a:fld>
             <a:endParaRPr lang="en-US" dirty="0"/>
           </a:p>
@@ -2358,7 +2362,7 @@
           <a:p>
             <a:fld id="{9394FC15-C62C-47D9-AA63-E5A366B8138A}" type="datetimeFigureOut">
               <a:rPr lang="en-US" smtClean="0"/>
-              <a:t>2/22/2023</a:t>
+              <a:t>2/23/2023</a:t>
             </a:fld>
             <a:endParaRPr lang="en-US" dirty="0"/>
           </a:p>
@@ -2571,7 +2575,7 @@
           <a:p>
             <a:fld id="{9394FC15-C62C-47D9-AA63-E5A366B8138A}" type="datetimeFigureOut">
               <a:rPr lang="en-US" smtClean="0"/>
-              <a:t>2/22/2023</a:t>
+              <a:t>2/23/2023</a:t>
             </a:fld>
             <a:endParaRPr lang="en-US" dirty="0"/>
           </a:p>
@@ -3012,7 +3016,7 @@
                 <a:ea typeface="Calibri" panose="020F0502020204030204" pitchFamily="34" charset="0"/>
                 <a:cs typeface="Times New Roman" panose="02020603050405020304" pitchFamily="18" charset="0"/>
               </a:rPr>
-              <a:t>Y = variavel resposta, target, dependente, output</a:t>
+              <a:t>Y = variavel resposta, target, dependente, output, </a:t>
             </a:r>
             <a:br>
               <a:rPr lang="pt-PT" dirty="0">
@@ -3029,7 +3033,32 @@
                 <a:ea typeface="Calibri" panose="020F0502020204030204" pitchFamily="34" charset="0"/>
                 <a:cs typeface="Times New Roman" panose="02020603050405020304" pitchFamily="18" charset="0"/>
               </a:rPr>
-              <a:t>X = variável preditora, independente, input </a:t>
+              <a:t>X = variável preditora, </a:t>
+            </a:r>
+            <a:r>
+              <a:rPr lang="pt-PT" dirty="0" err="1">
+                <a:latin typeface="Calibri" panose="020F0502020204030204" pitchFamily="34" charset="0"/>
+                <a:ea typeface="Calibri" panose="020F0502020204030204" pitchFamily="34" charset="0"/>
+                <a:cs typeface="Times New Roman" panose="02020603050405020304" pitchFamily="18" charset="0"/>
+              </a:rPr>
+              <a:t>exploratoria</a:t>
+            </a:r>
+            <a:r>
+              <a:rPr lang="pt-PT" dirty="0">
+                <a:latin typeface="Calibri" panose="020F0502020204030204" pitchFamily="34" charset="0"/>
+                <a:ea typeface="Calibri" panose="020F0502020204030204" pitchFamily="34" charset="0"/>
+                <a:cs typeface="Times New Roman" panose="02020603050405020304" pitchFamily="18" charset="0"/>
+              </a:rPr>
+              <a:t>, </a:t>
+            </a:r>
+            <a:r>
+              <a:rPr lang="pt-PT" dirty="0">
+                <a:effectLst/>
+                <a:latin typeface="Calibri" panose="020F0502020204030204" pitchFamily="34" charset="0"/>
+                <a:ea typeface="Calibri" panose="020F0502020204030204" pitchFamily="34" charset="0"/>
+                <a:cs typeface="Times New Roman" panose="02020603050405020304" pitchFamily="18" charset="0"/>
+              </a:rPr>
+              <a:t>independente, input </a:t>
             </a:r>
             <a:endParaRPr lang="en-US" dirty="0">
               <a:effectLst/>
@@ -3092,6 +3121,741 @@
     <p:extLst>
       <p:ext uri="{BB962C8B-B14F-4D97-AF65-F5344CB8AC3E}">
         <p14:creationId xmlns:p14="http://schemas.microsoft.com/office/powerpoint/2010/main" val="2041941573"/>
+      </p:ext>
+    </p:extLst>
+  </p:cSld>
+  <p:clrMapOvr>
+    <a:masterClrMapping/>
+  </p:clrMapOvr>
+</p:sld>
+</file>
+
+<file path=ppt/slides/slide10.xml><?xml version="1.0" encoding="utf-8"?>
+<p:sld xmlns:a="http://schemas.openxmlformats.org/drawingml/2006/main" xmlns:r="http://schemas.openxmlformats.org/officeDocument/2006/relationships" xmlns:p="http://schemas.openxmlformats.org/presentationml/2006/main">
+  <p:cSld>
+    <p:spTree>
+      <p:nvGrpSpPr>
+        <p:cNvPr id="1" name=""/>
+        <p:cNvGrpSpPr/>
+        <p:nvPr/>
+      </p:nvGrpSpPr>
+      <p:grpSpPr>
+        <a:xfrm>
+          <a:off x="0" y="0"/>
+          <a:ext cx="0" cy="0"/>
+          <a:chOff x="0" y="0"/>
+          <a:chExt cx="0" cy="0"/>
+        </a:xfrm>
+      </p:grpSpPr>
+      <p:sp>
+        <p:nvSpPr>
+          <p:cNvPr id="4" name="Retângulo 3"/>
+          <p:cNvSpPr/>
+          <p:nvPr/>
+        </p:nvSpPr>
+        <p:spPr>
+          <a:xfrm>
+            <a:off x="4554583" y="409303"/>
+            <a:ext cx="3143794" cy="478972"/>
+          </a:xfrm>
+          <a:prstGeom prst="rect">
+            <a:avLst/>
+          </a:prstGeom>
+          <a:solidFill>
+            <a:schemeClr val="bg2"/>
+          </a:solidFill>
+          <a:ln>
+            <a:solidFill>
+              <a:schemeClr val="tx1"/>
+            </a:solidFill>
+          </a:ln>
+        </p:spPr>
+        <p:style>
+          <a:lnRef idx="2">
+            <a:schemeClr val="accent1">
+              <a:shade val="50000"/>
+            </a:schemeClr>
+          </a:lnRef>
+          <a:fillRef idx="1">
+            <a:schemeClr val="accent1"/>
+          </a:fillRef>
+          <a:effectRef idx="0">
+            <a:schemeClr val="accent1"/>
+          </a:effectRef>
+          <a:fontRef idx="minor">
+            <a:schemeClr val="lt1"/>
+          </a:fontRef>
+        </p:style>
+        <p:txBody>
+          <a:bodyPr rtlCol="0" anchor="ctr"/>
+          <a:lstStyle/>
+          <a:p>
+            <a:pPr algn="ctr"/>
+            <a:r>
+              <a:rPr lang="en-US" dirty="0">
+                <a:solidFill>
+                  <a:schemeClr val="tx1"/>
+                </a:solidFill>
+              </a:rPr>
+              <a:t>Machine Learning</a:t>
+            </a:r>
+          </a:p>
+        </p:txBody>
+      </p:sp>
+      <p:sp>
+        <p:nvSpPr>
+          <p:cNvPr id="3" name="TextBox 2">
+            <a:extLst>
+              <a:ext uri="{FF2B5EF4-FFF2-40B4-BE49-F238E27FC236}">
+                <a16:creationId xmlns:a16="http://schemas.microsoft.com/office/drawing/2014/main" id="{5011653A-7E7E-1045-ABF3-C761A35E08AB}"/>
+              </a:ext>
+            </a:extLst>
+          </p:cNvPr>
+          <p:cNvSpPr txBox="1"/>
+          <p:nvPr/>
+        </p:nvSpPr>
+        <p:spPr>
+          <a:xfrm>
+            <a:off x="536994" y="1154358"/>
+            <a:ext cx="8270576" cy="1754326"/>
+          </a:xfrm>
+          <a:prstGeom prst="rect">
+            <a:avLst/>
+          </a:prstGeom>
+          <a:noFill/>
+        </p:spPr>
+        <p:txBody>
+          <a:bodyPr wrap="square">
+            <a:spAutoFit/>
+          </a:bodyPr>
+          <a:lstStyle/>
+          <a:p>
+            <a:pPr algn="l"/>
+            <a:r>
+              <a:rPr lang="pt-PT" b="0" i="0" u="none" strike="noStrike" dirty="0">
+                <a:solidFill>
+                  <a:srgbClr val="000000"/>
+                </a:solidFill>
+                <a:effectLst/>
+                <a:latin typeface="Georgia" panose="02040502050405020303" pitchFamily="18" charset="0"/>
+              </a:rPr>
+              <a:t>Os cálculos variam a depender do tipo de </a:t>
+            </a:r>
+            <a:r>
+              <a:rPr lang="pt-PT" b="0" i="0" u="none" strike="noStrike" dirty="0" err="1">
+                <a:solidFill>
+                  <a:srgbClr val="000000"/>
+                </a:solidFill>
+                <a:effectLst/>
+                <a:latin typeface="Georgia" panose="02040502050405020303" pitchFamily="18" charset="0"/>
+              </a:rPr>
+              <a:t>clusterização</a:t>
+            </a:r>
+            <a:r>
+              <a:rPr lang="pt-PT" b="0" i="0" u="none" strike="noStrike" dirty="0">
+                <a:solidFill>
+                  <a:srgbClr val="000000"/>
+                </a:solidFill>
+                <a:effectLst/>
+                <a:latin typeface="Georgia" panose="02040502050405020303" pitchFamily="18" charset="0"/>
+              </a:rPr>
+              <a:t> que é adotado. Veremos, a seguir, alguns tipos:</a:t>
+            </a:r>
+          </a:p>
+          <a:p>
+            <a:pPr algn="l">
+              <a:buFont typeface="Arial" panose="020B0604020202020204" pitchFamily="34" charset="0"/>
+              <a:buChar char="•"/>
+            </a:pPr>
+            <a:r>
+              <a:rPr lang="pt-PT" b="0" i="0" dirty="0">
+                <a:solidFill>
+                  <a:srgbClr val="000000"/>
+                </a:solidFill>
+                <a:effectLst/>
+                <a:latin typeface="Georgia" panose="02040502050405020303" pitchFamily="18" charset="0"/>
+              </a:rPr>
+              <a:t>modelos de conectividade;</a:t>
+            </a:r>
+            <a:endParaRPr lang="pt-PT" b="0" i="0" dirty="0">
+              <a:solidFill>
+                <a:srgbClr val="000000"/>
+              </a:solidFill>
+              <a:effectLst/>
+              <a:latin typeface="Times New Roman" panose="02020603050405020304" pitchFamily="18" charset="0"/>
+            </a:endParaRPr>
+          </a:p>
+          <a:p>
+            <a:pPr algn="l">
+              <a:buFont typeface="Arial" panose="020B0604020202020204" pitchFamily="34" charset="0"/>
+              <a:buChar char="•"/>
+            </a:pPr>
+            <a:r>
+              <a:rPr lang="pt-PT" b="0" i="0" dirty="0">
+                <a:solidFill>
+                  <a:srgbClr val="000000"/>
+                </a:solidFill>
+                <a:effectLst/>
+                <a:latin typeface="Georgia" panose="02040502050405020303" pitchFamily="18" charset="0"/>
+              </a:rPr>
+              <a:t>modelos de </a:t>
+            </a:r>
+            <a:r>
+              <a:rPr lang="pt-PT" b="0" i="0" dirty="0" err="1">
+                <a:solidFill>
+                  <a:srgbClr val="000000"/>
+                </a:solidFill>
+                <a:effectLst/>
+                <a:latin typeface="Georgia" panose="02040502050405020303" pitchFamily="18" charset="0"/>
+              </a:rPr>
+              <a:t>centróide</a:t>
+            </a:r>
+            <a:r>
+              <a:rPr lang="pt-PT" b="0" i="0" dirty="0">
+                <a:solidFill>
+                  <a:srgbClr val="000000"/>
+                </a:solidFill>
+                <a:effectLst/>
+                <a:latin typeface="Georgia" panose="02040502050405020303" pitchFamily="18" charset="0"/>
+              </a:rPr>
+              <a:t>;</a:t>
+            </a:r>
+            <a:endParaRPr lang="pt-PT" b="0" i="0" dirty="0">
+              <a:solidFill>
+                <a:srgbClr val="000000"/>
+              </a:solidFill>
+              <a:effectLst/>
+              <a:latin typeface="Times New Roman" panose="02020603050405020304" pitchFamily="18" charset="0"/>
+            </a:endParaRPr>
+          </a:p>
+          <a:p>
+            <a:pPr algn="l">
+              <a:buFont typeface="Arial" panose="020B0604020202020204" pitchFamily="34" charset="0"/>
+              <a:buChar char="•"/>
+            </a:pPr>
+            <a:r>
+              <a:rPr lang="pt-PT" b="0" i="0" dirty="0">
+                <a:solidFill>
+                  <a:srgbClr val="000000"/>
+                </a:solidFill>
+                <a:effectLst/>
+                <a:latin typeface="Georgia" panose="02040502050405020303" pitchFamily="18" charset="0"/>
+              </a:rPr>
+              <a:t>modelos de distribuição;</a:t>
+            </a:r>
+            <a:endParaRPr lang="pt-PT" b="0" i="0" dirty="0">
+              <a:solidFill>
+                <a:srgbClr val="000000"/>
+              </a:solidFill>
+              <a:effectLst/>
+              <a:latin typeface="Times New Roman" panose="02020603050405020304" pitchFamily="18" charset="0"/>
+            </a:endParaRPr>
+          </a:p>
+          <a:p>
+            <a:pPr algn="l">
+              <a:buFont typeface="Arial" panose="020B0604020202020204" pitchFamily="34" charset="0"/>
+              <a:buChar char="•"/>
+            </a:pPr>
+            <a:r>
+              <a:rPr lang="pt-PT" b="0" i="0" dirty="0">
+                <a:solidFill>
+                  <a:srgbClr val="000000"/>
+                </a:solidFill>
+                <a:effectLst/>
+                <a:latin typeface="Georgia" panose="02040502050405020303" pitchFamily="18" charset="0"/>
+              </a:rPr>
+              <a:t>modelos de densidade.</a:t>
+            </a:r>
+            <a:endParaRPr lang="pt-PT" b="0" i="0" dirty="0">
+              <a:solidFill>
+                <a:srgbClr val="000000"/>
+              </a:solidFill>
+              <a:effectLst/>
+              <a:latin typeface="Times New Roman" panose="02020603050405020304" pitchFamily="18" charset="0"/>
+            </a:endParaRPr>
+          </a:p>
+        </p:txBody>
+      </p:sp>
+      <p:sp>
+        <p:nvSpPr>
+          <p:cNvPr id="9" name="TextBox 8">
+            <a:extLst>
+              <a:ext uri="{FF2B5EF4-FFF2-40B4-BE49-F238E27FC236}">
+                <a16:creationId xmlns:a16="http://schemas.microsoft.com/office/drawing/2014/main" id="{327BFE51-F331-49AA-EA6D-B0B099F31F3A}"/>
+              </a:ext>
+            </a:extLst>
+          </p:cNvPr>
+          <p:cNvSpPr txBox="1"/>
+          <p:nvPr/>
+        </p:nvSpPr>
+        <p:spPr>
+          <a:xfrm>
+            <a:off x="813038" y="3174767"/>
+            <a:ext cx="10151135" cy="3416320"/>
+          </a:xfrm>
+          <a:prstGeom prst="rect">
+            <a:avLst/>
+          </a:prstGeom>
+          <a:noFill/>
+        </p:spPr>
+        <p:txBody>
+          <a:bodyPr wrap="square">
+            <a:spAutoFit/>
+          </a:bodyPr>
+          <a:lstStyle/>
+          <a:p>
+            <a:pPr algn="l"/>
+            <a:r>
+              <a:rPr lang="pt-PT" b="0" i="0" u="none" strike="noStrike" dirty="0" err="1">
+                <a:solidFill>
+                  <a:srgbClr val="000000"/>
+                </a:solidFill>
+                <a:effectLst/>
+                <a:latin typeface="Georgia" panose="02040502050405020303" pitchFamily="18" charset="0"/>
+              </a:rPr>
+              <a:t>Clusterização</a:t>
+            </a:r>
+            <a:r>
+              <a:rPr lang="pt-PT" b="0" i="0" u="none" strike="noStrike" dirty="0">
+                <a:solidFill>
+                  <a:srgbClr val="000000"/>
+                </a:solidFill>
+                <a:effectLst/>
+                <a:latin typeface="Georgia" panose="02040502050405020303" pitchFamily="18" charset="0"/>
+              </a:rPr>
+              <a:t> para variáveis categóricas </a:t>
+            </a:r>
+          </a:p>
+          <a:p>
+            <a:pPr algn="l"/>
+            <a:endParaRPr lang="pt-PT" dirty="0">
+              <a:solidFill>
+                <a:srgbClr val="000000"/>
+              </a:solidFill>
+              <a:latin typeface="Georgia" panose="02040502050405020303" pitchFamily="18" charset="0"/>
+            </a:endParaRPr>
+          </a:p>
+          <a:p>
+            <a:pPr algn="l"/>
+            <a:r>
+              <a:rPr lang="pt-PT" b="0" i="0" u="none" strike="noStrike" dirty="0">
+                <a:solidFill>
+                  <a:srgbClr val="000000"/>
+                </a:solidFill>
+                <a:effectLst/>
+                <a:latin typeface="Georgia" panose="02040502050405020303" pitchFamily="18" charset="0"/>
+                <a:hlinkClick r:id="rId2"/>
+              </a:rPr>
+              <a:t>https://www.youtube.com/watch?v=b39_vipRkUo</a:t>
+            </a:r>
+            <a:r>
+              <a:rPr lang="pt-PT" b="0" i="0" u="none" strike="noStrike" dirty="0">
+                <a:solidFill>
+                  <a:srgbClr val="000000"/>
+                </a:solidFill>
+                <a:effectLst/>
+                <a:latin typeface="Georgia" panose="02040502050405020303" pitchFamily="18" charset="0"/>
+              </a:rPr>
+              <a:t> </a:t>
+            </a:r>
+          </a:p>
+          <a:p>
+            <a:pPr algn="l"/>
+            <a:endParaRPr lang="pt-PT" dirty="0">
+              <a:solidFill>
+                <a:srgbClr val="000000"/>
+              </a:solidFill>
+              <a:latin typeface="Georgia" panose="02040502050405020303" pitchFamily="18" charset="0"/>
+            </a:endParaRPr>
+          </a:p>
+          <a:p>
+            <a:pPr algn="l"/>
+            <a:r>
+              <a:rPr lang="pt-PT" b="0" i="0" u="none" strike="noStrike" dirty="0">
+                <a:solidFill>
+                  <a:srgbClr val="000000"/>
+                </a:solidFill>
+                <a:effectLst/>
+                <a:latin typeface="Georgia" panose="02040502050405020303" pitchFamily="18" charset="0"/>
+                <a:hlinkClick r:id="rId3"/>
+              </a:rPr>
+              <a:t>https://www.analyticsvidhya.com/blog/2021/06/kmodes-clustering-algorithm-for-categorical-data/</a:t>
+            </a:r>
+            <a:r>
+              <a:rPr lang="pt-PT" b="0" i="0" u="none" strike="noStrike" dirty="0">
+                <a:solidFill>
+                  <a:srgbClr val="000000"/>
+                </a:solidFill>
+                <a:effectLst/>
+                <a:latin typeface="Georgia" panose="02040502050405020303" pitchFamily="18" charset="0"/>
+              </a:rPr>
+              <a:t> </a:t>
+            </a:r>
+          </a:p>
+          <a:p>
+            <a:pPr algn="l"/>
+            <a:endParaRPr lang="pt-PT" dirty="0">
+              <a:solidFill>
+                <a:srgbClr val="000000"/>
+              </a:solidFill>
+              <a:latin typeface="Georgia" panose="02040502050405020303" pitchFamily="18" charset="0"/>
+            </a:endParaRPr>
+          </a:p>
+          <a:p>
+            <a:pPr algn="l"/>
+            <a:endParaRPr lang="pt-PT" b="0" i="0" u="none" strike="noStrike" dirty="0">
+              <a:solidFill>
+                <a:srgbClr val="000000"/>
+              </a:solidFill>
+              <a:effectLst/>
+              <a:latin typeface="Georgia" panose="02040502050405020303" pitchFamily="18" charset="0"/>
+            </a:endParaRPr>
+          </a:p>
+          <a:p>
+            <a:pPr algn="l"/>
+            <a:r>
+              <a:rPr lang="pt-PT" b="0" i="0" u="none" strike="noStrike" dirty="0">
+                <a:solidFill>
+                  <a:srgbClr val="000000"/>
+                </a:solidFill>
+                <a:effectLst/>
+                <a:latin typeface="Georgia" panose="02040502050405020303" pitchFamily="18" charset="0"/>
+                <a:hlinkClick r:id="rId3"/>
+              </a:rPr>
+              <a:t>https://www.analyticsvidhya.com/blog/2021/06/kmodes-clustering-algorithm-for-categorical-data/</a:t>
+            </a:r>
+            <a:r>
+              <a:rPr lang="pt-PT" dirty="0">
+                <a:solidFill>
+                  <a:srgbClr val="000000"/>
+                </a:solidFill>
+                <a:latin typeface="Georgia" panose="02040502050405020303" pitchFamily="18" charset="0"/>
+              </a:rPr>
+              <a:t> </a:t>
+            </a:r>
+          </a:p>
+          <a:p>
+            <a:pPr algn="l"/>
+            <a:r>
+              <a:rPr lang="pt-PT" dirty="0">
+                <a:solidFill>
+                  <a:srgbClr val="000000"/>
+                </a:solidFill>
+                <a:latin typeface="Georgia" panose="02040502050405020303" pitchFamily="18" charset="0"/>
+                <a:hlinkClick r:id="rId4"/>
+              </a:rPr>
+              <a:t>https://www.maxwell.vrac.puc-rio.br/14382/14382_4.PDF</a:t>
+            </a:r>
+            <a:r>
+              <a:rPr lang="pt-PT" dirty="0">
+                <a:solidFill>
+                  <a:srgbClr val="000000"/>
+                </a:solidFill>
+                <a:latin typeface="Georgia" panose="02040502050405020303" pitchFamily="18" charset="0"/>
+              </a:rPr>
+              <a:t> </a:t>
+            </a:r>
+          </a:p>
+          <a:p>
+            <a:pPr algn="l"/>
+            <a:r>
+              <a:rPr lang="pt-PT" b="0" i="0" u="none" strike="noStrike" dirty="0">
+                <a:solidFill>
+                  <a:srgbClr val="000000"/>
+                </a:solidFill>
+                <a:effectLst/>
+                <a:latin typeface="Georgia" panose="02040502050405020303" pitchFamily="18" charset="0"/>
+                <a:hlinkClick r:id="rId5"/>
+              </a:rPr>
+              <a:t>https://www.dca.fee.unicamp.br/~lboccato/topico_8_clusterizacao.pdf</a:t>
+            </a:r>
+            <a:r>
+              <a:rPr lang="pt-PT" b="0" i="0" u="none" strike="noStrike" dirty="0">
+                <a:solidFill>
+                  <a:srgbClr val="000000"/>
+                </a:solidFill>
+                <a:effectLst/>
+                <a:latin typeface="Georgia" panose="02040502050405020303" pitchFamily="18" charset="0"/>
+              </a:rPr>
+              <a:t> </a:t>
+            </a:r>
+          </a:p>
+        </p:txBody>
+      </p:sp>
+    </p:spTree>
+    <p:extLst>
+      <p:ext uri="{BB962C8B-B14F-4D97-AF65-F5344CB8AC3E}">
+        <p14:creationId xmlns:p14="http://schemas.microsoft.com/office/powerpoint/2010/main" val="2212152871"/>
+      </p:ext>
+    </p:extLst>
+  </p:cSld>
+  <p:clrMapOvr>
+    <a:masterClrMapping/>
+  </p:clrMapOvr>
+</p:sld>
+</file>
+
+<file path=ppt/slides/slide11.xml><?xml version="1.0" encoding="utf-8"?>
+<p:sld xmlns:a="http://schemas.openxmlformats.org/drawingml/2006/main" xmlns:r="http://schemas.openxmlformats.org/officeDocument/2006/relationships" xmlns:p="http://schemas.openxmlformats.org/presentationml/2006/main">
+  <p:cSld>
+    <p:spTree>
+      <p:nvGrpSpPr>
+        <p:cNvPr id="1" name=""/>
+        <p:cNvGrpSpPr/>
+        <p:nvPr/>
+      </p:nvGrpSpPr>
+      <p:grpSpPr>
+        <a:xfrm>
+          <a:off x="0" y="0"/>
+          <a:ext cx="0" cy="0"/>
+          <a:chOff x="0" y="0"/>
+          <a:chExt cx="0" cy="0"/>
+        </a:xfrm>
+      </p:grpSpPr>
+      <p:sp>
+        <p:nvSpPr>
+          <p:cNvPr id="4" name="Retângulo 3"/>
+          <p:cNvSpPr/>
+          <p:nvPr/>
+        </p:nvSpPr>
+        <p:spPr>
+          <a:xfrm>
+            <a:off x="4554583" y="409303"/>
+            <a:ext cx="3143794" cy="478972"/>
+          </a:xfrm>
+          <a:prstGeom prst="rect">
+            <a:avLst/>
+          </a:prstGeom>
+          <a:solidFill>
+            <a:schemeClr val="bg2"/>
+          </a:solidFill>
+          <a:ln>
+            <a:solidFill>
+              <a:schemeClr val="tx1"/>
+            </a:solidFill>
+          </a:ln>
+        </p:spPr>
+        <p:style>
+          <a:lnRef idx="2">
+            <a:schemeClr val="accent1">
+              <a:shade val="50000"/>
+            </a:schemeClr>
+          </a:lnRef>
+          <a:fillRef idx="1">
+            <a:schemeClr val="accent1"/>
+          </a:fillRef>
+          <a:effectRef idx="0">
+            <a:schemeClr val="accent1"/>
+          </a:effectRef>
+          <a:fontRef idx="minor">
+            <a:schemeClr val="lt1"/>
+          </a:fontRef>
+        </p:style>
+        <p:txBody>
+          <a:bodyPr rtlCol="0" anchor="ctr"/>
+          <a:lstStyle/>
+          <a:p>
+            <a:pPr algn="ctr"/>
+            <a:r>
+              <a:rPr lang="en-US" dirty="0">
+                <a:solidFill>
+                  <a:schemeClr val="tx1"/>
+                </a:solidFill>
+              </a:rPr>
+              <a:t>Machine Learning</a:t>
+            </a:r>
+          </a:p>
+        </p:txBody>
+      </p:sp>
+      <p:pic>
+        <p:nvPicPr>
+          <p:cNvPr id="5" name="Picture 4">
+            <a:extLst>
+              <a:ext uri="{FF2B5EF4-FFF2-40B4-BE49-F238E27FC236}">
+                <a16:creationId xmlns:a16="http://schemas.microsoft.com/office/drawing/2014/main" id="{453ED842-A31A-7A87-93AA-08A1DE094F74}"/>
+              </a:ext>
+            </a:extLst>
+          </p:cNvPr>
+          <p:cNvPicPr>
+            <a:picLocks noChangeAspect="1"/>
+          </p:cNvPicPr>
+          <p:nvPr/>
+        </p:nvPicPr>
+        <p:blipFill>
+          <a:blip r:embed="rId2"/>
+          <a:stretch>
+            <a:fillRect/>
+          </a:stretch>
+        </p:blipFill>
+        <p:spPr>
+          <a:xfrm>
+            <a:off x="3243262" y="1066800"/>
+            <a:ext cx="5705475" cy="4724400"/>
+          </a:xfrm>
+          <a:prstGeom prst="rect">
+            <a:avLst/>
+          </a:prstGeom>
+        </p:spPr>
+      </p:pic>
+    </p:spTree>
+    <p:extLst>
+      <p:ext uri="{BB962C8B-B14F-4D97-AF65-F5344CB8AC3E}">
+        <p14:creationId xmlns:p14="http://schemas.microsoft.com/office/powerpoint/2010/main" val="3696952103"/>
+      </p:ext>
+    </p:extLst>
+  </p:cSld>
+  <p:clrMapOvr>
+    <a:masterClrMapping/>
+  </p:clrMapOvr>
+</p:sld>
+</file>
+
+<file path=ppt/slides/slide12.xml><?xml version="1.0" encoding="utf-8"?>
+<p:sld xmlns:a="http://schemas.openxmlformats.org/drawingml/2006/main" xmlns:r="http://schemas.openxmlformats.org/officeDocument/2006/relationships" xmlns:p="http://schemas.openxmlformats.org/presentationml/2006/main">
+  <p:cSld>
+    <p:spTree>
+      <p:nvGrpSpPr>
+        <p:cNvPr id="1" name=""/>
+        <p:cNvGrpSpPr/>
+        <p:nvPr/>
+      </p:nvGrpSpPr>
+      <p:grpSpPr>
+        <a:xfrm>
+          <a:off x="0" y="0"/>
+          <a:ext cx="0" cy="0"/>
+          <a:chOff x="0" y="0"/>
+          <a:chExt cx="0" cy="0"/>
+        </a:xfrm>
+      </p:grpSpPr>
+      <p:sp>
+        <p:nvSpPr>
+          <p:cNvPr id="4" name="Retângulo 3"/>
+          <p:cNvSpPr/>
+          <p:nvPr/>
+        </p:nvSpPr>
+        <p:spPr>
+          <a:xfrm>
+            <a:off x="4554583" y="409303"/>
+            <a:ext cx="3143794" cy="478972"/>
+          </a:xfrm>
+          <a:prstGeom prst="rect">
+            <a:avLst/>
+          </a:prstGeom>
+          <a:solidFill>
+            <a:schemeClr val="bg2"/>
+          </a:solidFill>
+          <a:ln>
+            <a:solidFill>
+              <a:schemeClr val="tx1"/>
+            </a:solidFill>
+          </a:ln>
+        </p:spPr>
+        <p:style>
+          <a:lnRef idx="2">
+            <a:schemeClr val="accent1">
+              <a:shade val="50000"/>
+            </a:schemeClr>
+          </a:lnRef>
+          <a:fillRef idx="1">
+            <a:schemeClr val="accent1"/>
+          </a:fillRef>
+          <a:effectRef idx="0">
+            <a:schemeClr val="accent1"/>
+          </a:effectRef>
+          <a:fontRef idx="minor">
+            <a:schemeClr val="lt1"/>
+          </a:fontRef>
+        </p:style>
+        <p:txBody>
+          <a:bodyPr rtlCol="0" anchor="ctr"/>
+          <a:lstStyle/>
+          <a:p>
+            <a:pPr algn="ctr"/>
+            <a:r>
+              <a:rPr lang="en-US" dirty="0">
+                <a:solidFill>
+                  <a:schemeClr val="tx1"/>
+                </a:solidFill>
+              </a:rPr>
+              <a:t>Machine Learning</a:t>
+            </a:r>
+          </a:p>
+        </p:txBody>
+      </p:sp>
+      <p:sp>
+        <p:nvSpPr>
+          <p:cNvPr id="3" name="TextBox 2">
+            <a:extLst>
+              <a:ext uri="{FF2B5EF4-FFF2-40B4-BE49-F238E27FC236}">
+                <a16:creationId xmlns:a16="http://schemas.microsoft.com/office/drawing/2014/main" id="{FDB12D37-AC5B-20C8-EBBA-52049CD37E46}"/>
+              </a:ext>
+            </a:extLst>
+          </p:cNvPr>
+          <p:cNvSpPr txBox="1"/>
+          <p:nvPr/>
+        </p:nvSpPr>
+        <p:spPr>
+          <a:xfrm>
+            <a:off x="640511" y="1182144"/>
+            <a:ext cx="6094562" cy="646331"/>
+          </a:xfrm>
+          <a:prstGeom prst="rect">
+            <a:avLst/>
+          </a:prstGeom>
+          <a:noFill/>
+        </p:spPr>
+        <p:txBody>
+          <a:bodyPr wrap="square">
+            <a:spAutoFit/>
+          </a:bodyPr>
+          <a:lstStyle/>
+          <a:p>
+            <a:r>
+              <a:rPr lang="pt-PT" dirty="0"/>
+              <a:t>https://www.analyticsvidhya.com/blog/2022/02/a-quick-guide-to-bivariate-analysis-in-python/</a:t>
+            </a:r>
+          </a:p>
+        </p:txBody>
+      </p:sp>
+      <p:sp>
+        <p:nvSpPr>
+          <p:cNvPr id="7" name="TextBox 6">
+            <a:extLst>
+              <a:ext uri="{FF2B5EF4-FFF2-40B4-BE49-F238E27FC236}">
+                <a16:creationId xmlns:a16="http://schemas.microsoft.com/office/drawing/2014/main" id="{D61441EC-42D8-D437-7C92-08F618A77F8A}"/>
+              </a:ext>
+            </a:extLst>
+          </p:cNvPr>
+          <p:cNvSpPr txBox="1"/>
+          <p:nvPr/>
+        </p:nvSpPr>
+        <p:spPr>
+          <a:xfrm>
+            <a:off x="467983" y="2122344"/>
+            <a:ext cx="6094562" cy="646331"/>
+          </a:xfrm>
+          <a:prstGeom prst="rect">
+            <a:avLst/>
+          </a:prstGeom>
+          <a:noFill/>
+        </p:spPr>
+        <p:txBody>
+          <a:bodyPr wrap="square">
+            <a:spAutoFit/>
+          </a:bodyPr>
+          <a:lstStyle/>
+          <a:p>
+            <a:r>
+              <a:rPr lang="pt-PT" dirty="0"/>
+              <a:t>https://www.quora.com/How-can-I-measure-the-correlation-between-continuous-and-categorical-variables</a:t>
+            </a:r>
+          </a:p>
+        </p:txBody>
+      </p:sp>
+    </p:spTree>
+    <p:extLst>
+      <p:ext uri="{BB962C8B-B14F-4D97-AF65-F5344CB8AC3E}">
+        <p14:creationId xmlns:p14="http://schemas.microsoft.com/office/powerpoint/2010/main" val="2800087182"/>
       </p:ext>
     </p:extLst>
   </p:cSld>
@@ -8131,6 +8895,413 @@
     <p:extLst>
       <p:ext uri="{BB962C8B-B14F-4D97-AF65-F5344CB8AC3E}">
         <p14:creationId xmlns:p14="http://schemas.microsoft.com/office/powerpoint/2010/main" val="3321359163"/>
+      </p:ext>
+    </p:extLst>
+  </p:cSld>
+  <p:clrMapOvr>
+    <a:masterClrMapping/>
+  </p:clrMapOvr>
+</p:sld>
+</file>
+
+<file path=ppt/slides/slide9.xml><?xml version="1.0" encoding="utf-8"?>
+<p:sld xmlns:a="http://schemas.openxmlformats.org/drawingml/2006/main" xmlns:r="http://schemas.openxmlformats.org/officeDocument/2006/relationships" xmlns:p="http://schemas.openxmlformats.org/presentationml/2006/main">
+  <p:cSld>
+    <p:spTree>
+      <p:nvGrpSpPr>
+        <p:cNvPr id="1" name=""/>
+        <p:cNvGrpSpPr/>
+        <p:nvPr/>
+      </p:nvGrpSpPr>
+      <p:grpSpPr>
+        <a:xfrm>
+          <a:off x="0" y="0"/>
+          <a:ext cx="0" cy="0"/>
+          <a:chOff x="0" y="0"/>
+          <a:chExt cx="0" cy="0"/>
+        </a:xfrm>
+      </p:grpSpPr>
+      <p:sp>
+        <p:nvSpPr>
+          <p:cNvPr id="4" name="Retângulo 3"/>
+          <p:cNvSpPr/>
+          <p:nvPr/>
+        </p:nvSpPr>
+        <p:spPr>
+          <a:xfrm>
+            <a:off x="4554583" y="409303"/>
+            <a:ext cx="3143794" cy="478972"/>
+          </a:xfrm>
+          <a:prstGeom prst="rect">
+            <a:avLst/>
+          </a:prstGeom>
+          <a:solidFill>
+            <a:schemeClr val="bg2"/>
+          </a:solidFill>
+          <a:ln>
+            <a:solidFill>
+              <a:schemeClr val="tx1"/>
+            </a:solidFill>
+          </a:ln>
+        </p:spPr>
+        <p:style>
+          <a:lnRef idx="2">
+            <a:schemeClr val="accent1">
+              <a:shade val="50000"/>
+            </a:schemeClr>
+          </a:lnRef>
+          <a:fillRef idx="1">
+            <a:schemeClr val="accent1"/>
+          </a:fillRef>
+          <a:effectRef idx="0">
+            <a:schemeClr val="accent1"/>
+          </a:effectRef>
+          <a:fontRef idx="minor">
+            <a:schemeClr val="lt1"/>
+          </a:fontRef>
+        </p:style>
+        <p:txBody>
+          <a:bodyPr rtlCol="0" anchor="ctr"/>
+          <a:lstStyle/>
+          <a:p>
+            <a:pPr algn="ctr"/>
+            <a:r>
+              <a:rPr lang="en-US" dirty="0">
+                <a:solidFill>
+                  <a:schemeClr val="tx1"/>
+                </a:solidFill>
+              </a:rPr>
+              <a:t>Machine Learning</a:t>
+            </a:r>
+          </a:p>
+        </p:txBody>
+      </p:sp>
+      <p:sp>
+        <p:nvSpPr>
+          <p:cNvPr id="3" name="TextBox 2">
+            <a:extLst>
+              <a:ext uri="{FF2B5EF4-FFF2-40B4-BE49-F238E27FC236}">
+                <a16:creationId xmlns:a16="http://schemas.microsoft.com/office/drawing/2014/main" id="{5011653A-7E7E-1045-ABF3-C761A35E08AB}"/>
+              </a:ext>
+            </a:extLst>
+          </p:cNvPr>
+          <p:cNvSpPr txBox="1"/>
+          <p:nvPr/>
+        </p:nvSpPr>
+        <p:spPr>
+          <a:xfrm>
+            <a:off x="536994" y="1154358"/>
+            <a:ext cx="8270576" cy="1754326"/>
+          </a:xfrm>
+          <a:prstGeom prst="rect">
+            <a:avLst/>
+          </a:prstGeom>
+          <a:noFill/>
+        </p:spPr>
+        <p:txBody>
+          <a:bodyPr wrap="square">
+            <a:spAutoFit/>
+          </a:bodyPr>
+          <a:lstStyle/>
+          <a:p>
+            <a:pPr algn="l"/>
+            <a:r>
+              <a:rPr lang="pt-PT" b="0" i="0" u="none" strike="noStrike" dirty="0">
+                <a:solidFill>
+                  <a:srgbClr val="000000"/>
+                </a:solidFill>
+                <a:effectLst/>
+                <a:latin typeface="Georgia" panose="02040502050405020303" pitchFamily="18" charset="0"/>
+              </a:rPr>
+              <a:t>Os cálculos variam a depender do tipo de </a:t>
+            </a:r>
+            <a:r>
+              <a:rPr lang="pt-PT" b="0" i="0" u="none" strike="noStrike" dirty="0" err="1">
+                <a:solidFill>
+                  <a:srgbClr val="000000"/>
+                </a:solidFill>
+                <a:effectLst/>
+                <a:latin typeface="Georgia" panose="02040502050405020303" pitchFamily="18" charset="0"/>
+              </a:rPr>
+              <a:t>clusterização</a:t>
+            </a:r>
+            <a:r>
+              <a:rPr lang="pt-PT" b="0" i="0" u="none" strike="noStrike" dirty="0">
+                <a:solidFill>
+                  <a:srgbClr val="000000"/>
+                </a:solidFill>
+                <a:effectLst/>
+                <a:latin typeface="Georgia" panose="02040502050405020303" pitchFamily="18" charset="0"/>
+              </a:rPr>
+              <a:t> que é adotado. Veremos, a seguir, alguns tipos:</a:t>
+            </a:r>
+          </a:p>
+          <a:p>
+            <a:pPr algn="l">
+              <a:buFont typeface="Arial" panose="020B0604020202020204" pitchFamily="34" charset="0"/>
+              <a:buChar char="•"/>
+            </a:pPr>
+            <a:r>
+              <a:rPr lang="pt-PT" b="0" i="0" dirty="0">
+                <a:solidFill>
+                  <a:srgbClr val="000000"/>
+                </a:solidFill>
+                <a:effectLst/>
+                <a:latin typeface="Georgia" panose="02040502050405020303" pitchFamily="18" charset="0"/>
+              </a:rPr>
+              <a:t>modelos de conectividade;</a:t>
+            </a:r>
+            <a:endParaRPr lang="pt-PT" b="0" i="0" dirty="0">
+              <a:solidFill>
+                <a:srgbClr val="000000"/>
+              </a:solidFill>
+              <a:effectLst/>
+              <a:latin typeface="Times New Roman" panose="02020603050405020304" pitchFamily="18" charset="0"/>
+            </a:endParaRPr>
+          </a:p>
+          <a:p>
+            <a:pPr algn="l">
+              <a:buFont typeface="Arial" panose="020B0604020202020204" pitchFamily="34" charset="0"/>
+              <a:buChar char="•"/>
+            </a:pPr>
+            <a:r>
+              <a:rPr lang="pt-PT" b="0" i="0" dirty="0">
+                <a:solidFill>
+                  <a:srgbClr val="000000"/>
+                </a:solidFill>
+                <a:effectLst/>
+                <a:latin typeface="Georgia" panose="02040502050405020303" pitchFamily="18" charset="0"/>
+              </a:rPr>
+              <a:t>modelos de </a:t>
+            </a:r>
+            <a:r>
+              <a:rPr lang="pt-PT" b="0" i="0" dirty="0" err="1">
+                <a:solidFill>
+                  <a:srgbClr val="000000"/>
+                </a:solidFill>
+                <a:effectLst/>
+                <a:latin typeface="Georgia" panose="02040502050405020303" pitchFamily="18" charset="0"/>
+              </a:rPr>
+              <a:t>centróide</a:t>
+            </a:r>
+            <a:r>
+              <a:rPr lang="pt-PT" b="0" i="0" dirty="0">
+                <a:solidFill>
+                  <a:srgbClr val="000000"/>
+                </a:solidFill>
+                <a:effectLst/>
+                <a:latin typeface="Georgia" panose="02040502050405020303" pitchFamily="18" charset="0"/>
+              </a:rPr>
+              <a:t>;</a:t>
+            </a:r>
+            <a:endParaRPr lang="pt-PT" b="0" i="0" dirty="0">
+              <a:solidFill>
+                <a:srgbClr val="000000"/>
+              </a:solidFill>
+              <a:effectLst/>
+              <a:latin typeface="Times New Roman" panose="02020603050405020304" pitchFamily="18" charset="0"/>
+            </a:endParaRPr>
+          </a:p>
+          <a:p>
+            <a:pPr algn="l">
+              <a:buFont typeface="Arial" panose="020B0604020202020204" pitchFamily="34" charset="0"/>
+              <a:buChar char="•"/>
+            </a:pPr>
+            <a:r>
+              <a:rPr lang="pt-PT" b="0" i="0" dirty="0">
+                <a:solidFill>
+                  <a:srgbClr val="000000"/>
+                </a:solidFill>
+                <a:effectLst/>
+                <a:latin typeface="Georgia" panose="02040502050405020303" pitchFamily="18" charset="0"/>
+              </a:rPr>
+              <a:t>modelos de distribuição;</a:t>
+            </a:r>
+            <a:endParaRPr lang="pt-PT" b="0" i="0" dirty="0">
+              <a:solidFill>
+                <a:srgbClr val="000000"/>
+              </a:solidFill>
+              <a:effectLst/>
+              <a:latin typeface="Times New Roman" panose="02020603050405020304" pitchFamily="18" charset="0"/>
+            </a:endParaRPr>
+          </a:p>
+          <a:p>
+            <a:pPr algn="l">
+              <a:buFont typeface="Arial" panose="020B0604020202020204" pitchFamily="34" charset="0"/>
+              <a:buChar char="•"/>
+            </a:pPr>
+            <a:r>
+              <a:rPr lang="pt-PT" b="0" i="0" dirty="0">
+                <a:solidFill>
+                  <a:srgbClr val="000000"/>
+                </a:solidFill>
+                <a:effectLst/>
+                <a:latin typeface="Georgia" panose="02040502050405020303" pitchFamily="18" charset="0"/>
+              </a:rPr>
+              <a:t>modelos de densidade.</a:t>
+            </a:r>
+            <a:endParaRPr lang="pt-PT" b="0" i="0" dirty="0">
+              <a:solidFill>
+                <a:srgbClr val="000000"/>
+              </a:solidFill>
+              <a:effectLst/>
+              <a:latin typeface="Times New Roman" panose="02020603050405020304" pitchFamily="18" charset="0"/>
+            </a:endParaRPr>
+          </a:p>
+        </p:txBody>
+      </p:sp>
+      <p:sp>
+        <p:nvSpPr>
+          <p:cNvPr id="9" name="TextBox 8">
+            <a:extLst>
+              <a:ext uri="{FF2B5EF4-FFF2-40B4-BE49-F238E27FC236}">
+                <a16:creationId xmlns:a16="http://schemas.microsoft.com/office/drawing/2014/main" id="{327BFE51-F331-49AA-EA6D-B0B099F31F3A}"/>
+              </a:ext>
+            </a:extLst>
+          </p:cNvPr>
+          <p:cNvSpPr txBox="1"/>
+          <p:nvPr/>
+        </p:nvSpPr>
+        <p:spPr>
+          <a:xfrm>
+            <a:off x="813038" y="3174767"/>
+            <a:ext cx="10151135" cy="2308324"/>
+          </a:xfrm>
+          <a:prstGeom prst="rect">
+            <a:avLst/>
+          </a:prstGeom>
+          <a:noFill/>
+        </p:spPr>
+        <p:txBody>
+          <a:bodyPr wrap="square">
+            <a:spAutoFit/>
+          </a:bodyPr>
+          <a:lstStyle/>
+          <a:p>
+            <a:pPr algn="l"/>
+            <a:r>
+              <a:rPr lang="pt-PT" b="0" i="0" u="none" strike="noStrike" dirty="0">
+                <a:solidFill>
+                  <a:srgbClr val="000000"/>
+                </a:solidFill>
+                <a:effectLst/>
+                <a:latin typeface="Georgia" panose="02040502050405020303" pitchFamily="18" charset="0"/>
+              </a:rPr>
+              <a:t>Os dois definem classes para seus dados. A </a:t>
+            </a:r>
+            <a:r>
+              <a:rPr lang="pt-PT" b="1" i="0" u="none" strike="noStrike" dirty="0">
+                <a:solidFill>
+                  <a:srgbClr val="000000"/>
+                </a:solidFill>
+                <a:effectLst/>
+                <a:latin typeface="Georgia" panose="02040502050405020303" pitchFamily="18" charset="0"/>
+              </a:rPr>
+              <a:t>classificação</a:t>
+            </a:r>
+            <a:r>
+              <a:rPr lang="pt-PT" b="0" i="0" u="none" strike="noStrike" dirty="0">
+                <a:solidFill>
+                  <a:srgbClr val="000000"/>
+                </a:solidFill>
+                <a:effectLst/>
+                <a:latin typeface="Georgia" panose="02040502050405020303" pitchFamily="18" charset="0"/>
+              </a:rPr>
+              <a:t> agrupa os dados em determinadas categorias, ao passo que a </a:t>
+            </a:r>
+            <a:r>
+              <a:rPr lang="pt-PT" b="1" i="0" u="none" strike="noStrike" dirty="0" err="1">
+                <a:solidFill>
+                  <a:srgbClr val="000000"/>
+                </a:solidFill>
+                <a:effectLst/>
+                <a:latin typeface="Georgia" panose="02040502050405020303" pitchFamily="18" charset="0"/>
+              </a:rPr>
+              <a:t>clusterização</a:t>
+            </a:r>
+            <a:r>
+              <a:rPr lang="pt-PT" b="0" i="0" u="none" strike="noStrike" dirty="0">
+                <a:solidFill>
+                  <a:srgbClr val="000000"/>
+                </a:solidFill>
+                <a:effectLst/>
+                <a:latin typeface="Georgia" panose="02040502050405020303" pitchFamily="18" charset="0"/>
+              </a:rPr>
+              <a:t> utiliza a noção de clusters. </a:t>
+            </a:r>
+          </a:p>
+          <a:p>
+            <a:pPr algn="l"/>
+            <a:r>
+              <a:rPr lang="pt-PT" b="0" i="0" u="none" strike="noStrike" dirty="0">
+                <a:solidFill>
+                  <a:srgbClr val="000000"/>
+                </a:solidFill>
+                <a:effectLst/>
+                <a:latin typeface="Georgia" panose="02040502050405020303" pitchFamily="18" charset="0"/>
+              </a:rPr>
+              <a:t>Contudo,</a:t>
+            </a:r>
+            <a:r>
+              <a:rPr lang="pt-PT" b="1" i="0" u="none" strike="noStrike" dirty="0">
+                <a:solidFill>
+                  <a:srgbClr val="000000"/>
+                </a:solidFill>
+                <a:effectLst/>
+                <a:latin typeface="Georgia" panose="02040502050405020303" pitchFamily="18" charset="0"/>
+              </a:rPr>
+              <a:t> a principal diferença é a supervisão</a:t>
+            </a:r>
+            <a:r>
+              <a:rPr lang="pt-PT" b="0" i="0" u="none" strike="noStrike" dirty="0">
+                <a:solidFill>
+                  <a:srgbClr val="000000"/>
+                </a:solidFill>
+                <a:effectLst/>
+                <a:latin typeface="Georgia" panose="02040502050405020303" pitchFamily="18" charset="0"/>
+              </a:rPr>
+              <a:t>. A classificação é um clássico método supervisionado, em que o número de categorias para os dados é definido de antemão, com base nos dados de entrada. Ou seja, a pessoa cientista transmite dados com os rótulos prévios de saída, solicitando que o sistema aprenda como aqueles dados geram aquelas saídas. </a:t>
+            </a:r>
+          </a:p>
+          <a:p>
+            <a:pPr algn="l"/>
+            <a:endParaRPr lang="pt-PT" dirty="0">
+              <a:solidFill>
+                <a:srgbClr val="000000"/>
+              </a:solidFill>
+              <a:latin typeface="Georgia" panose="02040502050405020303" pitchFamily="18" charset="0"/>
+            </a:endParaRPr>
+          </a:p>
+          <a:p>
+            <a:pPr algn="l"/>
+            <a:r>
+              <a:rPr lang="pt-PT" b="0" i="0" u="none" strike="noStrike" dirty="0">
+                <a:solidFill>
+                  <a:srgbClr val="000000"/>
+                </a:solidFill>
+                <a:effectLst/>
+                <a:latin typeface="Georgia" panose="02040502050405020303" pitchFamily="18" charset="0"/>
+                <a:hlinkClick r:id="rId2"/>
+              </a:rPr>
+              <a:t>https://blog.somostera.com/data-science/clusteriza%C3%A7%C3%A3o-de-dados</a:t>
+            </a:r>
+            <a:r>
+              <a:rPr lang="pt-PT" b="0" i="0" u="none" strike="noStrike" dirty="0">
+                <a:solidFill>
+                  <a:srgbClr val="000000"/>
+                </a:solidFill>
+                <a:effectLst/>
+                <a:latin typeface="Georgia" panose="02040502050405020303" pitchFamily="18" charset="0"/>
+              </a:rPr>
+              <a:t> </a:t>
+            </a:r>
+          </a:p>
+        </p:txBody>
+      </p:sp>
+    </p:spTree>
+    <p:extLst>
+      <p:ext uri="{BB962C8B-B14F-4D97-AF65-F5344CB8AC3E}">
+        <p14:creationId xmlns:p14="http://schemas.microsoft.com/office/powerpoint/2010/main" val="1506274065"/>
       </p:ext>
     </p:extLst>
   </p:cSld>

--- a/type model.pptx
+++ b/type model.pptx
@@ -13,10 +13,12 @@
     <p:sldId id="261" r:id="rId7"/>
     <p:sldId id="260" r:id="rId8"/>
     <p:sldId id="263" r:id="rId9"/>
-    <p:sldId id="267" r:id="rId10"/>
-    <p:sldId id="268" r:id="rId11"/>
-    <p:sldId id="269" r:id="rId12"/>
-    <p:sldId id="270" r:id="rId13"/>
+    <p:sldId id="271" r:id="rId10"/>
+    <p:sldId id="267" r:id="rId11"/>
+    <p:sldId id="268" r:id="rId12"/>
+    <p:sldId id="269" r:id="rId13"/>
+    <p:sldId id="270" r:id="rId14"/>
+    <p:sldId id="272" r:id="rId15"/>
   </p:sldIdLst>
   <p:sldSz cx="12192000" cy="6858000"/>
   <p:notesSz cx="6858000" cy="9144000"/>
@@ -254,7 +256,7 @@
           <a:p>
             <a:fld id="{9394FC15-C62C-47D9-AA63-E5A366B8138A}" type="datetimeFigureOut">
               <a:rPr lang="en-US" smtClean="0"/>
-              <a:t>2/23/2023</a:t>
+              <a:t>2/25/2023</a:t>
             </a:fld>
             <a:endParaRPr lang="en-US" dirty="0"/>
           </a:p>
@@ -296,7 +298,7 @@
           <a:p>
             <a:fld id="{0E91B978-6106-44FE-A2B0-87A2F6797DB9}" type="slidenum">
               <a:rPr lang="en-US" smtClean="0"/>
-              <a:t>‹#›</a:t>
+              <a:t>‹nº›</a:t>
             </a:fld>
             <a:endParaRPr lang="en-US" dirty="0"/>
           </a:p>
@@ -424,7 +426,7 @@
           <a:p>
             <a:fld id="{9394FC15-C62C-47D9-AA63-E5A366B8138A}" type="datetimeFigureOut">
               <a:rPr lang="en-US" smtClean="0"/>
-              <a:t>2/23/2023</a:t>
+              <a:t>2/25/2023</a:t>
             </a:fld>
             <a:endParaRPr lang="en-US" dirty="0"/>
           </a:p>
@@ -466,7 +468,7 @@
           <a:p>
             <a:fld id="{0E91B978-6106-44FE-A2B0-87A2F6797DB9}" type="slidenum">
               <a:rPr lang="en-US" smtClean="0"/>
-              <a:t>‹#›</a:t>
+              <a:t>‹nº›</a:t>
             </a:fld>
             <a:endParaRPr lang="en-US" dirty="0"/>
           </a:p>
@@ -604,7 +606,7 @@
           <a:p>
             <a:fld id="{9394FC15-C62C-47D9-AA63-E5A366B8138A}" type="datetimeFigureOut">
               <a:rPr lang="en-US" smtClean="0"/>
-              <a:t>2/23/2023</a:t>
+              <a:t>2/25/2023</a:t>
             </a:fld>
             <a:endParaRPr lang="en-US" dirty="0"/>
           </a:p>
@@ -646,7 +648,7 @@
           <a:p>
             <a:fld id="{0E91B978-6106-44FE-A2B0-87A2F6797DB9}" type="slidenum">
               <a:rPr lang="en-US" smtClean="0"/>
-              <a:t>‹#›</a:t>
+              <a:t>‹nº›</a:t>
             </a:fld>
             <a:endParaRPr lang="en-US" dirty="0"/>
           </a:p>
@@ -774,7 +776,7 @@
           <a:p>
             <a:fld id="{9394FC15-C62C-47D9-AA63-E5A366B8138A}" type="datetimeFigureOut">
               <a:rPr lang="en-US" smtClean="0"/>
-              <a:t>2/23/2023</a:t>
+              <a:t>2/25/2023</a:t>
             </a:fld>
             <a:endParaRPr lang="en-US" dirty="0"/>
           </a:p>
@@ -816,7 +818,7 @@
           <a:p>
             <a:fld id="{0E91B978-6106-44FE-A2B0-87A2F6797DB9}" type="slidenum">
               <a:rPr lang="en-US" smtClean="0"/>
-              <a:t>‹#›</a:t>
+              <a:t>‹nº›</a:t>
             </a:fld>
             <a:endParaRPr lang="en-US" dirty="0"/>
           </a:p>
@@ -1020,7 +1022,7 @@
           <a:p>
             <a:fld id="{9394FC15-C62C-47D9-AA63-E5A366B8138A}" type="datetimeFigureOut">
               <a:rPr lang="en-US" smtClean="0"/>
-              <a:t>2/23/2023</a:t>
+              <a:t>2/25/2023</a:t>
             </a:fld>
             <a:endParaRPr lang="en-US" dirty="0"/>
           </a:p>
@@ -1062,7 +1064,7 @@
           <a:p>
             <a:fld id="{0E91B978-6106-44FE-A2B0-87A2F6797DB9}" type="slidenum">
               <a:rPr lang="en-US" smtClean="0"/>
-              <a:t>‹#›</a:t>
+              <a:t>‹nº›</a:t>
             </a:fld>
             <a:endParaRPr lang="en-US" dirty="0"/>
           </a:p>
@@ -1252,7 +1254,7 @@
           <a:p>
             <a:fld id="{9394FC15-C62C-47D9-AA63-E5A366B8138A}" type="datetimeFigureOut">
               <a:rPr lang="en-US" smtClean="0"/>
-              <a:t>2/23/2023</a:t>
+              <a:t>2/25/2023</a:t>
             </a:fld>
             <a:endParaRPr lang="en-US" dirty="0"/>
           </a:p>
@@ -1294,7 +1296,7 @@
           <a:p>
             <a:fld id="{0E91B978-6106-44FE-A2B0-87A2F6797DB9}" type="slidenum">
               <a:rPr lang="en-US" smtClean="0"/>
-              <a:t>‹#›</a:t>
+              <a:t>‹nº›</a:t>
             </a:fld>
             <a:endParaRPr lang="en-US" dirty="0"/>
           </a:p>
@@ -1619,7 +1621,7 @@
           <a:p>
             <a:fld id="{9394FC15-C62C-47D9-AA63-E5A366B8138A}" type="datetimeFigureOut">
               <a:rPr lang="en-US" smtClean="0"/>
-              <a:t>2/23/2023</a:t>
+              <a:t>2/25/2023</a:t>
             </a:fld>
             <a:endParaRPr lang="en-US" dirty="0"/>
           </a:p>
@@ -1661,7 +1663,7 @@
           <a:p>
             <a:fld id="{0E91B978-6106-44FE-A2B0-87A2F6797DB9}" type="slidenum">
               <a:rPr lang="en-US" smtClean="0"/>
-              <a:t>‹#›</a:t>
+              <a:t>‹nº›</a:t>
             </a:fld>
             <a:endParaRPr lang="en-US" dirty="0"/>
           </a:p>
@@ -1737,7 +1739,7 @@
           <a:p>
             <a:fld id="{9394FC15-C62C-47D9-AA63-E5A366B8138A}" type="datetimeFigureOut">
               <a:rPr lang="en-US" smtClean="0"/>
-              <a:t>2/23/2023</a:t>
+              <a:t>2/25/2023</a:t>
             </a:fld>
             <a:endParaRPr lang="en-US" dirty="0"/>
           </a:p>
@@ -1779,7 +1781,7 @@
           <a:p>
             <a:fld id="{0E91B978-6106-44FE-A2B0-87A2F6797DB9}" type="slidenum">
               <a:rPr lang="en-US" smtClean="0"/>
-              <a:t>‹#›</a:t>
+              <a:t>‹nº›</a:t>
             </a:fld>
             <a:endParaRPr lang="en-US" dirty="0"/>
           </a:p>
@@ -1832,7 +1834,7 @@
           <a:p>
             <a:fld id="{9394FC15-C62C-47D9-AA63-E5A366B8138A}" type="datetimeFigureOut">
               <a:rPr lang="en-US" smtClean="0"/>
-              <a:t>2/23/2023</a:t>
+              <a:t>2/25/2023</a:t>
             </a:fld>
             <a:endParaRPr lang="en-US" dirty="0"/>
           </a:p>
@@ -1874,7 +1876,7 @@
           <a:p>
             <a:fld id="{0E91B978-6106-44FE-A2B0-87A2F6797DB9}" type="slidenum">
               <a:rPr lang="en-US" smtClean="0"/>
-              <a:t>‹#›</a:t>
+              <a:t>‹nº›</a:t>
             </a:fld>
             <a:endParaRPr lang="en-US" dirty="0"/>
           </a:p>
@@ -2109,7 +2111,7 @@
           <a:p>
             <a:fld id="{9394FC15-C62C-47D9-AA63-E5A366B8138A}" type="datetimeFigureOut">
               <a:rPr lang="en-US" smtClean="0"/>
-              <a:t>2/23/2023</a:t>
+              <a:t>2/25/2023</a:t>
             </a:fld>
             <a:endParaRPr lang="en-US" dirty="0"/>
           </a:p>
@@ -2151,7 +2153,7 @@
           <a:p>
             <a:fld id="{0E91B978-6106-44FE-A2B0-87A2F6797DB9}" type="slidenum">
               <a:rPr lang="en-US" smtClean="0"/>
-              <a:t>‹#›</a:t>
+              <a:t>‹nº›</a:t>
             </a:fld>
             <a:endParaRPr lang="en-US" dirty="0"/>
           </a:p>
@@ -2362,7 +2364,7 @@
           <a:p>
             <a:fld id="{9394FC15-C62C-47D9-AA63-E5A366B8138A}" type="datetimeFigureOut">
               <a:rPr lang="en-US" smtClean="0"/>
-              <a:t>2/23/2023</a:t>
+              <a:t>2/25/2023</a:t>
             </a:fld>
             <a:endParaRPr lang="en-US" dirty="0"/>
           </a:p>
@@ -2404,7 +2406,7 @@
           <a:p>
             <a:fld id="{0E91B978-6106-44FE-A2B0-87A2F6797DB9}" type="slidenum">
               <a:rPr lang="en-US" smtClean="0"/>
-              <a:t>‹#›</a:t>
+              <a:t>‹nº›</a:t>
             </a:fld>
             <a:endParaRPr lang="en-US" dirty="0"/>
           </a:p>
@@ -2575,7 +2577,7 @@
           <a:p>
             <a:fld id="{9394FC15-C62C-47D9-AA63-E5A366B8138A}" type="datetimeFigureOut">
               <a:rPr lang="en-US" smtClean="0"/>
-              <a:t>2/23/2023</a:t>
+              <a:t>2/25/2023</a:t>
             </a:fld>
             <a:endParaRPr lang="en-US" dirty="0"/>
           </a:p>
@@ -2653,7 +2655,7 @@
           <a:p>
             <a:fld id="{0E91B978-6106-44FE-A2B0-87A2F6797DB9}" type="slidenum">
               <a:rPr lang="en-US" smtClean="0"/>
-              <a:t>‹#›</a:t>
+              <a:t>‹nº›</a:t>
             </a:fld>
             <a:endParaRPr lang="en-US" dirty="0"/>
           </a:p>
@@ -3207,7 +3209,7 @@
           <p:cNvPr id="3" name="TextBox 2">
             <a:extLst>
               <a:ext uri="{FF2B5EF4-FFF2-40B4-BE49-F238E27FC236}">
-                <a16:creationId xmlns:a16="http://schemas.microsoft.com/office/drawing/2014/main" id="{5011653A-7E7E-1045-ABF3-C761A35E08AB}"/>
+                <a16:creationId xmlns="" xmlns:a16="http://schemas.microsoft.com/office/drawing/2014/main" id="{5011653A-7E7E-1045-ABF3-C761A35E08AB}"/>
               </a:ext>
             </a:extLst>
           </p:cNvPr>
@@ -3381,7 +3383,7 @@
           <p:cNvPr id="9" name="TextBox 8">
             <a:extLst>
               <a:ext uri="{FF2B5EF4-FFF2-40B4-BE49-F238E27FC236}">
-                <a16:creationId xmlns:a16="http://schemas.microsoft.com/office/drawing/2014/main" id="{327BFE51-F331-49AA-EA6D-B0B099F31F3A}"/>
+                <a16:creationId xmlns="" xmlns:a16="http://schemas.microsoft.com/office/drawing/2014/main" id="{327BFE51-F331-49AA-EA6D-B0B099F31F3A}"/>
               </a:ext>
             </a:extLst>
           </p:cNvPr>
@@ -3391,7 +3393,7 @@
         <p:spPr>
           <a:xfrm>
             <a:off x="813038" y="3174767"/>
-            <a:ext cx="10151135" cy="3416320"/>
+            <a:ext cx="10151135" cy="2308324"/>
           </a:xfrm>
           <a:prstGeom prst="rect">
             <a:avLst/>
@@ -3406,24 +3408,87 @@
           <a:p>
             <a:pPr algn="l"/>
             <a:r>
-              <a:rPr lang="pt-PT" b="0" i="0" u="none" strike="noStrike" dirty="0" err="1">
+              <a:rPr lang="pt-PT" b="0" i="0" u="none" strike="noStrike" dirty="0">
                 <a:solidFill>
                   <a:srgbClr val="000000"/>
                 </a:solidFill>
                 <a:effectLst/>
                 <a:latin typeface="Georgia" panose="02040502050405020303" pitchFamily="18" charset="0"/>
               </a:rPr>
-              <a:t>Clusterização</a:t>
-            </a:r>
-            <a:r>
-              <a:rPr lang="pt-PT" b="0" i="0" u="none" strike="noStrike" dirty="0">
+              <a:t>Os dois definem classes para seus dados. A </a:t>
+            </a:r>
+            <a:r>
+              <a:rPr lang="pt-PT" b="1" i="0" u="none" strike="noStrike" dirty="0">
                 <a:solidFill>
                   <a:srgbClr val="000000"/>
                 </a:solidFill>
                 <a:effectLst/>
                 <a:latin typeface="Georgia" panose="02040502050405020303" pitchFamily="18" charset="0"/>
               </a:rPr>
-              <a:t> para variáveis categóricas </a:t>
+              <a:t>classificação</a:t>
+            </a:r>
+            <a:r>
+              <a:rPr lang="pt-PT" b="0" i="0" u="none" strike="noStrike" dirty="0">
+                <a:solidFill>
+                  <a:srgbClr val="000000"/>
+                </a:solidFill>
+                <a:effectLst/>
+                <a:latin typeface="Georgia" panose="02040502050405020303" pitchFamily="18" charset="0"/>
+              </a:rPr>
+              <a:t> agrupa os dados em determinadas categorias, ao passo que a </a:t>
+            </a:r>
+            <a:r>
+              <a:rPr lang="pt-PT" b="1" i="0" u="none" strike="noStrike" dirty="0" err="1">
+                <a:solidFill>
+                  <a:srgbClr val="000000"/>
+                </a:solidFill>
+                <a:effectLst/>
+                <a:latin typeface="Georgia" panose="02040502050405020303" pitchFamily="18" charset="0"/>
+              </a:rPr>
+              <a:t>clusterização</a:t>
+            </a:r>
+            <a:r>
+              <a:rPr lang="pt-PT" b="0" i="0" u="none" strike="noStrike" dirty="0">
+                <a:solidFill>
+                  <a:srgbClr val="000000"/>
+                </a:solidFill>
+                <a:effectLst/>
+                <a:latin typeface="Georgia" panose="02040502050405020303" pitchFamily="18" charset="0"/>
+              </a:rPr>
+              <a:t> utiliza a noção de clusters. </a:t>
+            </a:r>
+          </a:p>
+          <a:p>
+            <a:pPr algn="l"/>
+            <a:r>
+              <a:rPr lang="pt-PT" b="0" i="0" u="none" strike="noStrike" dirty="0">
+                <a:solidFill>
+                  <a:srgbClr val="000000"/>
+                </a:solidFill>
+                <a:effectLst/>
+                <a:latin typeface="Georgia" panose="02040502050405020303" pitchFamily="18" charset="0"/>
+              </a:rPr>
+              <a:t>Contudo,</a:t>
+            </a:r>
+            <a:r>
+              <a:rPr lang="pt-PT" b="1" i="0" u="none" strike="noStrike" dirty="0">
+                <a:solidFill>
+                  <a:srgbClr val="000000"/>
+                </a:solidFill>
+                <a:effectLst/>
+                <a:latin typeface="Georgia" panose="02040502050405020303" pitchFamily="18" charset="0"/>
+              </a:rPr>
+              <a:t> a principal diferença é a supervisão</a:t>
+            </a:r>
+            <a:r>
+              <a:rPr lang="pt-PT" b="0" i="0" u="none" strike="noStrike" dirty="0">
+                <a:solidFill>
+                  <a:srgbClr val="000000"/>
+                </a:solidFill>
+                <a:effectLst/>
+                <a:latin typeface="Georgia" panose="02040502050405020303" pitchFamily="18" charset="0"/>
+              </a:rPr>
+              <a:t>. A classificação é um clássico método supervisionado, em que o número de categorias para os dados é definido de antemão, com base nos dados de entrada. Ou seja, a pessoa cientista transmite dados com os rótulos prévios de saída, solicitando que o sistema aprenda como aqueles dados geram aquelas saídas. </a:t>
             </a:r>
           </a:p>
           <a:p>
@@ -3446,128 +3511,7 @@
                 <a:latin typeface="Georgia" panose="02040502050405020303" pitchFamily="18" charset="0"/>
                 <a:hlinkClick r:id="rId2"/>
               </a:rPr>
-              <a:t>https://www.youtube.com/watch?v=b39_vipRkUo</a:t>
-            </a:r>
-            <a:r>
-              <a:rPr lang="pt-PT" b="0" i="0" u="none" strike="noStrike" dirty="0">
-                <a:solidFill>
-                  <a:srgbClr val="000000"/>
-                </a:solidFill>
-                <a:effectLst/>
-                <a:latin typeface="Georgia" panose="02040502050405020303" pitchFamily="18" charset="0"/>
-              </a:rPr>
-              <a:t> </a:t>
-            </a:r>
-          </a:p>
-          <a:p>
-            <a:pPr algn="l"/>
-            <a:endParaRPr lang="pt-PT" dirty="0">
-              <a:solidFill>
-                <a:srgbClr val="000000"/>
-              </a:solidFill>
-              <a:latin typeface="Georgia" panose="02040502050405020303" pitchFamily="18" charset="0"/>
-            </a:endParaRPr>
-          </a:p>
-          <a:p>
-            <a:pPr algn="l"/>
-            <a:r>
-              <a:rPr lang="pt-PT" b="0" i="0" u="none" strike="noStrike" dirty="0">
-                <a:solidFill>
-                  <a:srgbClr val="000000"/>
-                </a:solidFill>
-                <a:effectLst/>
-                <a:latin typeface="Georgia" panose="02040502050405020303" pitchFamily="18" charset="0"/>
-                <a:hlinkClick r:id="rId3"/>
-              </a:rPr>
-              <a:t>https://www.analyticsvidhya.com/blog/2021/06/kmodes-clustering-algorithm-for-categorical-data/</a:t>
-            </a:r>
-            <a:r>
-              <a:rPr lang="pt-PT" b="0" i="0" u="none" strike="noStrike" dirty="0">
-                <a:solidFill>
-                  <a:srgbClr val="000000"/>
-                </a:solidFill>
-                <a:effectLst/>
-                <a:latin typeface="Georgia" panose="02040502050405020303" pitchFamily="18" charset="0"/>
-              </a:rPr>
-              <a:t> </a:t>
-            </a:r>
-          </a:p>
-          <a:p>
-            <a:pPr algn="l"/>
-            <a:endParaRPr lang="pt-PT" dirty="0">
-              <a:solidFill>
-                <a:srgbClr val="000000"/>
-              </a:solidFill>
-              <a:latin typeface="Georgia" panose="02040502050405020303" pitchFamily="18" charset="0"/>
-            </a:endParaRPr>
-          </a:p>
-          <a:p>
-            <a:pPr algn="l"/>
-            <a:endParaRPr lang="pt-PT" b="0" i="0" u="none" strike="noStrike" dirty="0">
-              <a:solidFill>
-                <a:srgbClr val="000000"/>
-              </a:solidFill>
-              <a:effectLst/>
-              <a:latin typeface="Georgia" panose="02040502050405020303" pitchFamily="18" charset="0"/>
-            </a:endParaRPr>
-          </a:p>
-          <a:p>
-            <a:pPr algn="l"/>
-            <a:r>
-              <a:rPr lang="pt-PT" b="0" i="0" u="none" strike="noStrike" dirty="0">
-                <a:solidFill>
-                  <a:srgbClr val="000000"/>
-                </a:solidFill>
-                <a:effectLst/>
-                <a:latin typeface="Georgia" panose="02040502050405020303" pitchFamily="18" charset="0"/>
-                <a:hlinkClick r:id="rId3"/>
-              </a:rPr>
-              <a:t>https://www.analyticsvidhya.com/blog/2021/06/kmodes-clustering-algorithm-for-categorical-data/</a:t>
-            </a:r>
-            <a:r>
-              <a:rPr lang="pt-PT" dirty="0">
-                <a:solidFill>
-                  <a:srgbClr val="000000"/>
-                </a:solidFill>
-                <a:latin typeface="Georgia" panose="02040502050405020303" pitchFamily="18" charset="0"/>
-              </a:rPr>
-              <a:t> </a:t>
-            </a:r>
-          </a:p>
-          <a:p>
-            <a:pPr algn="l"/>
-            <a:r>
-              <a:rPr lang="pt-PT" dirty="0">
-                <a:solidFill>
-                  <a:srgbClr val="000000"/>
-                </a:solidFill>
-                <a:latin typeface="Georgia" panose="02040502050405020303" pitchFamily="18" charset="0"/>
-                <a:hlinkClick r:id="rId4"/>
-              </a:rPr>
-              <a:t>https://www.maxwell.vrac.puc-rio.br/14382/14382_4.PDF</a:t>
-            </a:r>
-            <a:r>
-              <a:rPr lang="pt-PT" dirty="0">
-                <a:solidFill>
-                  <a:srgbClr val="000000"/>
-                </a:solidFill>
-                <a:latin typeface="Georgia" panose="02040502050405020303" pitchFamily="18" charset="0"/>
-              </a:rPr>
-              <a:t> </a:t>
-            </a:r>
-          </a:p>
-          <a:p>
-            <a:pPr algn="l"/>
-            <a:r>
-              <a:rPr lang="pt-PT" b="0" i="0" u="none" strike="noStrike" dirty="0">
-                <a:solidFill>
-                  <a:srgbClr val="000000"/>
-                </a:solidFill>
-                <a:effectLst/>
-                <a:latin typeface="Georgia" panose="02040502050405020303" pitchFamily="18" charset="0"/>
-                <a:hlinkClick r:id="rId5"/>
-              </a:rPr>
-              <a:t>https://www.dca.fee.unicamp.br/~lboccato/topico_8_clusterizacao.pdf</a:t>
+              <a:t>https://blog.somostera.com/data-science/clusteriza%C3%A7%C3%A3o-de-dados</a:t>
             </a:r>
             <a:r>
               <a:rPr lang="pt-PT" b="0" i="0" u="none" strike="noStrike" dirty="0">
@@ -3585,7 +3529,7 @@
     </p:spTree>
     <p:extLst>
       <p:ext uri="{BB962C8B-B14F-4D97-AF65-F5344CB8AC3E}">
-        <p14:creationId xmlns:p14="http://schemas.microsoft.com/office/powerpoint/2010/main" val="2212152871"/>
+        <p14:creationId xmlns:p14="http://schemas.microsoft.com/office/powerpoint/2010/main" val="1506274065"/>
       </p:ext>
     </p:extLst>
   </p:cSld>
@@ -3667,40 +3611,390 @@
           </a:p>
         </p:txBody>
       </p:sp>
-      <p:pic>
-        <p:nvPicPr>
-          <p:cNvPr id="5" name="Picture 4">
+      <p:sp>
+        <p:nvSpPr>
+          <p:cNvPr id="3" name="TextBox 2">
             <a:extLst>
               <a:ext uri="{FF2B5EF4-FFF2-40B4-BE49-F238E27FC236}">
-                <a16:creationId xmlns:a16="http://schemas.microsoft.com/office/drawing/2014/main" id="{453ED842-A31A-7A87-93AA-08A1DE094F74}"/>
+                <a16:creationId xmlns="" xmlns:a16="http://schemas.microsoft.com/office/drawing/2014/main" id="{5011653A-7E7E-1045-ABF3-C761A35E08AB}"/>
               </a:ext>
             </a:extLst>
           </p:cNvPr>
-          <p:cNvPicPr>
-            <a:picLocks noChangeAspect="1"/>
-          </p:cNvPicPr>
+          <p:cNvSpPr txBox="1"/>
           <p:nvPr/>
-        </p:nvPicPr>
-        <p:blipFill>
-          <a:blip r:embed="rId2"/>
-          <a:stretch>
-            <a:fillRect/>
-          </a:stretch>
-        </p:blipFill>
-        <p:spPr>
-          <a:xfrm>
-            <a:off x="3243262" y="1066800"/>
-            <a:ext cx="5705475" cy="4724400"/>
+        </p:nvSpPr>
+        <p:spPr>
+          <a:xfrm>
+            <a:off x="536994" y="1154358"/>
+            <a:ext cx="8270576" cy="1754326"/>
           </a:xfrm>
           <a:prstGeom prst="rect">
             <a:avLst/>
           </a:prstGeom>
-        </p:spPr>
-      </p:pic>
+          <a:noFill/>
+        </p:spPr>
+        <p:txBody>
+          <a:bodyPr wrap="square">
+            <a:spAutoFit/>
+          </a:bodyPr>
+          <a:lstStyle/>
+          <a:p>
+            <a:pPr algn="l"/>
+            <a:r>
+              <a:rPr lang="pt-PT" b="0" i="0" u="none" strike="noStrike" dirty="0">
+                <a:solidFill>
+                  <a:srgbClr val="000000"/>
+                </a:solidFill>
+                <a:effectLst/>
+                <a:latin typeface="Georgia" panose="02040502050405020303" pitchFamily="18" charset="0"/>
+              </a:rPr>
+              <a:t>Os cálculos variam a depender do tipo de </a:t>
+            </a:r>
+            <a:r>
+              <a:rPr lang="pt-PT" b="0" i="0" u="none" strike="noStrike" dirty="0" err="1">
+                <a:solidFill>
+                  <a:srgbClr val="000000"/>
+                </a:solidFill>
+                <a:effectLst/>
+                <a:latin typeface="Georgia" panose="02040502050405020303" pitchFamily="18" charset="0"/>
+              </a:rPr>
+              <a:t>clusterização</a:t>
+            </a:r>
+            <a:r>
+              <a:rPr lang="pt-PT" b="0" i="0" u="none" strike="noStrike" dirty="0">
+                <a:solidFill>
+                  <a:srgbClr val="000000"/>
+                </a:solidFill>
+                <a:effectLst/>
+                <a:latin typeface="Georgia" panose="02040502050405020303" pitchFamily="18" charset="0"/>
+              </a:rPr>
+              <a:t> que é adotado. Veremos, a seguir, alguns tipos:</a:t>
+            </a:r>
+          </a:p>
+          <a:p>
+            <a:pPr algn="l">
+              <a:buFont typeface="Arial" panose="020B0604020202020204" pitchFamily="34" charset="0"/>
+              <a:buChar char="•"/>
+            </a:pPr>
+            <a:r>
+              <a:rPr lang="pt-PT" b="0" i="0" dirty="0">
+                <a:solidFill>
+                  <a:srgbClr val="000000"/>
+                </a:solidFill>
+                <a:effectLst/>
+                <a:latin typeface="Georgia" panose="02040502050405020303" pitchFamily="18" charset="0"/>
+              </a:rPr>
+              <a:t>modelos de conectividade;</a:t>
+            </a:r>
+            <a:endParaRPr lang="pt-PT" b="0" i="0" dirty="0">
+              <a:solidFill>
+                <a:srgbClr val="000000"/>
+              </a:solidFill>
+              <a:effectLst/>
+              <a:latin typeface="Times New Roman" panose="02020603050405020304" pitchFamily="18" charset="0"/>
+            </a:endParaRPr>
+          </a:p>
+          <a:p>
+            <a:pPr algn="l">
+              <a:buFont typeface="Arial" panose="020B0604020202020204" pitchFamily="34" charset="0"/>
+              <a:buChar char="•"/>
+            </a:pPr>
+            <a:r>
+              <a:rPr lang="pt-PT" b="0" i="0" dirty="0">
+                <a:solidFill>
+                  <a:srgbClr val="000000"/>
+                </a:solidFill>
+                <a:effectLst/>
+                <a:latin typeface="Georgia" panose="02040502050405020303" pitchFamily="18" charset="0"/>
+              </a:rPr>
+              <a:t>modelos de </a:t>
+            </a:r>
+            <a:r>
+              <a:rPr lang="pt-PT" b="0" i="0" dirty="0" err="1">
+                <a:solidFill>
+                  <a:srgbClr val="000000"/>
+                </a:solidFill>
+                <a:effectLst/>
+                <a:latin typeface="Georgia" panose="02040502050405020303" pitchFamily="18" charset="0"/>
+              </a:rPr>
+              <a:t>centróide</a:t>
+            </a:r>
+            <a:r>
+              <a:rPr lang="pt-PT" b="0" i="0" dirty="0">
+                <a:solidFill>
+                  <a:srgbClr val="000000"/>
+                </a:solidFill>
+                <a:effectLst/>
+                <a:latin typeface="Georgia" panose="02040502050405020303" pitchFamily="18" charset="0"/>
+              </a:rPr>
+              <a:t>;</a:t>
+            </a:r>
+            <a:endParaRPr lang="pt-PT" b="0" i="0" dirty="0">
+              <a:solidFill>
+                <a:srgbClr val="000000"/>
+              </a:solidFill>
+              <a:effectLst/>
+              <a:latin typeface="Times New Roman" panose="02020603050405020304" pitchFamily="18" charset="0"/>
+            </a:endParaRPr>
+          </a:p>
+          <a:p>
+            <a:pPr algn="l">
+              <a:buFont typeface="Arial" panose="020B0604020202020204" pitchFamily="34" charset="0"/>
+              <a:buChar char="•"/>
+            </a:pPr>
+            <a:r>
+              <a:rPr lang="pt-PT" b="0" i="0" dirty="0">
+                <a:solidFill>
+                  <a:srgbClr val="000000"/>
+                </a:solidFill>
+                <a:effectLst/>
+                <a:latin typeface="Georgia" panose="02040502050405020303" pitchFamily="18" charset="0"/>
+              </a:rPr>
+              <a:t>modelos de distribuição;</a:t>
+            </a:r>
+            <a:endParaRPr lang="pt-PT" b="0" i="0" dirty="0">
+              <a:solidFill>
+                <a:srgbClr val="000000"/>
+              </a:solidFill>
+              <a:effectLst/>
+              <a:latin typeface="Times New Roman" panose="02020603050405020304" pitchFamily="18" charset="0"/>
+            </a:endParaRPr>
+          </a:p>
+          <a:p>
+            <a:pPr algn="l">
+              <a:buFont typeface="Arial" panose="020B0604020202020204" pitchFamily="34" charset="0"/>
+              <a:buChar char="•"/>
+            </a:pPr>
+            <a:r>
+              <a:rPr lang="pt-PT" b="0" i="0" dirty="0">
+                <a:solidFill>
+                  <a:srgbClr val="000000"/>
+                </a:solidFill>
+                <a:effectLst/>
+                <a:latin typeface="Georgia" panose="02040502050405020303" pitchFamily="18" charset="0"/>
+              </a:rPr>
+              <a:t>modelos de densidade.</a:t>
+            </a:r>
+            <a:endParaRPr lang="pt-PT" b="0" i="0" dirty="0">
+              <a:solidFill>
+                <a:srgbClr val="000000"/>
+              </a:solidFill>
+              <a:effectLst/>
+              <a:latin typeface="Times New Roman" panose="02020603050405020304" pitchFamily="18" charset="0"/>
+            </a:endParaRPr>
+          </a:p>
+        </p:txBody>
+      </p:sp>
+      <p:sp>
+        <p:nvSpPr>
+          <p:cNvPr id="9" name="TextBox 8">
+            <a:extLst>
+              <a:ext uri="{FF2B5EF4-FFF2-40B4-BE49-F238E27FC236}">
+                <a16:creationId xmlns="" xmlns:a16="http://schemas.microsoft.com/office/drawing/2014/main" id="{327BFE51-F331-49AA-EA6D-B0B099F31F3A}"/>
+              </a:ext>
+            </a:extLst>
+          </p:cNvPr>
+          <p:cNvSpPr txBox="1"/>
+          <p:nvPr/>
+        </p:nvSpPr>
+        <p:spPr>
+          <a:xfrm>
+            <a:off x="813038" y="3174767"/>
+            <a:ext cx="10151135" cy="3416320"/>
+          </a:xfrm>
+          <a:prstGeom prst="rect">
+            <a:avLst/>
+          </a:prstGeom>
+          <a:noFill/>
+        </p:spPr>
+        <p:txBody>
+          <a:bodyPr wrap="square">
+            <a:spAutoFit/>
+          </a:bodyPr>
+          <a:lstStyle/>
+          <a:p>
+            <a:pPr algn="l"/>
+            <a:r>
+              <a:rPr lang="pt-PT" b="0" i="0" u="none" strike="noStrike" dirty="0" err="1">
+                <a:solidFill>
+                  <a:srgbClr val="000000"/>
+                </a:solidFill>
+                <a:effectLst/>
+                <a:latin typeface="Georgia" panose="02040502050405020303" pitchFamily="18" charset="0"/>
+              </a:rPr>
+              <a:t>Clusterização</a:t>
+            </a:r>
+            <a:r>
+              <a:rPr lang="pt-PT" b="0" i="0" u="none" strike="noStrike" dirty="0">
+                <a:solidFill>
+                  <a:srgbClr val="000000"/>
+                </a:solidFill>
+                <a:effectLst/>
+                <a:latin typeface="Georgia" panose="02040502050405020303" pitchFamily="18" charset="0"/>
+              </a:rPr>
+              <a:t> para variáveis categóricas </a:t>
+            </a:r>
+          </a:p>
+          <a:p>
+            <a:pPr algn="l"/>
+            <a:endParaRPr lang="pt-PT" dirty="0">
+              <a:solidFill>
+                <a:srgbClr val="000000"/>
+              </a:solidFill>
+              <a:latin typeface="Georgia" panose="02040502050405020303" pitchFamily="18" charset="0"/>
+            </a:endParaRPr>
+          </a:p>
+          <a:p>
+            <a:pPr algn="l"/>
+            <a:r>
+              <a:rPr lang="pt-PT" b="0" i="0" u="none" strike="noStrike" dirty="0">
+                <a:solidFill>
+                  <a:srgbClr val="000000"/>
+                </a:solidFill>
+                <a:effectLst/>
+                <a:latin typeface="Georgia" panose="02040502050405020303" pitchFamily="18" charset="0"/>
+                <a:hlinkClick r:id="rId2"/>
+              </a:rPr>
+              <a:t>https://www.youtube.com/watch?v=b39_vipRkUo</a:t>
+            </a:r>
+            <a:r>
+              <a:rPr lang="pt-PT" b="0" i="0" u="none" strike="noStrike" dirty="0">
+                <a:solidFill>
+                  <a:srgbClr val="000000"/>
+                </a:solidFill>
+                <a:effectLst/>
+                <a:latin typeface="Georgia" panose="02040502050405020303" pitchFamily="18" charset="0"/>
+              </a:rPr>
+              <a:t> </a:t>
+            </a:r>
+          </a:p>
+          <a:p>
+            <a:pPr algn="l"/>
+            <a:endParaRPr lang="pt-PT" dirty="0">
+              <a:solidFill>
+                <a:srgbClr val="000000"/>
+              </a:solidFill>
+              <a:latin typeface="Georgia" panose="02040502050405020303" pitchFamily="18" charset="0"/>
+            </a:endParaRPr>
+          </a:p>
+          <a:p>
+            <a:pPr algn="l"/>
+            <a:r>
+              <a:rPr lang="pt-PT" b="0" i="0" u="none" strike="noStrike" dirty="0">
+                <a:solidFill>
+                  <a:srgbClr val="000000"/>
+                </a:solidFill>
+                <a:effectLst/>
+                <a:latin typeface="Georgia" panose="02040502050405020303" pitchFamily="18" charset="0"/>
+                <a:hlinkClick r:id="rId3"/>
+              </a:rPr>
+              <a:t>https://www.analyticsvidhya.com/blog/2021/06/kmodes-clustering-algorithm-for-categorical-data/</a:t>
+            </a:r>
+            <a:r>
+              <a:rPr lang="pt-PT" b="0" i="0" u="none" strike="noStrike" dirty="0">
+                <a:solidFill>
+                  <a:srgbClr val="000000"/>
+                </a:solidFill>
+                <a:effectLst/>
+                <a:latin typeface="Georgia" panose="02040502050405020303" pitchFamily="18" charset="0"/>
+              </a:rPr>
+              <a:t> </a:t>
+            </a:r>
+          </a:p>
+          <a:p>
+            <a:pPr algn="l"/>
+            <a:endParaRPr lang="pt-PT" dirty="0">
+              <a:solidFill>
+                <a:srgbClr val="000000"/>
+              </a:solidFill>
+              <a:latin typeface="Georgia" panose="02040502050405020303" pitchFamily="18" charset="0"/>
+            </a:endParaRPr>
+          </a:p>
+          <a:p>
+            <a:pPr algn="l"/>
+            <a:endParaRPr lang="pt-PT" b="0" i="0" u="none" strike="noStrike" dirty="0">
+              <a:solidFill>
+                <a:srgbClr val="000000"/>
+              </a:solidFill>
+              <a:effectLst/>
+              <a:latin typeface="Georgia" panose="02040502050405020303" pitchFamily="18" charset="0"/>
+            </a:endParaRPr>
+          </a:p>
+          <a:p>
+            <a:pPr algn="l"/>
+            <a:r>
+              <a:rPr lang="pt-PT" b="0" i="0" u="none" strike="noStrike" dirty="0">
+                <a:solidFill>
+                  <a:srgbClr val="000000"/>
+                </a:solidFill>
+                <a:effectLst/>
+                <a:latin typeface="Georgia" panose="02040502050405020303" pitchFamily="18" charset="0"/>
+                <a:hlinkClick r:id="rId3"/>
+              </a:rPr>
+              <a:t>https://www.analyticsvidhya.com/blog/2021/06/kmodes-clustering-algorithm-for-categorical-data/</a:t>
+            </a:r>
+            <a:r>
+              <a:rPr lang="pt-PT" dirty="0">
+                <a:solidFill>
+                  <a:srgbClr val="000000"/>
+                </a:solidFill>
+                <a:latin typeface="Georgia" panose="02040502050405020303" pitchFamily="18" charset="0"/>
+              </a:rPr>
+              <a:t> </a:t>
+            </a:r>
+          </a:p>
+          <a:p>
+            <a:pPr algn="l"/>
+            <a:r>
+              <a:rPr lang="pt-PT" dirty="0">
+                <a:solidFill>
+                  <a:srgbClr val="000000"/>
+                </a:solidFill>
+                <a:latin typeface="Georgia" panose="02040502050405020303" pitchFamily="18" charset="0"/>
+                <a:hlinkClick r:id="rId4"/>
+              </a:rPr>
+              <a:t>https://www.maxwell.vrac.puc-rio.br/14382/14382_4.PDF</a:t>
+            </a:r>
+            <a:r>
+              <a:rPr lang="pt-PT" dirty="0">
+                <a:solidFill>
+                  <a:srgbClr val="000000"/>
+                </a:solidFill>
+                <a:latin typeface="Georgia" panose="02040502050405020303" pitchFamily="18" charset="0"/>
+              </a:rPr>
+              <a:t> </a:t>
+            </a:r>
+          </a:p>
+          <a:p>
+            <a:pPr algn="l"/>
+            <a:r>
+              <a:rPr lang="pt-PT" b="0" i="0" u="none" strike="noStrike" dirty="0">
+                <a:solidFill>
+                  <a:srgbClr val="000000"/>
+                </a:solidFill>
+                <a:effectLst/>
+                <a:latin typeface="Georgia" panose="02040502050405020303" pitchFamily="18" charset="0"/>
+                <a:hlinkClick r:id="rId5"/>
+              </a:rPr>
+              <a:t>https://www.dca.fee.unicamp.br/~lboccato/topico_8_clusterizacao.pdf</a:t>
+            </a:r>
+            <a:r>
+              <a:rPr lang="pt-PT" b="0" i="0" u="none" strike="noStrike" dirty="0">
+                <a:solidFill>
+                  <a:srgbClr val="000000"/>
+                </a:solidFill>
+                <a:effectLst/>
+                <a:latin typeface="Georgia" panose="02040502050405020303" pitchFamily="18" charset="0"/>
+              </a:rPr>
+              <a:t> </a:t>
+            </a:r>
+          </a:p>
+        </p:txBody>
+      </p:sp>
     </p:spTree>
     <p:extLst>
       <p:ext uri="{BB962C8B-B14F-4D97-AF65-F5344CB8AC3E}">
-        <p14:creationId xmlns:p14="http://schemas.microsoft.com/office/powerpoint/2010/main" val="3696952103"/>
+        <p14:creationId xmlns:p14="http://schemas.microsoft.com/office/powerpoint/2010/main" val="2212152871"/>
       </p:ext>
     </p:extLst>
   </p:cSld>
@@ -3782,12 +4076,127 @@
           </a:p>
         </p:txBody>
       </p:sp>
+      <p:pic>
+        <p:nvPicPr>
+          <p:cNvPr id="5" name="Picture 4">
+            <a:extLst>
+              <a:ext uri="{FF2B5EF4-FFF2-40B4-BE49-F238E27FC236}">
+                <a16:creationId xmlns="" xmlns:a16="http://schemas.microsoft.com/office/drawing/2014/main" id="{453ED842-A31A-7A87-93AA-08A1DE094F74}"/>
+              </a:ext>
+            </a:extLst>
+          </p:cNvPr>
+          <p:cNvPicPr>
+            <a:picLocks noChangeAspect="1"/>
+          </p:cNvPicPr>
+          <p:nvPr/>
+        </p:nvPicPr>
+        <p:blipFill>
+          <a:blip r:embed="rId2"/>
+          <a:stretch>
+            <a:fillRect/>
+          </a:stretch>
+        </p:blipFill>
+        <p:spPr>
+          <a:xfrm>
+            <a:off x="3243262" y="1066800"/>
+            <a:ext cx="5705475" cy="4724400"/>
+          </a:xfrm>
+          <a:prstGeom prst="rect">
+            <a:avLst/>
+          </a:prstGeom>
+        </p:spPr>
+      </p:pic>
+    </p:spTree>
+    <p:extLst>
+      <p:ext uri="{BB962C8B-B14F-4D97-AF65-F5344CB8AC3E}">
+        <p14:creationId xmlns:p14="http://schemas.microsoft.com/office/powerpoint/2010/main" val="3696952103"/>
+      </p:ext>
+    </p:extLst>
+  </p:cSld>
+  <p:clrMapOvr>
+    <a:masterClrMapping/>
+  </p:clrMapOvr>
+</p:sld>
+</file>
+
+<file path=ppt/slides/slide13.xml><?xml version="1.0" encoding="utf-8"?>
+<p:sld xmlns:a="http://schemas.openxmlformats.org/drawingml/2006/main" xmlns:r="http://schemas.openxmlformats.org/officeDocument/2006/relationships" xmlns:p="http://schemas.openxmlformats.org/presentationml/2006/main">
+  <p:cSld>
+    <p:spTree>
+      <p:nvGrpSpPr>
+        <p:cNvPr id="1" name=""/>
+        <p:cNvGrpSpPr/>
+        <p:nvPr/>
+      </p:nvGrpSpPr>
+      <p:grpSpPr>
+        <a:xfrm>
+          <a:off x="0" y="0"/>
+          <a:ext cx="0" cy="0"/>
+          <a:chOff x="0" y="0"/>
+          <a:chExt cx="0" cy="0"/>
+        </a:xfrm>
+      </p:grpSpPr>
+      <p:sp>
+        <p:nvSpPr>
+          <p:cNvPr id="4" name="Retângulo 3"/>
+          <p:cNvSpPr/>
+          <p:nvPr/>
+        </p:nvSpPr>
+        <p:spPr>
+          <a:xfrm>
+            <a:off x="4554583" y="409303"/>
+            <a:ext cx="3143794" cy="478972"/>
+          </a:xfrm>
+          <a:prstGeom prst="rect">
+            <a:avLst/>
+          </a:prstGeom>
+          <a:solidFill>
+            <a:schemeClr val="bg2"/>
+          </a:solidFill>
+          <a:ln>
+            <a:solidFill>
+              <a:schemeClr val="tx1"/>
+            </a:solidFill>
+          </a:ln>
+        </p:spPr>
+        <p:style>
+          <a:lnRef idx="2">
+            <a:schemeClr val="accent1">
+              <a:shade val="50000"/>
+            </a:schemeClr>
+          </a:lnRef>
+          <a:fillRef idx="1">
+            <a:schemeClr val="accent1"/>
+          </a:fillRef>
+          <a:effectRef idx="0">
+            <a:schemeClr val="accent1"/>
+          </a:effectRef>
+          <a:fontRef idx="minor">
+            <a:schemeClr val="lt1"/>
+          </a:fontRef>
+        </p:style>
+        <p:txBody>
+          <a:bodyPr rtlCol="0" anchor="ctr"/>
+          <a:lstStyle/>
+          <a:p>
+            <a:pPr algn="ctr"/>
+            <a:r>
+              <a:rPr lang="en-US" dirty="0">
+                <a:solidFill>
+                  <a:schemeClr val="tx1"/>
+                </a:solidFill>
+              </a:rPr>
+              <a:t>Machine Learning</a:t>
+            </a:r>
+          </a:p>
+        </p:txBody>
+      </p:sp>
       <p:sp>
         <p:nvSpPr>
           <p:cNvPr id="3" name="TextBox 2">
             <a:extLst>
               <a:ext uri="{FF2B5EF4-FFF2-40B4-BE49-F238E27FC236}">
-                <a16:creationId xmlns:a16="http://schemas.microsoft.com/office/drawing/2014/main" id="{FDB12D37-AC5B-20C8-EBBA-52049CD37E46}"/>
+                <a16:creationId xmlns="" xmlns:a16="http://schemas.microsoft.com/office/drawing/2014/main" id="{FDB12D37-AC5B-20C8-EBBA-52049CD37E46}"/>
               </a:ext>
             </a:extLst>
           </p:cNvPr>
@@ -3822,7 +4231,7 @@
           <p:cNvPr id="7" name="TextBox 6">
             <a:extLst>
               <a:ext uri="{FF2B5EF4-FFF2-40B4-BE49-F238E27FC236}">
-                <a16:creationId xmlns:a16="http://schemas.microsoft.com/office/drawing/2014/main" id="{D61441EC-42D8-D437-7C92-08F618A77F8A}"/>
+                <a16:creationId xmlns="" xmlns:a16="http://schemas.microsoft.com/office/drawing/2014/main" id="{D61441EC-42D8-D437-7C92-08F618A77F8A}"/>
               </a:ext>
             </a:extLst>
           </p:cNvPr>
@@ -3852,10 +4261,643 @@
           </a:p>
         </p:txBody>
       </p:sp>
+      <p:sp>
+        <p:nvSpPr>
+          <p:cNvPr id="2" name="Retângulo 1"/>
+          <p:cNvSpPr/>
+          <p:nvPr/>
+        </p:nvSpPr>
+        <p:spPr>
+          <a:xfrm>
+            <a:off x="365761" y="3062544"/>
+            <a:ext cx="6096000" cy="646331"/>
+          </a:xfrm>
+          <a:prstGeom prst="rect">
+            <a:avLst/>
+          </a:prstGeom>
+        </p:spPr>
+        <p:txBody>
+          <a:bodyPr>
+            <a:spAutoFit/>
+          </a:bodyPr>
+          <a:lstStyle/>
+          <a:p>
+            <a:r>
+              <a:rPr lang="en-US" dirty="0"/>
+              <a:t>https://sites.google.com/view/vinegarhill-datalabs/data-transformation-and-visualization</a:t>
+            </a:r>
+          </a:p>
+        </p:txBody>
+      </p:sp>
     </p:spTree>
     <p:extLst>
       <p:ext uri="{BB962C8B-B14F-4D97-AF65-F5344CB8AC3E}">
         <p14:creationId xmlns:p14="http://schemas.microsoft.com/office/powerpoint/2010/main" val="2800087182"/>
+      </p:ext>
+    </p:extLst>
+  </p:cSld>
+  <p:clrMapOvr>
+    <a:masterClrMapping/>
+  </p:clrMapOvr>
+</p:sld>
+</file>
+
+<file path=ppt/slides/slide14.xml><?xml version="1.0" encoding="utf-8"?>
+<p:sld xmlns:a="http://schemas.openxmlformats.org/drawingml/2006/main" xmlns:r="http://schemas.openxmlformats.org/officeDocument/2006/relationships" xmlns:p="http://schemas.openxmlformats.org/presentationml/2006/main">
+  <p:cSld>
+    <p:spTree>
+      <p:nvGrpSpPr>
+        <p:cNvPr id="1" name=""/>
+        <p:cNvGrpSpPr/>
+        <p:nvPr/>
+      </p:nvGrpSpPr>
+      <p:grpSpPr>
+        <a:xfrm>
+          <a:off x="0" y="0"/>
+          <a:ext cx="0" cy="0"/>
+          <a:chOff x="0" y="0"/>
+          <a:chExt cx="0" cy="0"/>
+        </a:xfrm>
+      </p:grpSpPr>
+      <p:sp>
+        <p:nvSpPr>
+          <p:cNvPr id="5" name="Rectangle 1"/>
+          <p:cNvSpPr>
+            <a:spLocks noChangeArrowheads="1"/>
+          </p:cNvSpPr>
+          <p:nvPr/>
+        </p:nvSpPr>
+        <p:spPr bwMode="auto">
+          <a:xfrm>
+            <a:off x="452846" y="457778"/>
+            <a:ext cx="10058400" cy="1231106"/>
+          </a:xfrm>
+          <a:prstGeom prst="rect">
+            <a:avLst/>
+          </a:prstGeom>
+          <a:noFill/>
+          <a:ln>
+            <a:noFill/>
+          </a:ln>
+          <a:effectLst/>
+          <a:extLst>
+            <a:ext uri="{909E8E84-426E-40DD-AFC4-6F175D3DCCD1}">
+              <a14:hiddenFill xmlns:a14="http://schemas.microsoft.com/office/drawing/2010/main">
+                <a:solidFill>
+                  <a:schemeClr val="accent1"/>
+                </a:solidFill>
+              </a14:hiddenFill>
+            </a:ext>
+            <a:ext uri="{91240B29-F687-4F45-9708-019B960494DF}">
+              <a14:hiddenLine xmlns:a14="http://schemas.microsoft.com/office/drawing/2010/main" w="9525">
+                <a:solidFill>
+                  <a:schemeClr val="tx1"/>
+                </a:solidFill>
+                <a:miter lim="800000"/>
+                <a:headEnd/>
+                <a:tailEnd/>
+              </a14:hiddenLine>
+            </a:ext>
+            <a:ext uri="{AF507438-7753-43E0-B8FC-AC1667EBCBE1}">
+              <a14:hiddenEffects xmlns:a14="http://schemas.microsoft.com/office/drawing/2010/main">
+                <a:effectLst>
+                  <a:outerShdw dist="35921" dir="2700000" algn="ctr" rotWithShape="0">
+                    <a:schemeClr val="bg2"/>
+                  </a:outerShdw>
+                </a:effectLst>
+              </a14:hiddenEffects>
+            </a:ext>
+          </a:extLst>
+        </p:spPr>
+        <p:txBody>
+          <a:bodyPr vert="horz" wrap="square" lIns="91440" tIns="45720" rIns="91440" bIns="45720" numCol="1" anchor="ctr" anchorCtr="0" compatLnSpc="1">
+            <a:prstTxWarp prst="textNoShape">
+              <a:avLst/>
+            </a:prstTxWarp>
+            <a:spAutoFit/>
+          </a:bodyPr>
+          <a:lstStyle>
+            <a:lvl1pPr eaLnBrk="0" fontAlgn="base" hangingPunct="0">
+              <a:spcBef>
+                <a:spcPct val="0"/>
+              </a:spcBef>
+              <a:spcAft>
+                <a:spcPct val="0"/>
+              </a:spcAft>
+              <a:tabLst>
+                <a:tab pos="457200" algn="l"/>
+              </a:tabLst>
+              <a:defRPr>
+                <a:solidFill>
+                  <a:schemeClr val="tx1"/>
+                </a:solidFill>
+                <a:latin typeface="Arial" panose="020B0604020202020204" pitchFamily="34" charset="0"/>
+              </a:defRPr>
+            </a:lvl1pPr>
+            <a:lvl2pPr eaLnBrk="0" fontAlgn="base" hangingPunct="0">
+              <a:spcBef>
+                <a:spcPct val="0"/>
+              </a:spcBef>
+              <a:spcAft>
+                <a:spcPct val="0"/>
+              </a:spcAft>
+              <a:tabLst>
+                <a:tab pos="457200" algn="l"/>
+              </a:tabLst>
+              <a:defRPr>
+                <a:solidFill>
+                  <a:schemeClr val="tx1"/>
+                </a:solidFill>
+                <a:latin typeface="Arial" panose="020B0604020202020204" pitchFamily="34" charset="0"/>
+              </a:defRPr>
+            </a:lvl2pPr>
+            <a:lvl3pPr eaLnBrk="0" fontAlgn="base" hangingPunct="0">
+              <a:spcBef>
+                <a:spcPct val="0"/>
+              </a:spcBef>
+              <a:spcAft>
+                <a:spcPct val="0"/>
+              </a:spcAft>
+              <a:tabLst>
+                <a:tab pos="457200" algn="l"/>
+              </a:tabLst>
+              <a:defRPr>
+                <a:solidFill>
+                  <a:schemeClr val="tx1"/>
+                </a:solidFill>
+                <a:latin typeface="Arial" panose="020B0604020202020204" pitchFamily="34" charset="0"/>
+              </a:defRPr>
+            </a:lvl3pPr>
+            <a:lvl4pPr eaLnBrk="0" fontAlgn="base" hangingPunct="0">
+              <a:spcBef>
+                <a:spcPct val="0"/>
+              </a:spcBef>
+              <a:spcAft>
+                <a:spcPct val="0"/>
+              </a:spcAft>
+              <a:tabLst>
+                <a:tab pos="457200" algn="l"/>
+              </a:tabLst>
+              <a:defRPr>
+                <a:solidFill>
+                  <a:schemeClr val="tx1"/>
+                </a:solidFill>
+                <a:latin typeface="Arial" panose="020B0604020202020204" pitchFamily="34" charset="0"/>
+              </a:defRPr>
+            </a:lvl4pPr>
+            <a:lvl5pPr eaLnBrk="0" fontAlgn="base" hangingPunct="0">
+              <a:spcBef>
+                <a:spcPct val="0"/>
+              </a:spcBef>
+              <a:spcAft>
+                <a:spcPct val="0"/>
+              </a:spcAft>
+              <a:tabLst>
+                <a:tab pos="457200" algn="l"/>
+              </a:tabLst>
+              <a:defRPr>
+                <a:solidFill>
+                  <a:schemeClr val="tx1"/>
+                </a:solidFill>
+                <a:latin typeface="Arial" panose="020B0604020202020204" pitchFamily="34" charset="0"/>
+              </a:defRPr>
+            </a:lvl5pPr>
+            <a:lvl6pPr eaLnBrk="0" fontAlgn="base" hangingPunct="0">
+              <a:spcBef>
+                <a:spcPct val="0"/>
+              </a:spcBef>
+              <a:spcAft>
+                <a:spcPct val="0"/>
+              </a:spcAft>
+              <a:tabLst>
+                <a:tab pos="457200" algn="l"/>
+              </a:tabLst>
+              <a:defRPr>
+                <a:solidFill>
+                  <a:schemeClr val="tx1"/>
+                </a:solidFill>
+                <a:latin typeface="Arial" panose="020B0604020202020204" pitchFamily="34" charset="0"/>
+              </a:defRPr>
+            </a:lvl6pPr>
+            <a:lvl7pPr eaLnBrk="0" fontAlgn="base" hangingPunct="0">
+              <a:spcBef>
+                <a:spcPct val="0"/>
+              </a:spcBef>
+              <a:spcAft>
+                <a:spcPct val="0"/>
+              </a:spcAft>
+              <a:tabLst>
+                <a:tab pos="457200" algn="l"/>
+              </a:tabLst>
+              <a:defRPr>
+                <a:solidFill>
+                  <a:schemeClr val="tx1"/>
+                </a:solidFill>
+                <a:latin typeface="Arial" panose="020B0604020202020204" pitchFamily="34" charset="0"/>
+              </a:defRPr>
+            </a:lvl7pPr>
+            <a:lvl8pPr eaLnBrk="0" fontAlgn="base" hangingPunct="0">
+              <a:spcBef>
+                <a:spcPct val="0"/>
+              </a:spcBef>
+              <a:spcAft>
+                <a:spcPct val="0"/>
+              </a:spcAft>
+              <a:tabLst>
+                <a:tab pos="457200" algn="l"/>
+              </a:tabLst>
+              <a:defRPr>
+                <a:solidFill>
+                  <a:schemeClr val="tx1"/>
+                </a:solidFill>
+                <a:latin typeface="Arial" panose="020B0604020202020204" pitchFamily="34" charset="0"/>
+              </a:defRPr>
+            </a:lvl8pPr>
+            <a:lvl9pPr eaLnBrk="0" fontAlgn="base" hangingPunct="0">
+              <a:spcBef>
+                <a:spcPct val="0"/>
+              </a:spcBef>
+              <a:spcAft>
+                <a:spcPct val="0"/>
+              </a:spcAft>
+              <a:tabLst>
+                <a:tab pos="457200" algn="l"/>
+              </a:tabLst>
+              <a:defRPr>
+                <a:solidFill>
+                  <a:schemeClr val="tx1"/>
+                </a:solidFill>
+                <a:latin typeface="Arial" panose="020B0604020202020204" pitchFamily="34" charset="0"/>
+              </a:defRPr>
+            </a:lvl9pPr>
+          </a:lstStyle>
+          <a:p>
+            <a:pPr marL="0" marR="0" lvl="0" indent="0" algn="l" defTabSz="914400" rtl="0" eaLnBrk="0" fontAlgn="base" latinLnBrk="0" hangingPunct="0">
+              <a:lnSpc>
+                <a:spcPct val="100000"/>
+              </a:lnSpc>
+              <a:spcBef>
+                <a:spcPct val="0"/>
+              </a:spcBef>
+              <a:spcAft>
+                <a:spcPct val="0"/>
+              </a:spcAft>
+              <a:buClrTx/>
+              <a:buSzTx/>
+              <a:buFontTx/>
+              <a:buChar char="•"/>
+              <a:tabLst>
+                <a:tab pos="457200" algn="l"/>
+              </a:tabLst>
+            </a:pPr>
+            <a:r>
+              <a:rPr kumimoji="0" lang="pt-BR" altLang="en-US" sz="1200" b="0" i="0" u="none" strike="noStrike" cap="none" normalizeH="0" baseline="0" dirty="0" smtClean="0">
+                <a:ln>
+                  <a:noFill/>
+                </a:ln>
+                <a:solidFill>
+                  <a:srgbClr val="1C1D1F"/>
+                </a:solidFill>
+                <a:effectLst/>
+                <a:latin typeface="Segoe UI" panose="020B0502040204020203" pitchFamily="34" charset="0"/>
+                <a:ea typeface="Times New Roman" panose="02020603050405020304" pitchFamily="18" charset="0"/>
+                <a:cs typeface="Segoe UI" panose="020B0502040204020203" pitchFamily="34" charset="0"/>
+              </a:rPr>
+              <a:t>Utilizar validação cruzada ao invés de dividir a base em porções para treinamento e teste</a:t>
+            </a:r>
+            <a:endParaRPr kumimoji="0" lang="en-US" altLang="en-US" sz="1200" b="0" i="0" u="none" strike="noStrike" cap="none" normalizeH="0" baseline="0" dirty="0" smtClean="0">
+              <a:ln>
+                <a:noFill/>
+              </a:ln>
+              <a:solidFill>
+                <a:schemeClr val="tx1"/>
+              </a:solidFill>
+              <a:effectLst/>
+              <a:ea typeface="Times New Roman" panose="02020603050405020304" pitchFamily="18" charset="0"/>
+            </a:endParaRPr>
+          </a:p>
+          <a:p>
+            <a:pPr marL="0" marR="0" lvl="0" indent="0" algn="l" defTabSz="914400" rtl="0" eaLnBrk="0" fontAlgn="base" latinLnBrk="0" hangingPunct="0">
+              <a:lnSpc>
+                <a:spcPct val="100000"/>
+              </a:lnSpc>
+              <a:spcBef>
+                <a:spcPct val="0"/>
+              </a:spcBef>
+              <a:spcAft>
+                <a:spcPct val="0"/>
+              </a:spcAft>
+              <a:buClrTx/>
+              <a:buSzTx/>
+              <a:buFontTx/>
+              <a:buChar char="•"/>
+              <a:tabLst>
+                <a:tab pos="457200" algn="l"/>
+              </a:tabLst>
+            </a:pPr>
+            <a:r>
+              <a:rPr kumimoji="0" lang="pt-BR" altLang="en-US" sz="1200" b="0" i="0" u="none" strike="noStrike" cap="none" normalizeH="0" baseline="0" dirty="0" smtClean="0">
+                <a:ln>
+                  <a:noFill/>
+                </a:ln>
+                <a:solidFill>
+                  <a:srgbClr val="1C1D1F"/>
+                </a:solidFill>
+                <a:effectLst/>
+                <a:latin typeface="Segoe UI" panose="020B0502040204020203" pitchFamily="34" charset="0"/>
+                <a:ea typeface="Times New Roman" panose="02020603050405020304" pitchFamily="18" charset="0"/>
+                <a:cs typeface="Segoe UI" panose="020B0502040204020203" pitchFamily="34" charset="0"/>
+              </a:rPr>
+              <a:t>Executar pelo menos 30 testes com cada algoritmo, utilizando o valor retornado pelo </a:t>
+            </a:r>
+            <a:r>
+              <a:rPr kumimoji="0" lang="pt-BR" altLang="en-US" sz="1300" b="0" i="0" u="none" strike="noStrike" cap="none" normalizeH="0" baseline="0" dirty="0" smtClean="0">
+                <a:ln>
+                  <a:noFill/>
+                </a:ln>
+                <a:solidFill>
+                  <a:srgbClr val="B4690E"/>
+                </a:solidFill>
+                <a:effectLst/>
+                <a:latin typeface="Consolas" panose="020B0609020204030204" pitchFamily="49" charset="0"/>
+                <a:ea typeface="Times New Roman" panose="02020603050405020304" pitchFamily="18" charset="0"/>
+                <a:cs typeface="Courier New" panose="02070309020205020404" pitchFamily="49" charset="0"/>
+              </a:rPr>
+              <a:t>score</a:t>
+            </a:r>
+            <a:r>
+              <a:rPr kumimoji="0" lang="pt-BR" altLang="en-US" sz="1200" b="0" i="0" u="none" strike="noStrike" cap="none" normalizeH="0" baseline="0" dirty="0" smtClean="0">
+                <a:ln>
+                  <a:noFill/>
+                </a:ln>
+                <a:solidFill>
+                  <a:srgbClr val="1C1D1F"/>
+                </a:solidFill>
+                <a:effectLst/>
+                <a:latin typeface="Segoe UI" panose="020B0502040204020203" pitchFamily="34" charset="0"/>
+                <a:ea typeface="Times New Roman" panose="02020603050405020304" pitchFamily="18" charset="0"/>
+                <a:cs typeface="Segoe UI" panose="020B0502040204020203" pitchFamily="34" charset="0"/>
+              </a:rPr>
+              <a:t> (opcionalmente você pode usar o </a:t>
+            </a:r>
+            <a:r>
+              <a:rPr kumimoji="0" lang="pt-BR" altLang="en-US" sz="1300" b="0" i="0" u="none" strike="noStrike" cap="none" normalizeH="0" baseline="0" dirty="0" err="1" smtClean="0">
+                <a:ln>
+                  <a:noFill/>
+                </a:ln>
+                <a:solidFill>
+                  <a:srgbClr val="B4690E"/>
+                </a:solidFill>
+                <a:effectLst/>
+                <a:latin typeface="Consolas" panose="020B0609020204030204" pitchFamily="49" charset="0"/>
+                <a:ea typeface="Times New Roman" panose="02020603050405020304" pitchFamily="18" charset="0"/>
+                <a:cs typeface="Courier New" panose="02070309020205020404" pitchFamily="49" charset="0"/>
+              </a:rPr>
+              <a:t>mean_absolute_error</a:t>
+            </a:r>
+            <a:r>
+              <a:rPr kumimoji="0" lang="pt-BR" altLang="en-US" sz="1200" b="0" i="0" u="none" strike="noStrike" cap="none" normalizeH="0" baseline="0" dirty="0" smtClean="0">
+                <a:ln>
+                  <a:noFill/>
+                </a:ln>
+                <a:solidFill>
+                  <a:srgbClr val="1C1D1F"/>
+                </a:solidFill>
+                <a:effectLst/>
+                <a:latin typeface="Segoe UI" panose="020B0502040204020203" pitchFamily="34" charset="0"/>
+                <a:ea typeface="Times New Roman" panose="02020603050405020304" pitchFamily="18" charset="0"/>
+                <a:cs typeface="Segoe UI" panose="020B0502040204020203" pitchFamily="34" charset="0"/>
+              </a:rPr>
+              <a:t>)</a:t>
+            </a:r>
+            <a:endParaRPr kumimoji="0" lang="en-US" altLang="en-US" sz="1200" b="0" i="0" u="none" strike="noStrike" cap="none" normalizeH="0" baseline="0" dirty="0" smtClean="0">
+              <a:ln>
+                <a:noFill/>
+              </a:ln>
+              <a:solidFill>
+                <a:schemeClr val="tx1"/>
+              </a:solidFill>
+              <a:effectLst/>
+              <a:ea typeface="Times New Roman" panose="02020603050405020304" pitchFamily="18" charset="0"/>
+            </a:endParaRPr>
+          </a:p>
+          <a:p>
+            <a:pPr marL="0" marR="0" lvl="0" indent="0" algn="l" defTabSz="914400" rtl="0" eaLnBrk="0" fontAlgn="base" latinLnBrk="0" hangingPunct="0">
+              <a:lnSpc>
+                <a:spcPct val="100000"/>
+              </a:lnSpc>
+              <a:spcBef>
+                <a:spcPct val="0"/>
+              </a:spcBef>
+              <a:spcAft>
+                <a:spcPct val="0"/>
+              </a:spcAft>
+              <a:buClrTx/>
+              <a:buSzTx/>
+              <a:buFontTx/>
+              <a:buChar char="•"/>
+              <a:tabLst>
+                <a:tab pos="457200" algn="l"/>
+              </a:tabLst>
+            </a:pPr>
+            <a:r>
+              <a:rPr kumimoji="0" lang="pt-BR" altLang="en-US" sz="1200" b="0" i="0" u="none" strike="noStrike" cap="none" normalizeH="0" baseline="0" dirty="0" smtClean="0">
+                <a:ln>
+                  <a:noFill/>
+                </a:ln>
+                <a:solidFill>
+                  <a:srgbClr val="1C1D1F"/>
+                </a:solidFill>
+                <a:effectLst/>
+                <a:latin typeface="Segoe UI" panose="020B0502040204020203" pitchFamily="34" charset="0"/>
+                <a:ea typeface="Times New Roman" panose="02020603050405020304" pitchFamily="18" charset="0"/>
+                <a:cs typeface="Segoe UI" panose="020B0502040204020203" pitchFamily="34" charset="0"/>
+              </a:rPr>
+              <a:t>Construir a planilha com os resultados, calculando a média dos 30 testes de cada algoritmo</a:t>
+            </a:r>
+            <a:endParaRPr kumimoji="0" lang="en-US" altLang="en-US" sz="1200" b="0" i="0" u="none" strike="noStrike" cap="none" normalizeH="0" baseline="0" dirty="0" smtClean="0">
+              <a:ln>
+                <a:noFill/>
+              </a:ln>
+              <a:solidFill>
+                <a:schemeClr val="tx1"/>
+              </a:solidFill>
+              <a:effectLst/>
+              <a:ea typeface="Times New Roman" panose="02020603050405020304" pitchFamily="18" charset="0"/>
+            </a:endParaRPr>
+          </a:p>
+          <a:p>
+            <a:pPr marL="0" marR="0" lvl="0" indent="0" algn="l" defTabSz="914400" rtl="0" eaLnBrk="0" fontAlgn="base" latinLnBrk="0" hangingPunct="0">
+              <a:lnSpc>
+                <a:spcPct val="100000"/>
+              </a:lnSpc>
+              <a:spcBef>
+                <a:spcPct val="0"/>
+              </a:spcBef>
+              <a:spcAft>
+                <a:spcPct val="0"/>
+              </a:spcAft>
+              <a:buClrTx/>
+              <a:buSzTx/>
+              <a:buFontTx/>
+              <a:buChar char="•"/>
+              <a:tabLst>
+                <a:tab pos="457200" algn="l"/>
+              </a:tabLst>
+            </a:pPr>
+            <a:r>
+              <a:rPr kumimoji="0" lang="pt-BR" altLang="en-US" sz="1200" b="0" i="0" u="none" strike="noStrike" cap="none" normalizeH="0" baseline="0" dirty="0" smtClean="0">
+                <a:ln>
+                  <a:noFill/>
+                </a:ln>
+                <a:solidFill>
+                  <a:srgbClr val="1C1D1F"/>
+                </a:solidFill>
+                <a:effectLst/>
+                <a:latin typeface="Segoe UI" panose="020B0502040204020203" pitchFamily="34" charset="0"/>
+                <a:ea typeface="Times New Roman" panose="02020603050405020304" pitchFamily="18" charset="0"/>
+                <a:cs typeface="Segoe UI" panose="020B0502040204020203" pitchFamily="34" charset="0"/>
+              </a:rPr>
+              <a:t>Fazer os testes de </a:t>
+            </a:r>
+            <a:r>
+              <a:rPr kumimoji="0" lang="pt-BR" altLang="en-US" sz="1200" b="0" i="0" u="none" strike="noStrike" cap="none" normalizeH="0" baseline="0" dirty="0" err="1" smtClean="0">
+                <a:ln>
+                  <a:noFill/>
+                </a:ln>
+                <a:solidFill>
+                  <a:srgbClr val="1C1D1F"/>
+                </a:solidFill>
+                <a:effectLst/>
+                <a:latin typeface="Segoe UI" panose="020B0502040204020203" pitchFamily="34" charset="0"/>
+                <a:ea typeface="Times New Roman" panose="02020603050405020304" pitchFamily="18" charset="0"/>
+                <a:cs typeface="Segoe UI" panose="020B0502040204020203" pitchFamily="34" charset="0"/>
+              </a:rPr>
+              <a:t>Friedmann</a:t>
+            </a:r>
+            <a:r>
+              <a:rPr kumimoji="0" lang="pt-BR" altLang="en-US" sz="1200" b="0" i="0" u="none" strike="noStrike" cap="none" normalizeH="0" baseline="0" dirty="0" smtClean="0">
+                <a:ln>
+                  <a:noFill/>
+                </a:ln>
+                <a:solidFill>
+                  <a:srgbClr val="1C1D1F"/>
+                </a:solidFill>
+                <a:effectLst/>
+                <a:latin typeface="Segoe UI" panose="020B0502040204020203" pitchFamily="34" charset="0"/>
+                <a:ea typeface="Times New Roman" panose="02020603050405020304" pitchFamily="18" charset="0"/>
+                <a:cs typeface="Segoe UI" panose="020B0502040204020203" pitchFamily="34" charset="0"/>
+              </a:rPr>
+              <a:t> e </a:t>
+            </a:r>
+            <a:r>
+              <a:rPr kumimoji="0" lang="pt-BR" altLang="en-US" sz="1200" b="0" i="0" u="none" strike="noStrike" cap="none" normalizeH="0" baseline="0" dirty="0" err="1" smtClean="0">
+                <a:ln>
+                  <a:noFill/>
+                </a:ln>
+                <a:solidFill>
+                  <a:srgbClr val="1C1D1F"/>
+                </a:solidFill>
+                <a:effectLst/>
+                <a:latin typeface="Segoe UI" panose="020B0502040204020203" pitchFamily="34" charset="0"/>
+                <a:ea typeface="Times New Roman" panose="02020603050405020304" pitchFamily="18" charset="0"/>
+                <a:cs typeface="Segoe UI" panose="020B0502040204020203" pitchFamily="34" charset="0"/>
+              </a:rPr>
+              <a:t>Nemenyi</a:t>
+            </a:r>
+            <a:r>
+              <a:rPr kumimoji="0" lang="pt-BR" altLang="en-US" sz="1200" b="0" i="0" u="none" strike="noStrike" cap="none" normalizeH="0" baseline="0" dirty="0" smtClean="0">
+                <a:ln>
+                  <a:noFill/>
+                </a:ln>
+                <a:solidFill>
+                  <a:srgbClr val="1C1D1F"/>
+                </a:solidFill>
+                <a:effectLst/>
+                <a:latin typeface="Segoe UI" panose="020B0502040204020203" pitchFamily="34" charset="0"/>
+                <a:ea typeface="Times New Roman" panose="02020603050405020304" pitchFamily="18" charset="0"/>
+                <a:cs typeface="Segoe UI" panose="020B0502040204020203" pitchFamily="34" charset="0"/>
+              </a:rPr>
+              <a:t> para verificar se existe diferença estatística significativa entre os resultados </a:t>
+            </a:r>
+            <a:endParaRPr kumimoji="0" lang="en-US" altLang="en-US" sz="1200" b="0" i="0" u="none" strike="noStrike" cap="none" normalizeH="0" baseline="0" dirty="0" smtClean="0">
+              <a:ln>
+                <a:noFill/>
+              </a:ln>
+              <a:solidFill>
+                <a:schemeClr val="tx1"/>
+              </a:solidFill>
+              <a:effectLst/>
+              <a:ea typeface="Times New Roman" panose="02020603050405020304" pitchFamily="18" charset="0"/>
+            </a:endParaRPr>
+          </a:p>
+          <a:p>
+            <a:pPr marL="0" marR="0" lvl="0" indent="0" algn="l" defTabSz="914400" rtl="0" eaLnBrk="0" fontAlgn="base" latinLnBrk="0" hangingPunct="0">
+              <a:lnSpc>
+                <a:spcPct val="100000"/>
+              </a:lnSpc>
+              <a:spcBef>
+                <a:spcPct val="0"/>
+              </a:spcBef>
+              <a:spcAft>
+                <a:spcPct val="0"/>
+              </a:spcAft>
+              <a:buClrTx/>
+              <a:buSzTx/>
+              <a:buFontTx/>
+              <a:buNone/>
+              <a:tabLst>
+                <a:tab pos="457200" algn="l"/>
+              </a:tabLst>
+            </a:pPr>
+            <a:r>
+              <a:rPr kumimoji="0" lang="pt-BR" altLang="en-US" sz="1200" b="0" i="0" u="none" strike="noStrike" cap="none" normalizeH="0" baseline="0" dirty="0" smtClean="0">
+                <a:ln>
+                  <a:noFill/>
+                </a:ln>
+                <a:solidFill>
+                  <a:srgbClr val="1C1D1F"/>
+                </a:solidFill>
+                <a:effectLst/>
+                <a:latin typeface="Segoe UI" panose="020B0502040204020203" pitchFamily="34" charset="0"/>
+                <a:ea typeface="Times New Roman" panose="02020603050405020304" pitchFamily="18" charset="0"/>
+                <a:cs typeface="Segoe UI" panose="020B0502040204020203" pitchFamily="34" charset="0"/>
+                <a:hlinkClick r:id="rId2"/>
+              </a:rPr>
+              <a:t>https://sites.google.com/view/vinegarhill-datalabs/introduction-to-machine-learning/random-forest-and-ols</a:t>
+            </a:r>
+            <a:r>
+              <a:rPr kumimoji="0" lang="pt-BR" altLang="en-US" sz="1200" b="0" i="0" u="none" strike="noStrike" cap="none" normalizeH="0" baseline="0" dirty="0" smtClean="0">
+                <a:ln>
+                  <a:noFill/>
+                </a:ln>
+                <a:solidFill>
+                  <a:srgbClr val="1C1D1F"/>
+                </a:solidFill>
+                <a:effectLst/>
+                <a:latin typeface="Segoe UI" panose="020B0502040204020203" pitchFamily="34" charset="0"/>
+                <a:ea typeface="Times New Roman" panose="02020603050405020304" pitchFamily="18" charset="0"/>
+                <a:cs typeface="Segoe UI" panose="020B0502040204020203" pitchFamily="34" charset="0"/>
+              </a:rPr>
+              <a:t> </a:t>
+            </a:r>
+            <a:endParaRPr kumimoji="0" lang="pt-BR" altLang="en-US" sz="1800" b="0" i="0" u="none" strike="noStrike" cap="none" normalizeH="0" baseline="0" dirty="0" smtClean="0">
+              <a:ln>
+                <a:noFill/>
+              </a:ln>
+              <a:solidFill>
+                <a:schemeClr val="tx1"/>
+              </a:solidFill>
+              <a:effectLst/>
+              <a:latin typeface="Arial" panose="020B0604020202020204" pitchFamily="34" charset="0"/>
+            </a:endParaRPr>
+          </a:p>
+        </p:txBody>
+      </p:sp>
+    </p:spTree>
+    <p:extLst>
+      <p:ext uri="{BB962C8B-B14F-4D97-AF65-F5344CB8AC3E}">
+        <p14:creationId xmlns:p14="http://schemas.microsoft.com/office/powerpoint/2010/main" val="3632156721"/>
       </p:ext>
     </p:extLst>
   </p:cSld>
@@ -8038,88 +9080,231 @@
           <a:bodyPr rtlCol="0" anchor="ctr"/>
           <a:lstStyle/>
           <a:p>
+            <a:pPr marL="342900" indent="-342900">
+              <a:buFont typeface="+mj-lt"/>
+              <a:buAutoNum type="arabicPeriod"/>
+            </a:pPr>
+            <a:r>
+              <a:rPr lang="en-US" sz="1400" dirty="0">
+                <a:solidFill>
+                  <a:schemeClr val="tx1"/>
+                </a:solidFill>
+              </a:rPr>
+              <a:t>Linear </a:t>
+            </a:r>
+            <a:r>
+              <a:rPr lang="en-US" sz="1400" dirty="0" smtClean="0">
+                <a:solidFill>
+                  <a:schemeClr val="tx1"/>
+                </a:solidFill>
+              </a:rPr>
+              <a:t>Regression</a:t>
+            </a:r>
+          </a:p>
+          <a:p>
+            <a:pPr marL="342900" indent="-342900">
+              <a:buFont typeface="+mj-lt"/>
+              <a:buAutoNum type="arabicPeriod"/>
+            </a:pPr>
+            <a:r>
+              <a:rPr lang="en-US" sz="1400" dirty="0" smtClean="0">
+                <a:solidFill>
+                  <a:schemeClr val="tx1"/>
+                </a:solidFill>
+              </a:rPr>
+              <a:t>Polynomial Regression</a:t>
+            </a:r>
+            <a:endParaRPr lang="en-US" sz="1400" dirty="0">
+              <a:solidFill>
+                <a:schemeClr val="tx1"/>
+              </a:solidFill>
+            </a:endParaRPr>
+          </a:p>
+          <a:p>
+            <a:pPr marL="342900" indent="-342900">
+              <a:buFont typeface="+mj-lt"/>
+              <a:buAutoNum type="arabicPeriod"/>
+            </a:pPr>
+            <a:r>
+              <a:rPr lang="en-US" sz="1400" dirty="0">
+                <a:solidFill>
+                  <a:schemeClr val="tx1"/>
+                </a:solidFill>
+              </a:rPr>
+              <a:t>Lasso Regression</a:t>
+            </a:r>
+          </a:p>
+          <a:p>
+            <a:pPr marL="342900" indent="-342900">
+              <a:buFont typeface="+mj-lt"/>
+              <a:buAutoNum type="arabicPeriod"/>
+            </a:pPr>
+            <a:r>
+              <a:rPr lang="en-US" sz="1400" dirty="0">
+                <a:solidFill>
+                  <a:schemeClr val="tx1"/>
+                </a:solidFill>
+              </a:rPr>
+              <a:t>Ridge Regression</a:t>
+            </a:r>
+          </a:p>
+          <a:p>
+            <a:pPr marL="342900" indent="-342900">
+              <a:buFont typeface="+mj-lt"/>
+              <a:buAutoNum type="arabicPeriod"/>
+            </a:pPr>
+            <a:r>
+              <a:rPr lang="en-US" sz="1400" dirty="0" smtClean="0">
+                <a:solidFill>
+                  <a:schemeClr val="tx1"/>
+                </a:solidFill>
+              </a:rPr>
+              <a:t>Support </a:t>
+            </a:r>
+            <a:r>
+              <a:rPr lang="en-US" sz="1400" dirty="0">
+                <a:solidFill>
+                  <a:schemeClr val="tx1"/>
+                </a:solidFill>
+              </a:rPr>
+              <a:t>vector R</a:t>
+            </a:r>
+            <a:r>
+              <a:rPr lang="en-US" sz="1400" dirty="0" smtClean="0">
+                <a:solidFill>
+                  <a:schemeClr val="tx1"/>
+                </a:solidFill>
+              </a:rPr>
+              <a:t>egression</a:t>
+            </a:r>
+          </a:p>
+          <a:p>
+            <a:pPr marL="342900" indent="-342900">
+              <a:buFont typeface="+mj-lt"/>
+              <a:buAutoNum type="arabicPeriod"/>
+            </a:pPr>
+            <a:r>
+              <a:rPr lang="en-US" sz="1400" dirty="0">
+                <a:solidFill>
+                  <a:schemeClr val="tx1"/>
+                </a:solidFill>
+              </a:rPr>
+              <a:t>Nearest Neighbors R</a:t>
+            </a:r>
+            <a:r>
+              <a:rPr lang="en-US" sz="1400" dirty="0" smtClean="0">
+                <a:solidFill>
+                  <a:schemeClr val="tx1"/>
+                </a:solidFill>
+              </a:rPr>
+              <a:t>egression</a:t>
+            </a:r>
+            <a:endParaRPr lang="en-US" sz="1400" dirty="0">
+              <a:solidFill>
+                <a:schemeClr val="tx1"/>
+              </a:solidFill>
+            </a:endParaRPr>
+          </a:p>
+          <a:p>
+            <a:pPr marL="342900" indent="-342900">
+              <a:buFont typeface="+mj-lt"/>
+              <a:buAutoNum type="arabicPeriod"/>
+            </a:pPr>
+            <a:r>
+              <a:rPr lang="en-US" sz="1400" dirty="0">
+                <a:solidFill>
+                  <a:schemeClr val="tx1"/>
+                </a:solidFill>
+              </a:rPr>
+              <a:t>Decision </a:t>
+            </a:r>
+            <a:r>
+              <a:rPr lang="en-US" sz="1400" dirty="0" smtClean="0">
+                <a:solidFill>
+                  <a:schemeClr val="tx1"/>
+                </a:solidFill>
+              </a:rPr>
+              <a:t>tree</a:t>
+            </a:r>
+          </a:p>
+          <a:p>
+            <a:pPr marL="342900" indent="-342900">
+              <a:buFont typeface="+mj-lt"/>
+              <a:buAutoNum type="arabicPeriod"/>
+            </a:pPr>
+            <a:r>
+              <a:rPr lang="en-US" sz="1400" dirty="0">
+                <a:solidFill>
+                  <a:schemeClr val="tx1"/>
+                </a:solidFill>
+              </a:rPr>
+              <a:t>Random Forest</a:t>
+            </a:r>
+          </a:p>
+          <a:p>
+            <a:pPr marL="342900" indent="-342900">
+              <a:buFont typeface="+mj-lt"/>
+              <a:buAutoNum type="arabicPeriod"/>
+            </a:pPr>
+            <a:r>
+              <a:rPr lang="en-US" sz="1400" dirty="0">
+                <a:solidFill>
+                  <a:schemeClr val="tx1"/>
+                </a:solidFill>
+              </a:rPr>
+              <a:t>Extreme </a:t>
+            </a:r>
+            <a:r>
+              <a:rPr lang="en-US" sz="1400" dirty="0" smtClean="0">
+                <a:solidFill>
+                  <a:schemeClr val="tx1"/>
+                </a:solidFill>
+              </a:rPr>
+              <a:t> Gradient Boosting </a:t>
+            </a:r>
+            <a:r>
+              <a:rPr lang="en-US" sz="1400" dirty="0">
+                <a:solidFill>
+                  <a:schemeClr val="tx1"/>
+                </a:solidFill>
+              </a:rPr>
+              <a:t>(XGBoost)</a:t>
+            </a:r>
+            <a:endParaRPr lang="en-US" sz="1400" dirty="0" smtClean="0">
+              <a:solidFill>
+                <a:schemeClr val="tx1"/>
+              </a:solidFill>
+            </a:endParaRPr>
+          </a:p>
+          <a:p>
+            <a:pPr marL="342900" indent="-342900">
+              <a:buFont typeface="+mj-lt"/>
+              <a:buAutoNum type="arabicPeriod"/>
+            </a:pPr>
+            <a:r>
+              <a:rPr lang="en-US" sz="1400" dirty="0" smtClean="0">
+                <a:solidFill>
+                  <a:schemeClr val="tx1"/>
+                </a:solidFill>
+              </a:rPr>
+              <a:t>Neural Network</a:t>
+            </a:r>
+            <a:endParaRPr lang="en-US" sz="1400" dirty="0">
+              <a:solidFill>
+                <a:schemeClr val="tx1"/>
+              </a:solidFill>
+            </a:endParaRPr>
+          </a:p>
+          <a:p>
             <a:pPr marL="285750" indent="-285750">
               <a:buFont typeface="Arial" panose="020B0604020202020204" pitchFamily="34" charset="0"/>
               <a:buChar char="•"/>
             </a:pPr>
-            <a:r>
-              <a:rPr lang="en-US" sz="1600" dirty="0">
-                <a:solidFill>
-                  <a:schemeClr val="tx1"/>
-                </a:solidFill>
-              </a:rPr>
-              <a:t>Linear Regression</a:t>
-            </a:r>
-          </a:p>
-          <a:p>
-            <a:pPr marL="285750" indent="-285750">
-              <a:buFont typeface="Arial" panose="020B0604020202020204" pitchFamily="34" charset="0"/>
-              <a:buChar char="•"/>
-            </a:pPr>
-            <a:r>
-              <a:rPr lang="en-US" sz="1600" dirty="0">
-                <a:solidFill>
-                  <a:schemeClr val="tx1"/>
-                </a:solidFill>
-              </a:rPr>
-              <a:t>Lasso Regression</a:t>
-            </a:r>
-          </a:p>
-          <a:p>
-            <a:pPr marL="285750" indent="-285750">
-              <a:buFont typeface="Arial" panose="020B0604020202020204" pitchFamily="34" charset="0"/>
-              <a:buChar char="•"/>
-            </a:pPr>
-            <a:r>
-              <a:rPr lang="en-US" sz="1600" dirty="0">
-                <a:solidFill>
-                  <a:schemeClr val="tx1"/>
-                </a:solidFill>
-              </a:rPr>
-              <a:t>Ridge Regression</a:t>
-            </a:r>
-          </a:p>
-          <a:p>
-            <a:pPr marL="285750" indent="-285750">
-              <a:buFont typeface="Arial" panose="020B0604020202020204" pitchFamily="34" charset="0"/>
-              <a:buChar char="•"/>
-            </a:pPr>
-            <a:r>
-              <a:rPr lang="en-US" sz="1600" dirty="0">
-                <a:solidFill>
-                  <a:schemeClr val="tx1"/>
-                </a:solidFill>
-              </a:rPr>
-              <a:t>Neural Network</a:t>
-            </a:r>
-          </a:p>
-          <a:p>
-            <a:pPr marL="285750" indent="-285750">
-              <a:buFont typeface="Arial" panose="020B0604020202020204" pitchFamily="34" charset="0"/>
-              <a:buChar char="•"/>
-            </a:pPr>
-            <a:r>
-              <a:rPr lang="en-US" sz="1600" dirty="0">
-                <a:solidFill>
-                  <a:schemeClr val="tx1"/>
-                </a:solidFill>
-              </a:rPr>
-              <a:t>Support vector regression</a:t>
-            </a:r>
-          </a:p>
-          <a:p>
-            <a:pPr marL="285750" indent="-285750">
-              <a:buFont typeface="Arial" panose="020B0604020202020204" pitchFamily="34" charset="0"/>
-              <a:buChar char="•"/>
-            </a:pPr>
-            <a:r>
-              <a:rPr lang="en-US" sz="1600" dirty="0">
-                <a:solidFill>
-                  <a:schemeClr val="tx1"/>
-                </a:solidFill>
-              </a:rPr>
-              <a:t>Decision tree</a:t>
-            </a:r>
+            <a:endParaRPr lang="en-US" sz="1400" dirty="0">
+              <a:solidFill>
+                <a:schemeClr val="tx1"/>
+              </a:solidFill>
+            </a:endParaRPr>
           </a:p>
         </p:txBody>
       </p:sp>
@@ -8166,12 +9351,12 @@
           <a:bodyPr rtlCol="0" anchor="ctr"/>
           <a:lstStyle/>
           <a:p>
-            <a:pPr marL="285750" indent="-285750">
-              <a:buFont typeface="Arial" panose="020B0604020202020204" pitchFamily="34" charset="0"/>
-              <a:buChar char="•"/>
-            </a:pPr>
-            <a:r>
-              <a:rPr lang="en-US" sz="1600" dirty="0">
+            <a:pPr marL="342900" indent="-342900">
+              <a:buFont typeface="+mj-lt"/>
+              <a:buAutoNum type="arabicPeriod"/>
+            </a:pPr>
+            <a:r>
+              <a:rPr lang="en-US" sz="1400" dirty="0">
                 <a:solidFill>
                   <a:schemeClr val="tx1"/>
                 </a:solidFill>
@@ -8180,12 +9365,12 @@
             </a:r>
           </a:p>
           <a:p>
-            <a:pPr marL="285750" indent="-285750">
-              <a:buFont typeface="Arial" panose="020B0604020202020204" pitchFamily="34" charset="0"/>
-              <a:buChar char="•"/>
-            </a:pPr>
-            <a:r>
-              <a:rPr lang="en-US" sz="1600" dirty="0">
+            <a:pPr marL="342900" indent="-342900">
+              <a:buFont typeface="+mj-lt"/>
+              <a:buAutoNum type="arabicPeriod"/>
+            </a:pPr>
+            <a:r>
+              <a:rPr lang="en-US" sz="1400" dirty="0">
                 <a:solidFill>
                   <a:schemeClr val="tx1"/>
                 </a:solidFill>
@@ -8194,12 +9379,12 @@
             </a:r>
           </a:p>
           <a:p>
-            <a:pPr marL="285750" indent="-285750">
-              <a:buFont typeface="Arial" panose="020B0604020202020204" pitchFamily="34" charset="0"/>
-              <a:buChar char="•"/>
-            </a:pPr>
-            <a:r>
-              <a:rPr lang="en-US" sz="1600" dirty="0">
+            <a:pPr marL="342900" indent="-342900">
+              <a:buFont typeface="+mj-lt"/>
+              <a:buAutoNum type="arabicPeriod"/>
+            </a:pPr>
+            <a:r>
+              <a:rPr lang="en-US" sz="1400" dirty="0">
                 <a:solidFill>
                   <a:schemeClr val="tx1"/>
                 </a:solidFill>
@@ -8207,7 +9392,7 @@
               <a:t>Decision</a:t>
             </a:r>
             <a:r>
-              <a:rPr lang="pt-BR" sz="1600" dirty="0">
+              <a:rPr lang="pt-BR" sz="1400" dirty="0">
                 <a:solidFill>
                   <a:schemeClr val="tx1"/>
                 </a:solidFill>
@@ -8215,7 +9400,7 @@
               <a:t> </a:t>
             </a:r>
             <a:r>
-              <a:rPr lang="en-US" sz="1600" dirty="0">
+              <a:rPr lang="en-US" sz="1400" dirty="0">
                 <a:solidFill>
                   <a:schemeClr val="tx1"/>
                 </a:solidFill>
@@ -8224,12 +9409,12 @@
             </a:r>
           </a:p>
           <a:p>
-            <a:pPr marL="285750" indent="-285750">
-              <a:buFont typeface="Arial" panose="020B0604020202020204" pitchFamily="34" charset="0"/>
-              <a:buChar char="•"/>
-            </a:pPr>
-            <a:r>
-              <a:rPr lang="en-US" sz="1600" dirty="0">
+            <a:pPr marL="342900" indent="-342900">
+              <a:buFont typeface="+mj-lt"/>
+              <a:buAutoNum type="arabicPeriod"/>
+            </a:pPr>
+            <a:r>
+              <a:rPr lang="en-US" sz="1400" dirty="0">
                 <a:solidFill>
                   <a:schemeClr val="tx1"/>
                 </a:solidFill>
@@ -8238,12 +9423,72 @@
             </a:r>
           </a:p>
           <a:p>
-            <a:pPr marL="285750" indent="-285750">
-              <a:buFont typeface="Arial" panose="020B0604020202020204" pitchFamily="34" charset="0"/>
-              <a:buChar char="•"/>
-            </a:pPr>
-            <a:r>
-              <a:rPr lang="en-US" sz="1600" dirty="0">
+            <a:pPr marL="342900" indent="-342900">
+              <a:buFont typeface="+mj-lt"/>
+              <a:buAutoNum type="arabicPeriod"/>
+            </a:pPr>
+            <a:r>
+              <a:rPr lang="en-US" sz="1400" dirty="0" smtClean="0">
+                <a:solidFill>
+                  <a:schemeClr val="tx1"/>
+                </a:solidFill>
+              </a:rPr>
+              <a:t>K-Nearest </a:t>
+            </a:r>
+            <a:r>
+              <a:rPr lang="en-US" sz="1400" dirty="0" smtClean="0">
+                <a:solidFill>
+                  <a:schemeClr val="tx1"/>
+                </a:solidFill>
+              </a:rPr>
+              <a:t>Neighbors(</a:t>
+            </a:r>
+            <a:r>
+              <a:rPr lang="en-US" sz="1400" dirty="0" err="1" smtClean="0">
+                <a:solidFill>
+                  <a:schemeClr val="tx1"/>
+                </a:solidFill>
+              </a:rPr>
+              <a:t>knn</a:t>
+            </a:r>
+            <a:r>
+              <a:rPr lang="en-US" sz="1400" dirty="0" smtClean="0">
+                <a:solidFill>
+                  <a:schemeClr val="tx1"/>
+                </a:solidFill>
+              </a:rPr>
+              <a:t>)</a:t>
+            </a:r>
+          </a:p>
+          <a:p>
+            <a:pPr marL="342900" indent="-342900">
+              <a:buFont typeface="+mj-lt"/>
+              <a:buAutoNum type="arabicPeriod"/>
+            </a:pPr>
+            <a:r>
+              <a:rPr lang="en-US" sz="1400" dirty="0">
+                <a:solidFill>
+                  <a:schemeClr val="tx1"/>
+                </a:solidFill>
+              </a:rPr>
+              <a:t>Neural </a:t>
+            </a:r>
+            <a:r>
+              <a:rPr lang="en-US" sz="1400" dirty="0" smtClean="0">
+                <a:solidFill>
+                  <a:schemeClr val="tx1"/>
+                </a:solidFill>
+              </a:rPr>
+              <a:t>Network</a:t>
+            </a:r>
+          </a:p>
+          <a:p>
+            <a:pPr marL="342900" indent="-342900">
+              <a:buFont typeface="+mj-lt"/>
+              <a:buAutoNum type="arabicPeriod"/>
+            </a:pPr>
+            <a:r>
+              <a:rPr lang="en-US" sz="1400" dirty="0">
                 <a:solidFill>
                   <a:schemeClr val="tx1"/>
                 </a:solidFill>
@@ -8252,18 +9497,15 @@
             </a:r>
           </a:p>
           <a:p>
-            <a:pPr marL="285750" indent="-285750">
-              <a:buFont typeface="Arial" panose="020B0604020202020204" pitchFamily="34" charset="0"/>
-              <a:buChar char="•"/>
-            </a:pPr>
-            <a:r>
-              <a:rPr lang="en-US" sz="1600" dirty="0">
-                <a:solidFill>
-                  <a:schemeClr val="tx1"/>
-                </a:solidFill>
-              </a:rPr>
-              <a:t>K-Nearest Neighbors</a:t>
-            </a:r>
+            <a:pPr marL="342900" indent="-342900">
+              <a:buFont typeface="+mj-lt"/>
+              <a:buAutoNum type="arabicPeriod"/>
+            </a:pPr>
+            <a:endParaRPr lang="en-US" sz="1400" dirty="0">
+              <a:solidFill>
+                <a:schemeClr val="tx1"/>
+              </a:solidFill>
+            </a:endParaRPr>
           </a:p>
         </p:txBody>
       </p:sp>
@@ -8315,7 +9557,7 @@
               <a:buChar char="•"/>
             </a:pPr>
             <a:r>
-              <a:rPr lang="en-US" sz="1600" dirty="0">
+              <a:rPr lang="en-US" sz="1400" dirty="0">
                 <a:solidFill>
                   <a:schemeClr val="tx1"/>
                 </a:solidFill>
@@ -8329,7 +9571,7 @@
               <a:buChar char="•"/>
             </a:pPr>
             <a:r>
-              <a:rPr lang="en-US" sz="1600" dirty="0">
+              <a:rPr lang="en-US" sz="1400" dirty="0">
                 <a:solidFill>
                   <a:schemeClr val="tx1"/>
                 </a:solidFill>
@@ -8337,7 +9579,7 @@
               <a:t>Mean</a:t>
             </a:r>
             <a:r>
-              <a:rPr lang="pt-BR" sz="1600" dirty="0">
+              <a:rPr lang="pt-BR" sz="1400" dirty="0">
                 <a:solidFill>
                   <a:schemeClr val="tx1"/>
                 </a:solidFill>
@@ -8351,7 +9593,7 @@
               <a:buChar char="•"/>
             </a:pPr>
             <a:r>
-              <a:rPr lang="pt-BR" sz="1600" dirty="0">
+              <a:rPr lang="pt-BR" sz="1400" dirty="0">
                 <a:solidFill>
                   <a:schemeClr val="tx1"/>
                 </a:solidFill>
@@ -8365,7 +9607,7 @@
               <a:buChar char="•"/>
             </a:pPr>
             <a:r>
-              <a:rPr lang="en-US" sz="1600" dirty="0">
+              <a:rPr lang="en-US" sz="1400" dirty="0">
                 <a:solidFill>
                   <a:schemeClr val="tx1"/>
                 </a:solidFill>
@@ -8373,7 +9615,7 @@
               <a:t>Agglomerative</a:t>
             </a:r>
             <a:r>
-              <a:rPr lang="pt-BR" sz="1600" dirty="0">
+              <a:rPr lang="pt-BR" sz="1400" dirty="0">
                 <a:solidFill>
                   <a:schemeClr val="tx1"/>
                 </a:solidFill>
@@ -8381,7 +9623,7 @@
               <a:t> </a:t>
             </a:r>
             <a:r>
-              <a:rPr lang="en-US" sz="1600" dirty="0">
+              <a:rPr lang="en-US" sz="1400" dirty="0">
                 <a:solidFill>
                   <a:schemeClr val="tx1"/>
                 </a:solidFill>
@@ -8395,7 +9637,7 @@
               <a:buChar char="•"/>
             </a:pPr>
             <a:r>
-              <a:rPr lang="en-US" sz="1600" dirty="0">
+              <a:rPr lang="en-US" sz="1400" dirty="0">
                 <a:solidFill>
                   <a:schemeClr val="tx1"/>
                 </a:solidFill>
@@ -8409,20 +9651,12 @@
               <a:buChar char="•"/>
             </a:pPr>
             <a:r>
-              <a:rPr lang="en-US" sz="1600" dirty="0" err="1">
-                <a:solidFill>
-                  <a:schemeClr val="tx1"/>
-                </a:solidFill>
-              </a:rPr>
-              <a:t>Lantent</a:t>
-            </a:r>
-            <a:r>
-              <a:rPr lang="en-US" sz="1600" dirty="0">
-                <a:solidFill>
-                  <a:schemeClr val="tx1"/>
-                </a:solidFill>
-              </a:rPr>
-              <a:t> Dirichlet analysis</a:t>
+              <a:rPr lang="en-US" sz="1400" dirty="0">
+                <a:solidFill>
+                  <a:schemeClr val="tx1"/>
+                </a:solidFill>
+              </a:rPr>
+              <a:t>Lantent Dirichlet analysis</a:t>
             </a:r>
           </a:p>
           <a:p>
@@ -8431,7 +9665,7 @@
               <a:buChar char="•"/>
             </a:pPr>
             <a:r>
-              <a:rPr lang="en-US" sz="1600" dirty="0">
+              <a:rPr lang="en-US" sz="1400" dirty="0">
                 <a:solidFill>
                   <a:schemeClr val="tx1"/>
                 </a:solidFill>
@@ -8445,7 +9679,7 @@
               <a:buChar char="•"/>
             </a:pPr>
             <a:r>
-              <a:rPr lang="en-US" sz="1600" dirty="0">
+              <a:rPr lang="en-US" sz="1400" dirty="0">
                 <a:solidFill>
                   <a:schemeClr val="tx1"/>
                 </a:solidFill>
@@ -8458,7 +9692,7 @@
               <a:buFont typeface="Arial" panose="020B0604020202020204" pitchFamily="34" charset="0"/>
               <a:buChar char="•"/>
             </a:pPr>
-            <a:endParaRPr lang="en-US" sz="1600" dirty="0">
+            <a:endParaRPr lang="en-US" sz="1400" dirty="0">
               <a:solidFill>
                 <a:schemeClr val="tx1"/>
               </a:solidFill>
@@ -8514,7 +9748,7 @@
               <a:buChar char="•"/>
             </a:pPr>
             <a:r>
-              <a:rPr lang="en-US" sz="1600" dirty="0">
+              <a:rPr lang="en-US" sz="1400" dirty="0">
                 <a:solidFill>
                   <a:schemeClr val="tx1"/>
                 </a:solidFill>
@@ -8528,7 +9762,7 @@
               <a:buChar char="•"/>
             </a:pPr>
             <a:r>
-              <a:rPr lang="pt-BR" sz="1600" dirty="0">
+              <a:rPr lang="pt-BR" sz="1400" dirty="0">
                 <a:solidFill>
                   <a:schemeClr val="tx1"/>
                 </a:solidFill>
@@ -8542,7 +9776,7 @@
               <a:buChar char="•"/>
             </a:pPr>
             <a:r>
-              <a:rPr lang="pt-BR" sz="1600" dirty="0">
+              <a:rPr lang="pt-BR" sz="1400" dirty="0">
                 <a:solidFill>
                   <a:schemeClr val="tx1"/>
                 </a:solidFill>
@@ -8556,7 +9790,7 @@
               <a:buChar char="•"/>
             </a:pPr>
             <a:r>
-              <a:rPr lang="pt-BR" sz="1600" dirty="0">
+              <a:rPr lang="pt-BR" sz="1400" dirty="0">
                 <a:solidFill>
                   <a:schemeClr val="tx1"/>
                 </a:solidFill>
@@ -8570,7 +9804,7 @@
               <a:buChar char="•"/>
             </a:pPr>
             <a:r>
-              <a:rPr lang="pt-BR" sz="1600" dirty="0">
+              <a:rPr lang="pt-BR" sz="1400" dirty="0">
                 <a:solidFill>
                   <a:schemeClr val="tx1"/>
                 </a:solidFill>
@@ -8583,7 +9817,7 @@
               <a:buFont typeface="Arial" panose="020B0604020202020204" pitchFamily="34" charset="0"/>
               <a:buChar char="•"/>
             </a:pPr>
-            <a:endParaRPr lang="en-US" sz="1600" dirty="0">
+            <a:endParaRPr lang="en-US" sz="1400" dirty="0">
               <a:solidFill>
                 <a:schemeClr val="tx1"/>
               </a:solidFill>
@@ -8929,14 +10163,14 @@
         </p:nvSpPr>
         <p:spPr>
           <a:xfrm>
-            <a:off x="4554583" y="409303"/>
-            <a:ext cx="3143794" cy="478972"/>
+            <a:off x="792479" y="592182"/>
+            <a:ext cx="10746378" cy="5712824"/>
           </a:xfrm>
           <a:prstGeom prst="rect">
             <a:avLst/>
           </a:prstGeom>
           <a:solidFill>
-            <a:schemeClr val="bg2"/>
+            <a:srgbClr val="DE6F6C"/>
           </a:solidFill>
           <a:ln>
             <a:solidFill>
@@ -8966,342 +10200,25 @@
           <a:p>
             <a:pPr algn="ctr"/>
             <a:r>
-              <a:rPr lang="en-US" dirty="0">
-                <a:solidFill>
-                  <a:schemeClr val="tx1"/>
-                </a:solidFill>
-              </a:rPr>
-              <a:t>Machine Learning</a:t>
-            </a:r>
-          </a:p>
-        </p:txBody>
-      </p:sp>
-      <p:sp>
-        <p:nvSpPr>
-          <p:cNvPr id="3" name="TextBox 2">
-            <a:extLst>
-              <a:ext uri="{FF2B5EF4-FFF2-40B4-BE49-F238E27FC236}">
-                <a16:creationId xmlns:a16="http://schemas.microsoft.com/office/drawing/2014/main" id="{5011653A-7E7E-1045-ABF3-C761A35E08AB}"/>
-              </a:ext>
-            </a:extLst>
-          </p:cNvPr>
-          <p:cNvSpPr txBox="1"/>
-          <p:nvPr/>
-        </p:nvSpPr>
-        <p:spPr>
-          <a:xfrm>
-            <a:off x="536994" y="1154358"/>
-            <a:ext cx="8270576" cy="1754326"/>
-          </a:xfrm>
-          <a:prstGeom prst="rect">
-            <a:avLst/>
-          </a:prstGeom>
-          <a:noFill/>
-        </p:spPr>
-        <p:txBody>
-          <a:bodyPr wrap="square">
-            <a:spAutoFit/>
-          </a:bodyPr>
-          <a:lstStyle/>
-          <a:p>
-            <a:pPr algn="l"/>
-            <a:r>
-              <a:rPr lang="pt-PT" b="0" i="0" u="none" strike="noStrike" dirty="0">
-                <a:solidFill>
-                  <a:srgbClr val="000000"/>
-                </a:solidFill>
-                <a:effectLst/>
-                <a:latin typeface="Georgia" panose="02040502050405020303" pitchFamily="18" charset="0"/>
-              </a:rPr>
-              <a:t>Os cálculos variam a depender do tipo de </a:t>
-            </a:r>
-            <a:r>
-              <a:rPr lang="pt-PT" b="0" i="0" u="none" strike="noStrike" dirty="0" err="1">
-                <a:solidFill>
-                  <a:srgbClr val="000000"/>
-                </a:solidFill>
-                <a:effectLst/>
-                <a:latin typeface="Georgia" panose="02040502050405020303" pitchFamily="18" charset="0"/>
-              </a:rPr>
-              <a:t>clusterização</a:t>
-            </a:r>
-            <a:r>
-              <a:rPr lang="pt-PT" b="0" i="0" u="none" strike="noStrike" dirty="0">
-                <a:solidFill>
-                  <a:srgbClr val="000000"/>
-                </a:solidFill>
-                <a:effectLst/>
-                <a:latin typeface="Georgia" panose="02040502050405020303" pitchFamily="18" charset="0"/>
-              </a:rPr>
-              <a:t> que é adotado. Veremos, a seguir, alguns tipos:</a:t>
-            </a:r>
-          </a:p>
-          <a:p>
-            <a:pPr algn="l">
-              <a:buFont typeface="Arial" panose="020B0604020202020204" pitchFamily="34" charset="0"/>
-              <a:buChar char="•"/>
-            </a:pPr>
-            <a:r>
-              <a:rPr lang="pt-PT" b="0" i="0" dirty="0">
-                <a:solidFill>
-                  <a:srgbClr val="000000"/>
-                </a:solidFill>
-                <a:effectLst/>
-                <a:latin typeface="Georgia" panose="02040502050405020303" pitchFamily="18" charset="0"/>
-              </a:rPr>
-              <a:t>modelos de conectividade;</a:t>
-            </a:r>
-            <a:endParaRPr lang="pt-PT" b="0" i="0" dirty="0">
+              <a:rPr lang="en-US" sz="4800" dirty="0" smtClean="0">
+                <a:solidFill>
+                  <a:schemeClr val="tx1"/>
+                </a:solidFill>
+              </a:rPr>
+              <a:t>Draft</a:t>
+            </a:r>
+            <a:endParaRPr lang="en-US" sz="4800" dirty="0">
               <a:solidFill>
-                <a:srgbClr val="000000"/>
+                <a:schemeClr val="tx1"/>
               </a:solidFill>
-              <a:effectLst/>
-              <a:latin typeface="Times New Roman" panose="02020603050405020304" pitchFamily="18" charset="0"/>
             </a:endParaRPr>
-          </a:p>
-          <a:p>
-            <a:pPr algn="l">
-              <a:buFont typeface="Arial" panose="020B0604020202020204" pitchFamily="34" charset="0"/>
-              <a:buChar char="•"/>
-            </a:pPr>
-            <a:r>
-              <a:rPr lang="pt-PT" b="0" i="0" dirty="0">
-                <a:solidFill>
-                  <a:srgbClr val="000000"/>
-                </a:solidFill>
-                <a:effectLst/>
-                <a:latin typeface="Georgia" panose="02040502050405020303" pitchFamily="18" charset="0"/>
-              </a:rPr>
-              <a:t>modelos de </a:t>
-            </a:r>
-            <a:r>
-              <a:rPr lang="pt-PT" b="0" i="0" dirty="0" err="1">
-                <a:solidFill>
-                  <a:srgbClr val="000000"/>
-                </a:solidFill>
-                <a:effectLst/>
-                <a:latin typeface="Georgia" panose="02040502050405020303" pitchFamily="18" charset="0"/>
-              </a:rPr>
-              <a:t>centróide</a:t>
-            </a:r>
-            <a:r>
-              <a:rPr lang="pt-PT" b="0" i="0" dirty="0">
-                <a:solidFill>
-                  <a:srgbClr val="000000"/>
-                </a:solidFill>
-                <a:effectLst/>
-                <a:latin typeface="Georgia" panose="02040502050405020303" pitchFamily="18" charset="0"/>
-              </a:rPr>
-              <a:t>;</a:t>
-            </a:r>
-            <a:endParaRPr lang="pt-PT" b="0" i="0" dirty="0">
-              <a:solidFill>
-                <a:srgbClr val="000000"/>
-              </a:solidFill>
-              <a:effectLst/>
-              <a:latin typeface="Times New Roman" panose="02020603050405020304" pitchFamily="18" charset="0"/>
-            </a:endParaRPr>
-          </a:p>
-          <a:p>
-            <a:pPr algn="l">
-              <a:buFont typeface="Arial" panose="020B0604020202020204" pitchFamily="34" charset="0"/>
-              <a:buChar char="•"/>
-            </a:pPr>
-            <a:r>
-              <a:rPr lang="pt-PT" b="0" i="0" dirty="0">
-                <a:solidFill>
-                  <a:srgbClr val="000000"/>
-                </a:solidFill>
-                <a:effectLst/>
-                <a:latin typeface="Georgia" panose="02040502050405020303" pitchFamily="18" charset="0"/>
-              </a:rPr>
-              <a:t>modelos de distribuição;</a:t>
-            </a:r>
-            <a:endParaRPr lang="pt-PT" b="0" i="0" dirty="0">
-              <a:solidFill>
-                <a:srgbClr val="000000"/>
-              </a:solidFill>
-              <a:effectLst/>
-              <a:latin typeface="Times New Roman" panose="02020603050405020304" pitchFamily="18" charset="0"/>
-            </a:endParaRPr>
-          </a:p>
-          <a:p>
-            <a:pPr algn="l">
-              <a:buFont typeface="Arial" panose="020B0604020202020204" pitchFamily="34" charset="0"/>
-              <a:buChar char="•"/>
-            </a:pPr>
-            <a:r>
-              <a:rPr lang="pt-PT" b="0" i="0" dirty="0">
-                <a:solidFill>
-                  <a:srgbClr val="000000"/>
-                </a:solidFill>
-                <a:effectLst/>
-                <a:latin typeface="Georgia" panose="02040502050405020303" pitchFamily="18" charset="0"/>
-              </a:rPr>
-              <a:t>modelos de densidade.</a:t>
-            </a:r>
-            <a:endParaRPr lang="pt-PT" b="0" i="0" dirty="0">
-              <a:solidFill>
-                <a:srgbClr val="000000"/>
-              </a:solidFill>
-              <a:effectLst/>
-              <a:latin typeface="Times New Roman" panose="02020603050405020304" pitchFamily="18" charset="0"/>
-            </a:endParaRPr>
-          </a:p>
-        </p:txBody>
-      </p:sp>
-      <p:sp>
-        <p:nvSpPr>
-          <p:cNvPr id="9" name="TextBox 8">
-            <a:extLst>
-              <a:ext uri="{FF2B5EF4-FFF2-40B4-BE49-F238E27FC236}">
-                <a16:creationId xmlns:a16="http://schemas.microsoft.com/office/drawing/2014/main" id="{327BFE51-F331-49AA-EA6D-B0B099F31F3A}"/>
-              </a:ext>
-            </a:extLst>
-          </p:cNvPr>
-          <p:cNvSpPr txBox="1"/>
-          <p:nvPr/>
-        </p:nvSpPr>
-        <p:spPr>
-          <a:xfrm>
-            <a:off x="813038" y="3174767"/>
-            <a:ext cx="10151135" cy="2308324"/>
-          </a:xfrm>
-          <a:prstGeom prst="rect">
-            <a:avLst/>
-          </a:prstGeom>
-          <a:noFill/>
-        </p:spPr>
-        <p:txBody>
-          <a:bodyPr wrap="square">
-            <a:spAutoFit/>
-          </a:bodyPr>
-          <a:lstStyle/>
-          <a:p>
-            <a:pPr algn="l"/>
-            <a:r>
-              <a:rPr lang="pt-PT" b="0" i="0" u="none" strike="noStrike" dirty="0">
-                <a:solidFill>
-                  <a:srgbClr val="000000"/>
-                </a:solidFill>
-                <a:effectLst/>
-                <a:latin typeface="Georgia" panose="02040502050405020303" pitchFamily="18" charset="0"/>
-              </a:rPr>
-              <a:t>Os dois definem classes para seus dados. A </a:t>
-            </a:r>
-            <a:r>
-              <a:rPr lang="pt-PT" b="1" i="0" u="none" strike="noStrike" dirty="0">
-                <a:solidFill>
-                  <a:srgbClr val="000000"/>
-                </a:solidFill>
-                <a:effectLst/>
-                <a:latin typeface="Georgia" panose="02040502050405020303" pitchFamily="18" charset="0"/>
-              </a:rPr>
-              <a:t>classificação</a:t>
-            </a:r>
-            <a:r>
-              <a:rPr lang="pt-PT" b="0" i="0" u="none" strike="noStrike" dirty="0">
-                <a:solidFill>
-                  <a:srgbClr val="000000"/>
-                </a:solidFill>
-                <a:effectLst/>
-                <a:latin typeface="Georgia" panose="02040502050405020303" pitchFamily="18" charset="0"/>
-              </a:rPr>
-              <a:t> agrupa os dados em determinadas categorias, ao passo que a </a:t>
-            </a:r>
-            <a:r>
-              <a:rPr lang="pt-PT" b="1" i="0" u="none" strike="noStrike" dirty="0" err="1">
-                <a:solidFill>
-                  <a:srgbClr val="000000"/>
-                </a:solidFill>
-                <a:effectLst/>
-                <a:latin typeface="Georgia" panose="02040502050405020303" pitchFamily="18" charset="0"/>
-              </a:rPr>
-              <a:t>clusterização</a:t>
-            </a:r>
-            <a:r>
-              <a:rPr lang="pt-PT" b="0" i="0" u="none" strike="noStrike" dirty="0">
-                <a:solidFill>
-                  <a:srgbClr val="000000"/>
-                </a:solidFill>
-                <a:effectLst/>
-                <a:latin typeface="Georgia" panose="02040502050405020303" pitchFamily="18" charset="0"/>
-              </a:rPr>
-              <a:t> utiliza a noção de clusters. </a:t>
-            </a:r>
-          </a:p>
-          <a:p>
-            <a:pPr algn="l"/>
-            <a:r>
-              <a:rPr lang="pt-PT" b="0" i="0" u="none" strike="noStrike" dirty="0">
-                <a:solidFill>
-                  <a:srgbClr val="000000"/>
-                </a:solidFill>
-                <a:effectLst/>
-                <a:latin typeface="Georgia" panose="02040502050405020303" pitchFamily="18" charset="0"/>
-              </a:rPr>
-              <a:t>Contudo,</a:t>
-            </a:r>
-            <a:r>
-              <a:rPr lang="pt-PT" b="1" i="0" u="none" strike="noStrike" dirty="0">
-                <a:solidFill>
-                  <a:srgbClr val="000000"/>
-                </a:solidFill>
-                <a:effectLst/>
-                <a:latin typeface="Georgia" panose="02040502050405020303" pitchFamily="18" charset="0"/>
-              </a:rPr>
-              <a:t> a principal diferença é a supervisão</a:t>
-            </a:r>
-            <a:r>
-              <a:rPr lang="pt-PT" b="0" i="0" u="none" strike="noStrike" dirty="0">
-                <a:solidFill>
-                  <a:srgbClr val="000000"/>
-                </a:solidFill>
-                <a:effectLst/>
-                <a:latin typeface="Georgia" panose="02040502050405020303" pitchFamily="18" charset="0"/>
-              </a:rPr>
-              <a:t>. A classificação é um clássico método supervisionado, em que o número de categorias para os dados é definido de antemão, com base nos dados de entrada. Ou seja, a pessoa cientista transmite dados com os rótulos prévios de saída, solicitando que o sistema aprenda como aqueles dados geram aquelas saídas. </a:t>
-            </a:r>
-          </a:p>
-          <a:p>
-            <a:pPr algn="l"/>
-            <a:endParaRPr lang="pt-PT" dirty="0">
-              <a:solidFill>
-                <a:srgbClr val="000000"/>
-              </a:solidFill>
-              <a:latin typeface="Georgia" panose="02040502050405020303" pitchFamily="18" charset="0"/>
-            </a:endParaRPr>
-          </a:p>
-          <a:p>
-            <a:pPr algn="l"/>
-            <a:r>
-              <a:rPr lang="pt-PT" b="0" i="0" u="none" strike="noStrike" dirty="0">
-                <a:solidFill>
-                  <a:srgbClr val="000000"/>
-                </a:solidFill>
-                <a:effectLst/>
-                <a:latin typeface="Georgia" panose="02040502050405020303" pitchFamily="18" charset="0"/>
-                <a:hlinkClick r:id="rId2"/>
-              </a:rPr>
-              <a:t>https://blog.somostera.com/data-science/clusteriza%C3%A7%C3%A3o-de-dados</a:t>
-            </a:r>
-            <a:r>
-              <a:rPr lang="pt-PT" b="0" i="0" u="none" strike="noStrike" dirty="0">
-                <a:solidFill>
-                  <a:srgbClr val="000000"/>
-                </a:solidFill>
-                <a:effectLst/>
-                <a:latin typeface="Georgia" panose="02040502050405020303" pitchFamily="18" charset="0"/>
-              </a:rPr>
-              <a:t> </a:t>
-            </a:r>
           </a:p>
         </p:txBody>
       </p:sp>
     </p:spTree>
     <p:extLst>
       <p:ext uri="{BB962C8B-B14F-4D97-AF65-F5344CB8AC3E}">
-        <p14:creationId xmlns:p14="http://schemas.microsoft.com/office/powerpoint/2010/main" val="1506274065"/>
+        <p14:creationId xmlns:p14="http://schemas.microsoft.com/office/powerpoint/2010/main" val="4058723400"/>
       </p:ext>
     </p:extLst>
   </p:cSld>
